--- a/TAZA/_документы/Структура ЦАКФ и проектного офиса ТК.pptx
+++ b/TAZA/_документы/Структура ЦАКФ и проектного офиса ТК.pptx
@@ -5045,7 +5045,7 @@
             </a:avLst>
           </a:prstGeom>
           <a:solidFill>
-            <a:srgbClr val="E9F3EA"/>
+            <a:srgbClr val="E6DFF3"/>
           </a:solidFill>
           <a:ln w="12700">
             <a:solidFill>
@@ -6862,7 +6862,7 @@
                 </a:solidFill>
                 <a:latin typeface="Segoe UI" panose="020B0502040204020203" pitchFamily="34" charset="0"/>
               </a:rPr>
-              <a:t>в 2026 — 23, с 02.2027 — +7</a:t>
+              <a:t>в 2026 — 18, в 2027 — +12</a:t>
             </a:r>
             <a:endParaRPr lang="ru-RU" sz="800" i="1" dirty="0">
               <a:solidFill>
@@ -6912,7 +6912,7 @@
             </a:avLst>
           </a:prstGeom>
           <a:solidFill>
-            <a:srgbClr val="E9F3EA"/>
+            <a:srgbClr val="E6DFF3"/>
           </a:solidFill>
           <a:ln w="12700">
             <a:solidFill>
@@ -6995,7 +6995,7 @@
             </a:avLst>
           </a:prstGeom>
           <a:solidFill>
-            <a:srgbClr val="F5F5F5"/>
+            <a:srgbClr val="E6DFF3"/>
           </a:solidFill>
           <a:ln w="12700">
             <a:solidFill>
@@ -7079,7 +7079,7 @@
             </a:avLst>
           </a:prstGeom>
           <a:solidFill>
-            <a:srgbClr val="D6E1EE"/>
+            <a:srgbClr val="E6DFF3"/>
           </a:solidFill>
           <a:ln w="12700">
             <a:solidFill>
@@ -7383,7 +7383,7 @@
                 </a:solidFill>
                 <a:latin typeface="Segoe UI" panose="020B0502040204020203" pitchFamily="34" charset="0"/>
               </a:rPr>
-              <a:t>в 2026 году — 23 чел.</a:t>
+              <a:t>в 2026 году — 18 чел.</a:t>
             </a:r>
             <a:r>
               <a:rPr lang="ru-RU" sz="1000" dirty="0">
@@ -7401,7 +7401,7 @@
                 </a:solidFill>
                 <a:latin typeface="Segoe UI" panose="020B0502040204020203" pitchFamily="34" charset="0"/>
               </a:rPr>
-              <a:t>7</a:t>
+              <a:t>12</a:t>
             </a:r>
             <a:r>
               <a:rPr lang="ru-RU" sz="1000" dirty="0">
@@ -7624,7 +7624,7 @@
             </a:avLst>
           </a:prstGeom>
           <a:solidFill>
-            <a:srgbClr val="D6E1EE"/>
+            <a:srgbClr val="E6DFF3"/>
           </a:solidFill>
           <a:ln w="12700">
             <a:solidFill>

--- a/TAZA/_документы/Структура ЦАКФ и проектного офиса ТК.pptx
+++ b/TAZA/_документы/Структура ЦАКФ и проектного офиса ТК.pptx
@@ -2929,7 +2929,7 @@
         </p:nvCxnSpPr>
         <p:spPr>
           <a:xfrm>
-            <a:off x="7404100" y="5740400"/>
+            <a:off x="7404100" y="6019800"/>
             <a:ext cx="0" cy="381000"/>
           </a:xfrm>
           <a:prstGeom prst="line">
@@ -2951,7 +2951,7 @@
         </p:nvCxnSpPr>
         <p:spPr>
           <a:xfrm>
-            <a:off x="4521200" y="4343400"/>
+            <a:off x="4521200" y="4622800"/>
             <a:ext cx="0" cy="1778000"/>
           </a:xfrm>
           <a:prstGeom prst="line">
@@ -2973,7 +2973,7 @@
         </p:nvCxnSpPr>
         <p:spPr>
           <a:xfrm>
-            <a:off x="4521200" y="6121400"/>
+            <a:off x="4521200" y="6400800"/>
             <a:ext cx="3949700" cy="0"/>
           </a:xfrm>
           <a:prstGeom prst="line">
@@ -2995,7 +2995,7 @@
         </p:nvCxnSpPr>
         <p:spPr>
           <a:xfrm>
-            <a:off x="8470900" y="3479800"/>
+            <a:off x="8470900" y="3759200"/>
             <a:ext cx="0" cy="2641600"/>
           </a:xfrm>
           <a:prstGeom prst="line">
@@ -3017,7 +3017,7 @@
         </p:nvCxnSpPr>
         <p:spPr>
           <a:xfrm>
-            <a:off x="2197100" y="5715000"/>
+            <a:off x="2197100" y="5994400"/>
             <a:ext cx="76200" cy="0"/>
           </a:xfrm>
           <a:prstGeom prst="line">
@@ -3038,7 +3038,7 @@
         </p:nvCxnSpPr>
         <p:spPr>
           <a:xfrm>
-            <a:off x="2197100" y="5245100"/>
+            <a:off x="2197100" y="5524500"/>
             <a:ext cx="76200" cy="0"/>
           </a:xfrm>
           <a:prstGeom prst="line">
@@ -3059,7 +3059,7 @@
         </p:nvCxnSpPr>
         <p:spPr>
           <a:xfrm>
-            <a:off x="2197100" y="4864100"/>
+            <a:off x="2197100" y="5143500"/>
             <a:ext cx="76200" cy="0"/>
           </a:xfrm>
           <a:prstGeom prst="line">
@@ -3080,7 +3080,7 @@
         </p:nvCxnSpPr>
         <p:spPr>
           <a:xfrm>
-            <a:off x="2197100" y="4432300"/>
+            <a:off x="2197100" y="4711700"/>
             <a:ext cx="76200" cy="0"/>
           </a:xfrm>
           <a:prstGeom prst="line">
@@ -3101,7 +3101,7 @@
         </p:nvCxnSpPr>
         <p:spPr>
           <a:xfrm>
-            <a:off x="2197100" y="3911600"/>
+            <a:off x="2197100" y="4191000"/>
             <a:ext cx="76200" cy="0"/>
           </a:xfrm>
           <a:prstGeom prst="line">
@@ -3122,7 +3122,7 @@
         </p:nvCxnSpPr>
         <p:spPr>
           <a:xfrm>
-            <a:off x="2197100" y="3352800"/>
+            <a:off x="2197100" y="3632200"/>
             <a:ext cx="76200" cy="0"/>
           </a:xfrm>
           <a:prstGeom prst="line">
@@ -3143,7 +3143,7 @@
         </p:nvCxnSpPr>
         <p:spPr>
           <a:xfrm>
-            <a:off x="2197100" y="2794000"/>
+            <a:off x="2197100" y="3073400"/>
             <a:ext cx="76200" cy="0"/>
           </a:xfrm>
           <a:prstGeom prst="line">
@@ -3164,7 +3164,7 @@
         </p:nvCxnSpPr>
         <p:spPr>
           <a:xfrm>
-            <a:off x="2273300" y="2336800"/>
+            <a:off x="2273300" y="2616200"/>
             <a:ext cx="0" cy="3378200"/>
           </a:xfrm>
           <a:prstGeom prst="line">
@@ -3185,7 +3185,7 @@
         </p:nvCxnSpPr>
         <p:spPr>
           <a:xfrm>
-            <a:off x="4445000" y="4343400"/>
+            <a:off x="4445000" y="4622800"/>
             <a:ext cx="76200" cy="0"/>
           </a:xfrm>
           <a:prstGeom prst="line">
@@ -3206,7 +3206,7 @@
         </p:nvCxnSpPr>
         <p:spPr>
           <a:xfrm>
-            <a:off x="4445000" y="3784600"/>
+            <a:off x="4445000" y="4064000"/>
             <a:ext cx="76200" cy="0"/>
           </a:xfrm>
           <a:prstGeom prst="line">
@@ -3227,7 +3227,7 @@
         </p:nvCxnSpPr>
         <p:spPr>
           <a:xfrm>
-            <a:off x="4445000" y="3225800"/>
+            <a:off x="4445000" y="3505200"/>
             <a:ext cx="76200" cy="0"/>
           </a:xfrm>
           <a:prstGeom prst="line">
@@ -3248,7 +3248,7 @@
         </p:nvCxnSpPr>
         <p:spPr>
           <a:xfrm>
-            <a:off x="4445000" y="2667000"/>
+            <a:off x="4445000" y="2946400"/>
             <a:ext cx="76200" cy="0"/>
           </a:xfrm>
           <a:prstGeom prst="line">
@@ -3269,7 +3269,7 @@
         </p:nvCxnSpPr>
         <p:spPr>
           <a:xfrm>
-            <a:off x="4521200" y="2336800"/>
+            <a:off x="4521200" y="2616200"/>
             <a:ext cx="0" cy="2006600"/>
           </a:xfrm>
           <a:prstGeom prst="line">
@@ -3290,7 +3290,7 @@
         </p:nvCxnSpPr>
         <p:spPr>
           <a:xfrm>
-            <a:off x="7315200" y="5740400"/>
+            <a:off x="7315200" y="6019800"/>
             <a:ext cx="88900" cy="0"/>
           </a:xfrm>
           <a:prstGeom prst="line">
@@ -3311,7 +3311,7 @@
         </p:nvCxnSpPr>
         <p:spPr>
           <a:xfrm>
-            <a:off x="7315200" y="5346700"/>
+            <a:off x="7315200" y="5626100"/>
             <a:ext cx="88900" cy="0"/>
           </a:xfrm>
           <a:prstGeom prst="line">
@@ -3332,7 +3332,7 @@
         </p:nvCxnSpPr>
         <p:spPr>
           <a:xfrm>
-            <a:off x="7315200" y="4953000"/>
+            <a:off x="7315200" y="5232400"/>
             <a:ext cx="88900" cy="0"/>
           </a:xfrm>
           <a:prstGeom prst="line">
@@ -3353,7 +3353,7 @@
         </p:nvCxnSpPr>
         <p:spPr>
           <a:xfrm>
-            <a:off x="7315200" y="4559300"/>
+            <a:off x="7315200" y="4838700"/>
             <a:ext cx="88900" cy="0"/>
           </a:xfrm>
           <a:prstGeom prst="line">
@@ -3374,7 +3374,7 @@
         </p:nvCxnSpPr>
         <p:spPr>
           <a:xfrm>
-            <a:off x="7315200" y="4165600"/>
+            <a:off x="7315200" y="4445000"/>
             <a:ext cx="88900" cy="0"/>
           </a:xfrm>
           <a:prstGeom prst="line">
@@ -3395,7 +3395,7 @@
         </p:nvCxnSpPr>
         <p:spPr>
           <a:xfrm>
-            <a:off x="7315200" y="3771900"/>
+            <a:off x="7315200" y="4051300"/>
             <a:ext cx="88900" cy="0"/>
           </a:xfrm>
           <a:prstGeom prst="line">
@@ -3416,7 +3416,7 @@
         </p:nvCxnSpPr>
         <p:spPr>
           <a:xfrm>
-            <a:off x="7315200" y="3378200"/>
+            <a:off x="7315200" y="3657600"/>
             <a:ext cx="88900" cy="0"/>
           </a:xfrm>
           <a:prstGeom prst="line">
@@ -3437,7 +3437,7 @@
         </p:nvCxnSpPr>
         <p:spPr>
           <a:xfrm>
-            <a:off x="7315200" y="2984500"/>
+            <a:off x="7315200" y="3263900"/>
             <a:ext cx="88900" cy="0"/>
           </a:xfrm>
           <a:prstGeom prst="line">
@@ -3458,7 +3458,7 @@
         </p:nvCxnSpPr>
         <p:spPr>
           <a:xfrm>
-            <a:off x="7315200" y="2590800"/>
+            <a:off x="7315200" y="2870200"/>
             <a:ext cx="88900" cy="0"/>
           </a:xfrm>
           <a:prstGeom prst="line">
@@ -3479,7 +3479,7 @@
         </p:nvCxnSpPr>
         <p:spPr>
           <a:xfrm>
-            <a:off x="7404100" y="2336800"/>
+            <a:off x="7404100" y="2616200"/>
             <a:ext cx="0" cy="3403600"/>
           </a:xfrm>
           <a:prstGeom prst="line">
@@ -3500,7 +3500,7 @@
         </p:nvCxnSpPr>
         <p:spPr>
           <a:xfrm>
-            <a:off x="9321800" y="3225800"/>
+            <a:off x="9321800" y="3505200"/>
             <a:ext cx="76200" cy="0"/>
           </a:xfrm>
           <a:prstGeom prst="line">
@@ -3521,7 +3521,7 @@
         </p:nvCxnSpPr>
         <p:spPr>
           <a:xfrm>
-            <a:off x="9321800" y="2667000"/>
+            <a:off x="9321800" y="2946400"/>
             <a:ext cx="76200" cy="0"/>
           </a:xfrm>
           <a:prstGeom prst="line">
@@ -3542,7 +3542,7 @@
         </p:nvCxnSpPr>
         <p:spPr>
           <a:xfrm>
-            <a:off x="9398000" y="2336800"/>
+            <a:off x="9398000" y="2616200"/>
             <a:ext cx="0" cy="889000"/>
           </a:xfrm>
           <a:prstGeom prst="line">
@@ -3563,8 +3563,8 @@
         </p:nvCxnSpPr>
         <p:spPr>
           <a:xfrm>
-            <a:off x="6007100" y="1549400"/>
-            <a:ext cx="0" cy="76200"/>
+            <a:off x="6007100" y="1854200"/>
+            <a:ext cx="0" cy="50800"/>
           </a:xfrm>
           <a:prstGeom prst="line">
             <a:avLst/>
@@ -3585,7 +3585,7 @@
         </p:nvCxnSpPr>
         <p:spPr>
           <a:xfrm>
-            <a:off x="6007100" y="1549400"/>
+            <a:off x="6007100" y="1854200"/>
             <a:ext cx="2438400" cy="0"/>
           </a:xfrm>
           <a:prstGeom prst="line">
@@ -3607,8 +3607,8 @@
         </p:nvCxnSpPr>
         <p:spPr>
           <a:xfrm>
-            <a:off x="8445500" y="1549400"/>
-            <a:ext cx="0" cy="76200"/>
+            <a:off x="8445500" y="1854200"/>
+            <a:ext cx="0" cy="50800"/>
           </a:xfrm>
           <a:prstGeom prst="line">
             <a:avLst/>
@@ -3628,7 +3628,7 @@
         </p:nvCxnSpPr>
         <p:spPr>
           <a:xfrm>
-            <a:off x="8445500" y="1549400"/>
+            <a:off x="8445500" y="1854200"/>
             <a:ext cx="1104900" cy="0"/>
           </a:xfrm>
           <a:prstGeom prst="line">
@@ -3649,8 +3649,8 @@
         </p:nvCxnSpPr>
         <p:spPr>
           <a:xfrm>
-            <a:off x="9550400" y="1549400"/>
-            <a:ext cx="0" cy="177800"/>
+            <a:off x="9550400" y="1460500"/>
+            <a:ext cx="0" cy="393700"/>
           </a:xfrm>
           <a:prstGeom prst="line">
             <a:avLst/>
@@ -3670,7 +3670,7 @@
         </p:nvCxnSpPr>
         <p:spPr>
           <a:xfrm>
-            <a:off x="9550400" y="1727200"/>
+            <a:off x="9550400" y="1460500"/>
             <a:ext cx="50800" cy="0"/>
           </a:xfrm>
           <a:prstGeom prst="line">
@@ -3691,8 +3691,8 @@
         </p:nvCxnSpPr>
         <p:spPr>
           <a:xfrm>
-            <a:off x="1289050" y="1460500"/>
-            <a:ext cx="0" cy="165100"/>
+            <a:off x="1289050" y="1803400"/>
+            <a:ext cx="0" cy="101600"/>
           </a:xfrm>
           <a:prstGeom prst="line">
             <a:avLst/>
@@ -3712,8 +3712,8 @@
         </p:nvCxnSpPr>
         <p:spPr>
           <a:xfrm>
-            <a:off x="3536950" y="1460500"/>
-            <a:ext cx="0" cy="165100"/>
+            <a:off x="3536950" y="1803400"/>
+            <a:ext cx="0" cy="101600"/>
           </a:xfrm>
           <a:prstGeom prst="line">
             <a:avLst/>
@@ -3733,8 +3733,8 @@
         </p:nvCxnSpPr>
         <p:spPr>
           <a:xfrm>
-            <a:off x="6108700" y="1460500"/>
-            <a:ext cx="0" cy="165100"/>
+            <a:off x="6108700" y="1803400"/>
+            <a:ext cx="0" cy="101600"/>
           </a:xfrm>
           <a:prstGeom prst="line">
             <a:avLst/>
@@ -3754,8 +3754,8 @@
         </p:nvCxnSpPr>
         <p:spPr>
           <a:xfrm>
-            <a:off x="8547100" y="1460500"/>
-            <a:ext cx="0" cy="165100"/>
+            <a:off x="8547100" y="1803400"/>
+            <a:ext cx="0" cy="101600"/>
           </a:xfrm>
           <a:prstGeom prst="line">
             <a:avLst/>
@@ -3776,7 +3776,7 @@
         </p:nvCxnSpPr>
         <p:spPr>
           <a:xfrm>
-            <a:off x="1289050" y="1460500"/>
+            <a:off x="1289050" y="1803400"/>
             <a:ext cx="4819650" cy="0"/>
           </a:xfrm>
           <a:prstGeom prst="line">
@@ -3797,7 +3797,7 @@
         </p:nvCxnSpPr>
         <p:spPr>
           <a:xfrm>
-            <a:off x="6108700" y="1460500"/>
+            <a:off x="6108700" y="1803400"/>
             <a:ext cx="2438400" cy="0"/>
           </a:xfrm>
           <a:prstGeom prst="line">
@@ -3819,8 +3819,8 @@
         </p:nvCxnSpPr>
         <p:spPr>
           <a:xfrm>
-            <a:off x="6108700" y="1295400"/>
-            <a:ext cx="0" cy="165100"/>
+            <a:off x="6108700" y="1752600"/>
+            <a:ext cx="0" cy="50800"/>
           </a:xfrm>
           <a:prstGeom prst="line">
             <a:avLst/>
@@ -3840,7 +3840,7 @@
         </p:nvCxnSpPr>
         <p:spPr>
           <a:xfrm>
-            <a:off x="2362200" y="1019810"/>
+            <a:off x="2362200" y="1358900"/>
             <a:ext cx="279400" cy="0"/>
           </a:xfrm>
           <a:prstGeom prst="line">
@@ -3861,7 +3861,7 @@
         </p:nvCxnSpPr>
         <p:spPr>
           <a:xfrm>
-            <a:off x="4419600" y="876300"/>
+            <a:off x="4419600" y="1409700"/>
             <a:ext cx="304800" cy="0"/>
           </a:xfrm>
           <a:prstGeom prst="line">
@@ -3882,8 +3882,29 @@
         </p:nvCxnSpPr>
         <p:spPr>
           <a:xfrm>
-            <a:off x="7493000" y="1168400"/>
-            <a:ext cx="2108200" cy="0"/>
+            <a:off x="6108700" y="1003300"/>
+            <a:ext cx="3492500" cy="0"/>
+          </a:xfrm>
+          <a:prstGeom prst="line">
+            <a:avLst/>
+          </a:prstGeom>
+          <a:ln w="15875">
+            <a:solidFill>
+              <a:srgbClr val="227838"/>
+            </a:solidFill>
+          </a:ln>
+        </p:spPr>
+      </p:cxnSp>
+      <p:cxnSp>
+        <p:nvCxnSpPr>
+          <p:cNvPr id="453" name="Линия 453"/>
+          <p:cNvCxnSpPr/>
+          <p:nvPr/>
+        </p:nvCxnSpPr>
+        <p:spPr>
+          <a:xfrm>
+            <a:off x="6108700" y="1003300"/>
+            <a:ext cx="0" cy="266700"/>
           </a:xfrm>
           <a:prstGeom prst="line">
             <a:avLst/>
@@ -3903,7 +3924,7 @@
         </p:nvCxnSpPr>
         <p:spPr>
           <a:xfrm>
-            <a:off x="11607800" y="4279900"/>
+            <a:off x="11607800" y="3924300"/>
             <a:ext cx="25400" cy="0"/>
           </a:xfrm>
           <a:prstGeom prst="line">
@@ -3924,7 +3945,7 @@
         </p:nvCxnSpPr>
         <p:spPr>
           <a:xfrm>
-            <a:off x="11633200" y="4064000"/>
+            <a:off x="11633200" y="3708400"/>
             <a:ext cx="0" cy="215900"/>
           </a:xfrm>
           <a:prstGeom prst="line">
@@ -3945,7 +3966,7 @@
         </p:nvCxnSpPr>
         <p:spPr>
           <a:xfrm>
-            <a:off x="11607800" y="3467100"/>
+            <a:off x="11607800" y="3111500"/>
             <a:ext cx="25400" cy="0"/>
           </a:xfrm>
           <a:prstGeom prst="line">
@@ -3966,7 +3987,7 @@
         </p:nvCxnSpPr>
         <p:spPr>
           <a:xfrm>
-            <a:off x="11607800" y="3136900"/>
+            <a:off x="11607800" y="2781300"/>
             <a:ext cx="25400" cy="0"/>
           </a:xfrm>
           <a:prstGeom prst="line">
@@ -3987,7 +4008,7 @@
         </p:nvCxnSpPr>
         <p:spPr>
           <a:xfrm>
-            <a:off x="11633200" y="2946400"/>
+            <a:off x="11633200" y="2590800"/>
             <a:ext cx="0" cy="520700"/>
           </a:xfrm>
           <a:prstGeom prst="line">
@@ -4008,7 +4029,7 @@
         </p:nvCxnSpPr>
         <p:spPr>
           <a:xfrm>
-            <a:off x="11607800" y="2209800"/>
+            <a:off x="11607800" y="1854200"/>
             <a:ext cx="25400" cy="0"/>
           </a:xfrm>
           <a:prstGeom prst="line">
@@ -4029,7 +4050,7 @@
         </p:nvCxnSpPr>
         <p:spPr>
           <a:xfrm>
-            <a:off x="11633200" y="2006600"/>
+            <a:off x="11633200" y="1651000"/>
             <a:ext cx="0" cy="203200"/>
           </a:xfrm>
           <a:prstGeom prst="line">
@@ -4050,7 +4071,7 @@
         </p:nvCxnSpPr>
         <p:spPr>
           <a:xfrm>
-            <a:off x="11734800" y="3898900"/>
+            <a:off x="11734800" y="3543300"/>
             <a:ext cx="127000" cy="0"/>
           </a:xfrm>
           <a:prstGeom prst="line">
@@ -4071,7 +4092,7 @@
         </p:nvCxnSpPr>
         <p:spPr>
           <a:xfrm>
-            <a:off x="11734800" y="2705100"/>
+            <a:off x="11734800" y="2349500"/>
             <a:ext cx="127000" cy="0"/>
           </a:xfrm>
           <a:prstGeom prst="line">
@@ -4092,7 +4113,7 @@
         </p:nvCxnSpPr>
         <p:spPr>
           <a:xfrm>
-            <a:off x="11734800" y="1816100"/>
+            <a:off x="11734800" y="1460500"/>
             <a:ext cx="127000" cy="0"/>
           </a:xfrm>
           <a:prstGeom prst="line">
@@ -4113,8 +4134,8 @@
         </p:nvCxnSpPr>
         <p:spPr>
           <a:xfrm>
-            <a:off x="11861800" y="1447800"/>
-            <a:ext cx="0" cy="2451100"/>
+            <a:off x="11861800" y="1219200"/>
+            <a:ext cx="0" cy="2324100"/>
           </a:xfrm>
           <a:prstGeom prst="line">
             <a:avLst/>
@@ -4134,8 +4155,8 @@
         </p:nvCxnSpPr>
         <p:spPr>
           <a:xfrm>
-            <a:off x="10782300" y="914400"/>
-            <a:ext cx="0" cy="101600"/>
+            <a:off x="10782300" y="762000"/>
+            <a:ext cx="0" cy="25400"/>
           </a:xfrm>
           <a:prstGeom prst="line">
             <a:avLst/>
@@ -4167,7 +4188,7 @@
         </p:blipFill>
         <p:spPr>
           <a:xfrm>
-            <a:off x="228600" y="76200"/>
+            <a:off x="10769600" y="76200"/>
             <a:ext cx="1219200" cy="419100"/>
           </a:xfrm>
           <a:prstGeom prst="rect">
@@ -4195,7 +4216,7 @@
         </p:blipFill>
         <p:spPr>
           <a:xfrm>
-            <a:off x="11480800" y="50800"/>
+            <a:off x="228600" y="50800"/>
             <a:ext cx="508000" cy="457200"/>
           </a:xfrm>
           <a:prstGeom prst="rect">
@@ -4262,8 +4283,8 @@
         </p:nvSpPr>
         <p:spPr>
           <a:xfrm>
-            <a:off x="9601200" y="558800"/>
-            <a:ext cx="2362200" cy="355600"/>
+            <a:off x="9601200" y="508000"/>
+            <a:ext cx="2362200" cy="254000"/>
           </a:xfrm>
           <a:prstGeom prst="roundRect">
             <a:avLst>
@@ -4314,7 +4335,7 @@
         </p:nvSpPr>
         <p:spPr>
           <a:xfrm>
-            <a:off x="9601200" y="1016000"/>
+            <a:off x="9601200" y="787400"/>
             <a:ext cx="2362200" cy="431800"/>
           </a:xfrm>
           <a:prstGeom prst="roundRect">
@@ -4388,7 +4409,7 @@
         </p:nvSpPr>
         <p:spPr>
           <a:xfrm>
-            <a:off x="9601200" y="1625600"/>
+            <a:off x="9601200" y="1270000"/>
             <a:ext cx="2133600" cy="381000"/>
           </a:xfrm>
           <a:prstGeom prst="roundRect">
@@ -4471,7 +4492,7 @@
         </p:nvSpPr>
         <p:spPr>
           <a:xfrm>
-            <a:off x="9601200" y="2463800"/>
+            <a:off x="9601200" y="2108200"/>
             <a:ext cx="2133600" cy="482600"/>
           </a:xfrm>
           <a:prstGeom prst="roundRect">
@@ -4579,7 +4600,7 @@
         </p:nvSpPr>
         <p:spPr>
           <a:xfrm>
-            <a:off x="9601200" y="3733800"/>
+            <a:off x="9601200" y="3378200"/>
             <a:ext cx="2133600" cy="330200"/>
           </a:xfrm>
           <a:prstGeom prst="roundRect">
@@ -4665,7 +4686,7 @@
         </p:nvSpPr>
         <p:spPr>
           <a:xfrm>
-            <a:off x="9601200" y="4114800"/>
+            <a:off x="9601200" y="3759200"/>
             <a:ext cx="2006600" cy="330200"/>
           </a:xfrm>
           <a:prstGeom prst="roundRect">
@@ -4749,8 +4770,8 @@
         </p:nvSpPr>
         <p:spPr>
           <a:xfrm>
-            <a:off x="4724400" y="711200"/>
-            <a:ext cx="2768600" cy="330200"/>
+            <a:off x="4724400" y="1270000"/>
+            <a:ext cx="2768600" cy="279400"/>
           </a:xfrm>
           <a:prstGeom prst="roundRect">
             <a:avLst>
@@ -4801,8 +4822,8 @@
         </p:nvSpPr>
         <p:spPr>
           <a:xfrm>
-            <a:off x="4724400" y="1041400"/>
-            <a:ext cx="2768600" cy="254000"/>
+            <a:off x="4724400" y="1549400"/>
+            <a:ext cx="2768600" cy="203200"/>
           </a:xfrm>
           <a:prstGeom prst="roundRect">
             <a:avLst>
@@ -4862,7 +4883,7 @@
         </p:nvSpPr>
         <p:spPr>
           <a:xfrm>
-            <a:off x="2641600" y="850900"/>
+            <a:off x="2641600" y="1270000"/>
             <a:ext cx="1778000" cy="190500"/>
           </a:xfrm>
           <a:prstGeom prst="roundRect">
@@ -4914,7 +4935,7 @@
         </p:nvSpPr>
         <p:spPr>
           <a:xfrm>
-            <a:off x="2641600" y="1041400"/>
+            <a:off x="2641600" y="1460500"/>
             <a:ext cx="1778000" cy="254000"/>
           </a:xfrm>
           <a:prstGeom prst="roundRect">
@@ -4984,7 +5005,7 @@
         </p:nvSpPr>
         <p:spPr>
           <a:xfrm>
-            <a:off x="2476500" y="1625600"/>
+            <a:off x="2476500" y="1905000"/>
             <a:ext cx="2120900" cy="508000"/>
           </a:xfrm>
           <a:prstGeom prst="roundRect">
@@ -5036,7 +5057,7 @@
         </p:nvSpPr>
         <p:spPr>
           <a:xfrm>
-            <a:off x="2476500" y="2082800"/>
+            <a:off x="2476500" y="2362200"/>
             <a:ext cx="2120900" cy="254000"/>
           </a:xfrm>
           <a:prstGeom prst="roundRect">
@@ -5106,7 +5127,7 @@
         </p:nvSpPr>
         <p:spPr>
           <a:xfrm>
-            <a:off x="4724400" y="1625600"/>
+            <a:off x="4724400" y="1905000"/>
             <a:ext cx="2768600" cy="508000"/>
           </a:xfrm>
           <a:prstGeom prst="roundRect">
@@ -5158,7 +5179,7 @@
         </p:nvSpPr>
         <p:spPr>
           <a:xfrm>
-            <a:off x="4724400" y="2082800"/>
+            <a:off x="4724400" y="2362200"/>
             <a:ext cx="2768600" cy="254000"/>
           </a:xfrm>
           <a:prstGeom prst="roundRect">
@@ -5228,7 +5249,7 @@
         </p:nvSpPr>
         <p:spPr>
           <a:xfrm>
-            <a:off x="228600" y="1625600"/>
+            <a:off x="228600" y="1905000"/>
             <a:ext cx="2120900" cy="508000"/>
           </a:xfrm>
           <a:prstGeom prst="roundRect">
@@ -5280,7 +5301,7 @@
         </p:nvSpPr>
         <p:spPr>
           <a:xfrm>
-            <a:off x="228600" y="2082800"/>
+            <a:off x="228600" y="2362200"/>
             <a:ext cx="2120900" cy="381000"/>
           </a:xfrm>
           <a:prstGeom prst="roundRect">
@@ -5358,7 +5379,7 @@
         </p:nvSpPr>
         <p:spPr>
           <a:xfrm>
-            <a:off x="2476500" y="2413000"/>
+            <a:off x="2476500" y="2692400"/>
             <a:ext cx="1968500" cy="508000"/>
           </a:xfrm>
           <a:prstGeom prst="roundRect">
@@ -5441,7 +5462,7 @@
         </p:nvSpPr>
         <p:spPr>
           <a:xfrm>
-            <a:off x="2476500" y="2971800"/>
+            <a:off x="2476500" y="3251200"/>
             <a:ext cx="1968500" cy="508000"/>
           </a:xfrm>
           <a:prstGeom prst="roundRect">
@@ -5532,7 +5553,7 @@
         </p:nvSpPr>
         <p:spPr>
           <a:xfrm>
-            <a:off x="2476500" y="3530600"/>
+            <a:off x="2476500" y="3810000"/>
             <a:ext cx="1968500" cy="508000"/>
           </a:xfrm>
           <a:prstGeom prst="roundRect">
@@ -5615,7 +5636,7 @@
         </p:nvSpPr>
         <p:spPr>
           <a:xfrm>
-            <a:off x="2476500" y="4089400"/>
+            <a:off x="2476500" y="4368800"/>
             <a:ext cx="1968500" cy="508000"/>
           </a:xfrm>
           <a:prstGeom prst="roundRect">
@@ -5698,7 +5719,7 @@
         </p:nvSpPr>
         <p:spPr>
           <a:xfrm>
-            <a:off x="4724400" y="2806700"/>
+            <a:off x="4724400" y="3086100"/>
             <a:ext cx="2590800" cy="355600"/>
           </a:xfrm>
           <a:prstGeom prst="roundRect">
@@ -5781,7 +5802,7 @@
         </p:nvSpPr>
         <p:spPr>
           <a:xfrm>
-            <a:off x="4724400" y="4775200"/>
+            <a:off x="4724400" y="5054600"/>
             <a:ext cx="2590800" cy="355600"/>
           </a:xfrm>
           <a:prstGeom prst="roundRect">
@@ -5864,7 +5885,7 @@
         </p:nvSpPr>
         <p:spPr>
           <a:xfrm>
-            <a:off x="4724400" y="3200400"/>
+            <a:off x="4724400" y="3479800"/>
             <a:ext cx="2590800" cy="355600"/>
           </a:xfrm>
           <a:prstGeom prst="roundRect">
@@ -5947,7 +5968,7 @@
         </p:nvSpPr>
         <p:spPr>
           <a:xfrm>
-            <a:off x="4724400" y="3594100"/>
+            <a:off x="4724400" y="3873500"/>
             <a:ext cx="2590800" cy="355600"/>
           </a:xfrm>
           <a:prstGeom prst="roundRect">
@@ -6030,7 +6051,7 @@
         </p:nvSpPr>
         <p:spPr>
           <a:xfrm>
-            <a:off x="4724400" y="3987800"/>
+            <a:off x="4724400" y="4267200"/>
             <a:ext cx="2590800" cy="355600"/>
           </a:xfrm>
           <a:prstGeom prst="roundRect">
@@ -6113,7 +6134,7 @@
         </p:nvSpPr>
         <p:spPr>
           <a:xfrm>
-            <a:off x="4724400" y="5168900"/>
+            <a:off x="4724400" y="5448300"/>
             <a:ext cx="2590800" cy="355600"/>
           </a:xfrm>
           <a:prstGeom prst="roundRect">
@@ -6196,7 +6217,7 @@
         </p:nvSpPr>
         <p:spPr>
           <a:xfrm>
-            <a:off x="4724400" y="5562600"/>
+            <a:off x="4724400" y="5842000"/>
             <a:ext cx="2590800" cy="355600"/>
           </a:xfrm>
           <a:prstGeom prst="roundRect">
@@ -6279,7 +6300,7 @@
         </p:nvSpPr>
         <p:spPr>
           <a:xfrm>
-            <a:off x="228600" y="2540000"/>
+            <a:off x="228600" y="2819400"/>
             <a:ext cx="1968500" cy="508000"/>
           </a:xfrm>
           <a:prstGeom prst="roundRect">
@@ -6362,7 +6383,7 @@
         </p:nvSpPr>
         <p:spPr>
           <a:xfrm>
-            <a:off x="228600" y="3098800"/>
+            <a:off x="228600" y="3378200"/>
             <a:ext cx="1968500" cy="508000"/>
           </a:xfrm>
           <a:prstGeom prst="roundRect">
@@ -6445,7 +6466,7 @@
         </p:nvSpPr>
         <p:spPr>
           <a:xfrm>
-            <a:off x="228600" y="3657600"/>
+            <a:off x="228600" y="3937000"/>
             <a:ext cx="1968500" cy="508000"/>
           </a:xfrm>
           <a:prstGeom prst="roundRect">
@@ -6528,7 +6549,7 @@
         </p:nvSpPr>
         <p:spPr>
           <a:xfrm>
-            <a:off x="228600" y="4216400"/>
+            <a:off x="228600" y="4495800"/>
             <a:ext cx="1968500" cy="431800"/>
           </a:xfrm>
           <a:prstGeom prst="roundRect">
@@ -6590,7 +6611,7 @@
         </p:nvSpPr>
         <p:spPr>
           <a:xfrm>
-            <a:off x="228600" y="4699000"/>
+            <a:off x="228600" y="4978400"/>
             <a:ext cx="1968500" cy="330200"/>
           </a:xfrm>
           <a:prstGeom prst="roundRect">
@@ -6652,7 +6673,7 @@
         </p:nvSpPr>
         <p:spPr>
           <a:xfrm>
-            <a:off x="228600" y="5080000"/>
+            <a:off x="228600" y="5359400"/>
             <a:ext cx="1968500" cy="330200"/>
           </a:xfrm>
           <a:prstGeom prst="roundRect">
@@ -6714,7 +6735,7 @@
         </p:nvSpPr>
         <p:spPr>
           <a:xfrm>
-            <a:off x="228600" y="5461000"/>
+            <a:off x="228600" y="5740400"/>
             <a:ext cx="1968500" cy="508000"/>
           </a:xfrm>
           <a:prstGeom prst="roundRect">
@@ -6903,7 +6924,7 @@
         </p:nvSpPr>
         <p:spPr>
           <a:xfrm>
-            <a:off x="4724400" y="4381500"/>
+            <a:off x="4724400" y="4660900"/>
             <a:ext cx="2590800" cy="355600"/>
           </a:xfrm>
           <a:prstGeom prst="roundRect">
@@ -6986,7 +7007,7 @@
         </p:nvSpPr>
         <p:spPr>
           <a:xfrm>
-            <a:off x="7620000" y="2971800"/>
+            <a:off x="7620000" y="3251200"/>
             <a:ext cx="1701800" cy="508000"/>
           </a:xfrm>
           <a:prstGeom prst="roundRect">
@@ -7070,7 +7091,7 @@
         </p:nvSpPr>
         <p:spPr>
           <a:xfrm>
-            <a:off x="7620000" y="2413000"/>
+            <a:off x="7620000" y="2692400"/>
             <a:ext cx="1701800" cy="508000"/>
           </a:xfrm>
           <a:prstGeom prst="roundRect">
@@ -7161,7 +7182,7 @@
         </p:nvSpPr>
         <p:spPr>
           <a:xfrm>
-            <a:off x="882015" y="889000"/>
+            <a:off x="882015" y="1244600"/>
             <a:ext cx="1480185" cy="508000"/>
           </a:xfrm>
           <a:prstGeom prst="roundRect">
@@ -7223,7 +7244,7 @@
         </p:nvSpPr>
         <p:spPr>
           <a:xfrm>
-            <a:off x="9601200" y="3327400"/>
+            <a:off x="9601200" y="2971800"/>
             <a:ext cx="2006600" cy="279400"/>
           </a:xfrm>
           <a:prstGeom prst="roundRect">
@@ -7354,7 +7375,7 @@
         </p:nvSpPr>
         <p:spPr>
           <a:xfrm>
-            <a:off x="228600" y="6299200"/>
+            <a:off x="228600" y="6502400"/>
             <a:ext cx="11734800" cy="177800"/>
           </a:xfrm>
           <a:prstGeom prst="rect">
@@ -7438,7 +7459,7 @@
         </p:nvSpPr>
         <p:spPr>
           <a:xfrm>
-            <a:off x="9601200" y="2057400"/>
+            <a:off x="9601200" y="1701800"/>
             <a:ext cx="2006600" cy="304800"/>
           </a:xfrm>
           <a:prstGeom prst="roundRect">
@@ -7499,7 +7520,7 @@
         </p:nvSpPr>
         <p:spPr>
           <a:xfrm>
-            <a:off x="9601200" y="2997200"/>
+            <a:off x="9601200" y="2641600"/>
             <a:ext cx="2006600" cy="279400"/>
           </a:xfrm>
           <a:prstGeom prst="roundRect">
@@ -7561,7 +7582,7 @@
         </p:nvSpPr>
         <p:spPr>
           <a:xfrm>
-            <a:off x="7620000" y="1625600"/>
+            <a:off x="7620000" y="1905000"/>
             <a:ext cx="1854200" cy="508000"/>
           </a:xfrm>
           <a:prstGeom prst="roundRect">
@@ -7615,7 +7636,7 @@
         </p:nvSpPr>
         <p:spPr>
           <a:xfrm>
-            <a:off x="7620000" y="2082800"/>
+            <a:off x="7620000" y="2362200"/>
             <a:ext cx="1854200" cy="254000"/>
           </a:xfrm>
           <a:prstGeom prst="roundRect">
@@ -7685,7 +7706,7 @@
         </p:nvSpPr>
         <p:spPr>
           <a:xfrm>
-            <a:off x="4724400" y="2413000"/>
+            <a:off x="4724400" y="2692400"/>
             <a:ext cx="2590800" cy="355600"/>
           </a:xfrm>
           <a:prstGeom prst="roundRect">

--- a/TAZA/_документы/Структура ЦАКФ и проектного офиса ТК.pptx
+++ b/TAZA/_документы/Структура ЦАКФ и проектного офиса ТК.pptx
@@ -5,7 +5,7 @@
     <p:sldMasterId id="2147483648" r:id="rId1"/>
   </p:sldMasterIdLst>
   <p:sldIdLst>
-    <p:sldId id="256" r:id="rId3"/>
+    <p:sldId id="256" r:id="rId2"/>
   </p:sldIdLst>
   <p:sldSz cx="12192000" cy="6858000"/>
   <p:notesSz cx="6858000" cy="9144000"/>
@@ -238,6 +238,7 @@
           <a:p>
             <a:fld id="{C2BA13B7-D241-4424-B4BE-2E78B20DBCAC}" type="datetimeFigureOut">
               <a:rPr lang="ru-RU" smtClean="0"/>
+              <a:t>14.10.2026</a:t>
             </a:fld>
             <a:endParaRPr lang="ru-RU"/>
           </a:p>
@@ -279,6 +280,7 @@
           <a:p>
             <a:fld id="{C429094C-EE5E-46D5-9F99-8551D18087AF}" type="slidenum">
               <a:rPr lang="ru-RU" smtClean="0"/>
+              <a:t>‹#›</a:t>
             </a:fld>
             <a:endParaRPr lang="ru-RU"/>
           </a:p>
@@ -352,7 +354,6 @@
               <a:rPr lang="ru-RU" smtClean="0"/>
               <a:t>Образец текста</a:t>
             </a:r>
-            <a:endParaRPr lang="ru-RU" smtClean="0"/>
           </a:p>
           <a:p>
             <a:pPr lvl="1"/>
@@ -360,7 +361,6 @@
               <a:rPr lang="ru-RU" smtClean="0"/>
               <a:t>Второй уровень</a:t>
             </a:r>
-            <a:endParaRPr lang="ru-RU" smtClean="0"/>
           </a:p>
           <a:p>
             <a:pPr lvl="2"/>
@@ -368,7 +368,6 @@
               <a:rPr lang="ru-RU" smtClean="0"/>
               <a:t>Третий уровень</a:t>
             </a:r>
-            <a:endParaRPr lang="ru-RU" smtClean="0"/>
           </a:p>
           <a:p>
             <a:pPr lvl="3"/>
@@ -376,7 +375,6 @@
               <a:rPr lang="ru-RU" smtClean="0"/>
               <a:t>Четвертый уровень</a:t>
             </a:r>
-            <a:endParaRPr lang="ru-RU" smtClean="0"/>
           </a:p>
           <a:p>
             <a:pPr lvl="4"/>
@@ -405,6 +403,7 @@
           <a:p>
             <a:fld id="{C2BA13B7-D241-4424-B4BE-2E78B20DBCAC}" type="datetimeFigureOut">
               <a:rPr lang="ru-RU" smtClean="0"/>
+              <a:t>14.10.2026</a:t>
             </a:fld>
             <a:endParaRPr lang="ru-RU"/>
           </a:p>
@@ -446,6 +445,7 @@
           <a:p>
             <a:fld id="{C429094C-EE5E-46D5-9F99-8551D18087AF}" type="slidenum">
               <a:rPr lang="ru-RU" smtClean="0"/>
+              <a:t>‹#›</a:t>
             </a:fld>
             <a:endParaRPr lang="ru-RU"/>
           </a:p>
@@ -529,7 +529,6 @@
               <a:rPr lang="ru-RU" smtClean="0"/>
               <a:t>Образец текста</a:t>
             </a:r>
-            <a:endParaRPr lang="ru-RU" smtClean="0"/>
           </a:p>
           <a:p>
             <a:pPr lvl="1"/>
@@ -537,7 +536,6 @@
               <a:rPr lang="ru-RU" smtClean="0"/>
               <a:t>Второй уровень</a:t>
             </a:r>
-            <a:endParaRPr lang="ru-RU" smtClean="0"/>
           </a:p>
           <a:p>
             <a:pPr lvl="2"/>
@@ -545,7 +543,6 @@
               <a:rPr lang="ru-RU" smtClean="0"/>
               <a:t>Третий уровень</a:t>
             </a:r>
-            <a:endParaRPr lang="ru-RU" smtClean="0"/>
           </a:p>
           <a:p>
             <a:pPr lvl="3"/>
@@ -553,7 +550,6 @@
               <a:rPr lang="ru-RU" smtClean="0"/>
               <a:t>Четвертый уровень</a:t>
             </a:r>
-            <a:endParaRPr lang="ru-RU" smtClean="0"/>
           </a:p>
           <a:p>
             <a:pPr lvl="4"/>
@@ -582,6 +578,7 @@
           <a:p>
             <a:fld id="{C2BA13B7-D241-4424-B4BE-2E78B20DBCAC}" type="datetimeFigureOut">
               <a:rPr lang="ru-RU" smtClean="0"/>
+              <a:t>14.10.2026</a:t>
             </a:fld>
             <a:endParaRPr lang="ru-RU"/>
           </a:p>
@@ -623,6 +620,7 @@
           <a:p>
             <a:fld id="{C429094C-EE5E-46D5-9F99-8551D18087AF}" type="slidenum">
               <a:rPr lang="ru-RU" smtClean="0"/>
+              <a:t>‹#›</a:t>
             </a:fld>
             <a:endParaRPr lang="ru-RU"/>
           </a:p>
@@ -696,7 +694,6 @@
               <a:rPr lang="ru-RU" smtClean="0"/>
               <a:t>Образец текста</a:t>
             </a:r>
-            <a:endParaRPr lang="ru-RU" smtClean="0"/>
           </a:p>
           <a:p>
             <a:pPr lvl="1"/>
@@ -704,7 +701,6 @@
               <a:rPr lang="ru-RU" smtClean="0"/>
               <a:t>Второй уровень</a:t>
             </a:r>
-            <a:endParaRPr lang="ru-RU" smtClean="0"/>
           </a:p>
           <a:p>
             <a:pPr lvl="2"/>
@@ -712,7 +708,6 @@
               <a:rPr lang="ru-RU" smtClean="0"/>
               <a:t>Третий уровень</a:t>
             </a:r>
-            <a:endParaRPr lang="ru-RU" smtClean="0"/>
           </a:p>
           <a:p>
             <a:pPr lvl="3"/>
@@ -720,7 +715,6 @@
               <a:rPr lang="ru-RU" smtClean="0"/>
               <a:t>Четвертый уровень</a:t>
             </a:r>
-            <a:endParaRPr lang="ru-RU" smtClean="0"/>
           </a:p>
           <a:p>
             <a:pPr lvl="4"/>
@@ -749,6 +743,7 @@
           <a:p>
             <a:fld id="{C2BA13B7-D241-4424-B4BE-2E78B20DBCAC}" type="datetimeFigureOut">
               <a:rPr lang="ru-RU" smtClean="0"/>
+              <a:t>14.10.2026</a:t>
             </a:fld>
             <a:endParaRPr lang="ru-RU"/>
           </a:p>
@@ -790,6 +785,7 @@
           <a:p>
             <a:fld id="{C429094C-EE5E-46D5-9F99-8551D18087AF}" type="slidenum">
               <a:rPr lang="ru-RU" smtClean="0"/>
+              <a:t>‹#›</a:t>
             </a:fld>
             <a:endParaRPr lang="ru-RU"/>
           </a:p>
@@ -968,7 +964,6 @@
               <a:rPr lang="ru-RU" smtClean="0"/>
               <a:t>Образец текста</a:t>
             </a:r>
-            <a:endParaRPr lang="ru-RU" smtClean="0"/>
           </a:p>
         </p:txBody>
       </p:sp>
@@ -989,6 +984,7 @@
           <a:p>
             <a:fld id="{C2BA13B7-D241-4424-B4BE-2E78B20DBCAC}" type="datetimeFigureOut">
               <a:rPr lang="ru-RU" smtClean="0"/>
+              <a:t>14.10.2026</a:t>
             </a:fld>
             <a:endParaRPr lang="ru-RU"/>
           </a:p>
@@ -1030,6 +1026,7 @@
           <a:p>
             <a:fld id="{C429094C-EE5E-46D5-9F99-8551D18087AF}" type="slidenum">
               <a:rPr lang="ru-RU" smtClean="0"/>
+              <a:t>‹#›</a:t>
             </a:fld>
             <a:endParaRPr lang="ru-RU"/>
           </a:p>
@@ -1108,7 +1105,6 @@
               <a:rPr lang="ru-RU" smtClean="0"/>
               <a:t>Образец текста</a:t>
             </a:r>
-            <a:endParaRPr lang="ru-RU" smtClean="0"/>
           </a:p>
           <a:p>
             <a:pPr lvl="1"/>
@@ -1116,7 +1112,6 @@
               <a:rPr lang="ru-RU" smtClean="0"/>
               <a:t>Второй уровень</a:t>
             </a:r>
-            <a:endParaRPr lang="ru-RU" smtClean="0"/>
           </a:p>
           <a:p>
             <a:pPr lvl="2"/>
@@ -1124,7 +1119,6 @@
               <a:rPr lang="ru-RU" smtClean="0"/>
               <a:t>Третий уровень</a:t>
             </a:r>
-            <a:endParaRPr lang="ru-RU" smtClean="0"/>
           </a:p>
           <a:p>
             <a:pPr lvl="3"/>
@@ -1132,7 +1126,6 @@
               <a:rPr lang="ru-RU" smtClean="0"/>
               <a:t>Четвертый уровень</a:t>
             </a:r>
-            <a:endParaRPr lang="ru-RU" smtClean="0"/>
           </a:p>
           <a:p>
             <a:pPr lvl="4"/>
@@ -1169,7 +1162,6 @@
               <a:rPr lang="ru-RU" smtClean="0"/>
               <a:t>Образец текста</a:t>
             </a:r>
-            <a:endParaRPr lang="ru-RU" smtClean="0"/>
           </a:p>
           <a:p>
             <a:pPr lvl="1"/>
@@ -1177,7 +1169,6 @@
               <a:rPr lang="ru-RU" smtClean="0"/>
               <a:t>Второй уровень</a:t>
             </a:r>
-            <a:endParaRPr lang="ru-RU" smtClean="0"/>
           </a:p>
           <a:p>
             <a:pPr lvl="2"/>
@@ -1185,7 +1176,6 @@
               <a:rPr lang="ru-RU" smtClean="0"/>
               <a:t>Третий уровень</a:t>
             </a:r>
-            <a:endParaRPr lang="ru-RU" smtClean="0"/>
           </a:p>
           <a:p>
             <a:pPr lvl="3"/>
@@ -1193,7 +1183,6 @@
               <a:rPr lang="ru-RU" smtClean="0"/>
               <a:t>Четвертый уровень</a:t>
             </a:r>
-            <a:endParaRPr lang="ru-RU" smtClean="0"/>
           </a:p>
           <a:p>
             <a:pPr lvl="4"/>
@@ -1222,6 +1211,7 @@
           <a:p>
             <a:fld id="{C2BA13B7-D241-4424-B4BE-2E78B20DBCAC}" type="datetimeFigureOut">
               <a:rPr lang="ru-RU" smtClean="0"/>
+              <a:t>14.10.2026</a:t>
             </a:fld>
             <a:endParaRPr lang="ru-RU"/>
           </a:p>
@@ -1263,6 +1253,7 @@
           <a:p>
             <a:fld id="{C429094C-EE5E-46D5-9F99-8551D18087AF}" type="slidenum">
               <a:rPr lang="ru-RU" smtClean="0"/>
+              <a:t>‹#›</a:t>
             </a:fld>
             <a:endParaRPr lang="ru-RU"/>
           </a:p>
@@ -1383,7 +1374,6 @@
               <a:rPr lang="ru-RU" smtClean="0"/>
               <a:t>Образец текста</a:t>
             </a:r>
-            <a:endParaRPr lang="ru-RU" smtClean="0"/>
           </a:p>
         </p:txBody>
       </p:sp>
@@ -1412,7 +1402,6 @@
               <a:rPr lang="ru-RU" smtClean="0"/>
               <a:t>Образец текста</a:t>
             </a:r>
-            <a:endParaRPr lang="ru-RU" smtClean="0"/>
           </a:p>
           <a:p>
             <a:pPr lvl="1"/>
@@ -1420,7 +1409,6 @@
               <a:rPr lang="ru-RU" smtClean="0"/>
               <a:t>Второй уровень</a:t>
             </a:r>
-            <a:endParaRPr lang="ru-RU" smtClean="0"/>
           </a:p>
           <a:p>
             <a:pPr lvl="2"/>
@@ -1428,7 +1416,6 @@
               <a:rPr lang="ru-RU" smtClean="0"/>
               <a:t>Третий уровень</a:t>
             </a:r>
-            <a:endParaRPr lang="ru-RU" smtClean="0"/>
           </a:p>
           <a:p>
             <a:pPr lvl="3"/>
@@ -1436,7 +1423,6 @@
               <a:rPr lang="ru-RU" smtClean="0"/>
               <a:t>Четвертый уровень</a:t>
             </a:r>
-            <a:endParaRPr lang="ru-RU" smtClean="0"/>
           </a:p>
           <a:p>
             <a:pPr lvl="4"/>
@@ -1510,7 +1496,6 @@
               <a:rPr lang="ru-RU" smtClean="0"/>
               <a:t>Образец текста</a:t>
             </a:r>
-            <a:endParaRPr lang="ru-RU" smtClean="0"/>
           </a:p>
         </p:txBody>
       </p:sp>
@@ -1539,7 +1524,6 @@
               <a:rPr lang="ru-RU" smtClean="0"/>
               <a:t>Образец текста</a:t>
             </a:r>
-            <a:endParaRPr lang="ru-RU" smtClean="0"/>
           </a:p>
           <a:p>
             <a:pPr lvl="1"/>
@@ -1547,7 +1531,6 @@
               <a:rPr lang="ru-RU" smtClean="0"/>
               <a:t>Второй уровень</a:t>
             </a:r>
-            <a:endParaRPr lang="ru-RU" smtClean="0"/>
           </a:p>
           <a:p>
             <a:pPr lvl="2"/>
@@ -1555,7 +1538,6 @@
               <a:rPr lang="ru-RU" smtClean="0"/>
               <a:t>Третий уровень</a:t>
             </a:r>
-            <a:endParaRPr lang="ru-RU" smtClean="0"/>
           </a:p>
           <a:p>
             <a:pPr lvl="3"/>
@@ -1563,7 +1545,6 @@
               <a:rPr lang="ru-RU" smtClean="0"/>
               <a:t>Четвертый уровень</a:t>
             </a:r>
-            <a:endParaRPr lang="ru-RU" smtClean="0"/>
           </a:p>
           <a:p>
             <a:pPr lvl="4"/>
@@ -1592,6 +1573,7 @@
           <a:p>
             <a:fld id="{C2BA13B7-D241-4424-B4BE-2E78B20DBCAC}" type="datetimeFigureOut">
               <a:rPr lang="ru-RU" smtClean="0"/>
+              <a:t>14.10.2026</a:t>
             </a:fld>
             <a:endParaRPr lang="ru-RU"/>
           </a:p>
@@ -1633,6 +1615,7 @@
           <a:p>
             <a:fld id="{C429094C-EE5E-46D5-9F99-8551D18087AF}" type="slidenum">
               <a:rPr lang="ru-RU" smtClean="0"/>
+              <a:t>‹#›</a:t>
             </a:fld>
             <a:endParaRPr lang="ru-RU"/>
           </a:p>
@@ -1703,6 +1686,7 @@
           <a:p>
             <a:fld id="{C2BA13B7-D241-4424-B4BE-2E78B20DBCAC}" type="datetimeFigureOut">
               <a:rPr lang="ru-RU" smtClean="0"/>
+              <a:t>14.10.2026</a:t>
             </a:fld>
             <a:endParaRPr lang="ru-RU"/>
           </a:p>
@@ -1744,6 +1728,7 @@
           <a:p>
             <a:fld id="{C429094C-EE5E-46D5-9F99-8551D18087AF}" type="slidenum">
               <a:rPr lang="ru-RU" smtClean="0"/>
+              <a:t>‹#›</a:t>
             </a:fld>
             <a:endParaRPr lang="ru-RU"/>
           </a:p>
@@ -1791,6 +1776,7 @@
           <a:p>
             <a:fld id="{C2BA13B7-D241-4424-B4BE-2E78B20DBCAC}" type="datetimeFigureOut">
               <a:rPr lang="ru-RU" smtClean="0"/>
+              <a:t>14.10.2026</a:t>
             </a:fld>
             <a:endParaRPr lang="ru-RU"/>
           </a:p>
@@ -1832,6 +1818,7 @@
           <a:p>
             <a:fld id="{C429094C-EE5E-46D5-9F99-8551D18087AF}" type="slidenum">
               <a:rPr lang="ru-RU" smtClean="0"/>
+              <a:t>‹#›</a:t>
             </a:fld>
             <a:endParaRPr lang="ru-RU"/>
           </a:p>
@@ -1947,7 +1934,6 @@
               <a:rPr lang="ru-RU" smtClean="0"/>
               <a:t>Образец текста</a:t>
             </a:r>
-            <a:endParaRPr lang="ru-RU" smtClean="0"/>
           </a:p>
           <a:p>
             <a:pPr lvl="1"/>
@@ -1955,7 +1941,6 @@
               <a:rPr lang="ru-RU" smtClean="0"/>
               <a:t>Второй уровень</a:t>
             </a:r>
-            <a:endParaRPr lang="ru-RU" smtClean="0"/>
           </a:p>
           <a:p>
             <a:pPr lvl="2"/>
@@ -1963,7 +1948,6 @@
               <a:rPr lang="ru-RU" smtClean="0"/>
               <a:t>Третий уровень</a:t>
             </a:r>
-            <a:endParaRPr lang="ru-RU" smtClean="0"/>
           </a:p>
           <a:p>
             <a:pPr lvl="3"/>
@@ -1971,7 +1955,6 @@
               <a:rPr lang="ru-RU" smtClean="0"/>
               <a:t>Четвертый уровень</a:t>
             </a:r>
-            <a:endParaRPr lang="ru-RU" smtClean="0"/>
           </a:p>
           <a:p>
             <a:pPr lvl="4"/>
@@ -2045,7 +2028,6 @@
               <a:rPr lang="ru-RU" smtClean="0"/>
               <a:t>Образец текста</a:t>
             </a:r>
-            <a:endParaRPr lang="ru-RU" smtClean="0"/>
           </a:p>
         </p:txBody>
       </p:sp>
@@ -2066,6 +2048,7 @@
           <a:p>
             <a:fld id="{C2BA13B7-D241-4424-B4BE-2E78B20DBCAC}" type="datetimeFigureOut">
               <a:rPr lang="ru-RU" smtClean="0"/>
+              <a:t>14.10.2026</a:t>
             </a:fld>
             <a:endParaRPr lang="ru-RU"/>
           </a:p>
@@ -2107,6 +2090,7 @@
           <a:p>
             <a:fld id="{C429094C-EE5E-46D5-9F99-8551D18087AF}" type="slidenum">
               <a:rPr lang="ru-RU" smtClean="0"/>
+              <a:t>‹#›</a:t>
             </a:fld>
             <a:endParaRPr lang="ru-RU"/>
           </a:p>
@@ -2292,7 +2276,6 @@
               <a:rPr lang="ru-RU" smtClean="0"/>
               <a:t>Образец текста</a:t>
             </a:r>
-            <a:endParaRPr lang="ru-RU" smtClean="0"/>
           </a:p>
         </p:txBody>
       </p:sp>
@@ -2313,6 +2296,7 @@
           <a:p>
             <a:fld id="{C2BA13B7-D241-4424-B4BE-2E78B20DBCAC}" type="datetimeFigureOut">
               <a:rPr lang="ru-RU" smtClean="0"/>
+              <a:t>14.10.2026</a:t>
             </a:fld>
             <a:endParaRPr lang="ru-RU"/>
           </a:p>
@@ -2354,6 +2338,7 @@
           <a:p>
             <a:fld id="{C429094C-EE5E-46D5-9F99-8551D18087AF}" type="slidenum">
               <a:rPr lang="ru-RU" smtClean="0"/>
+              <a:t>‹#›</a:t>
             </a:fld>
             <a:endParaRPr lang="ru-RU"/>
           </a:p>
@@ -2452,7 +2437,6 @@
               <a:rPr lang="ru-RU" smtClean="0"/>
               <a:t>Образец текста</a:t>
             </a:r>
-            <a:endParaRPr lang="ru-RU" smtClean="0"/>
           </a:p>
           <a:p>
             <a:pPr lvl="1"/>
@@ -2460,7 +2444,6 @@
               <a:rPr lang="ru-RU" smtClean="0"/>
               <a:t>Второй уровень</a:t>
             </a:r>
-            <a:endParaRPr lang="ru-RU" smtClean="0"/>
           </a:p>
           <a:p>
             <a:pPr lvl="2"/>
@@ -2468,7 +2451,6 @@
               <a:rPr lang="ru-RU" smtClean="0"/>
               <a:t>Третий уровень</a:t>
             </a:r>
-            <a:endParaRPr lang="ru-RU" smtClean="0"/>
           </a:p>
           <a:p>
             <a:pPr lvl="3"/>
@@ -2476,7 +2458,6 @@
               <a:rPr lang="ru-RU" smtClean="0"/>
               <a:t>Четвертый уровень</a:t>
             </a:r>
-            <a:endParaRPr lang="ru-RU" smtClean="0"/>
           </a:p>
           <a:p>
             <a:pPr lvl="4"/>
@@ -2523,6 +2504,7 @@
           <a:p>
             <a:fld id="{C2BA13B7-D241-4424-B4BE-2E78B20DBCAC}" type="datetimeFigureOut">
               <a:rPr lang="ru-RU" smtClean="0"/>
+              <a:t>14.10.2026</a:t>
             </a:fld>
             <a:endParaRPr lang="ru-RU"/>
           </a:p>
@@ -2600,6 +2582,7 @@
           <a:p>
             <a:fld id="{C429094C-EE5E-46D5-9F99-8551D18087AF}" type="slidenum">
               <a:rPr lang="ru-RU" smtClean="0"/>
+              <a:t>‹#›</a:t>
             </a:fld>
             <a:endParaRPr lang="ru-RU"/>
           </a:p>
@@ -2995,8 +2978,8 @@
         </p:nvCxnSpPr>
         <p:spPr>
           <a:xfrm>
-            <a:off x="8470900" y="3759200"/>
-            <a:ext cx="0" cy="2641600"/>
+            <a:off x="8470900" y="4216400"/>
+            <a:ext cx="0" cy="2184400"/>
           </a:xfrm>
           <a:prstGeom prst="line">
             <a:avLst/>
@@ -3500,7 +3483,7 @@
         </p:nvCxnSpPr>
         <p:spPr>
           <a:xfrm>
-            <a:off x="9321800" y="3505200"/>
+            <a:off x="9321800" y="3378200"/>
             <a:ext cx="76200" cy="0"/>
           </a:xfrm>
           <a:prstGeom prst="line">
@@ -3521,7 +3504,7 @@
         </p:nvCxnSpPr>
         <p:spPr>
           <a:xfrm>
-            <a:off x="9321800" y="2946400"/>
+            <a:off x="9321800" y="2882900"/>
             <a:ext cx="76200" cy="0"/>
           </a:xfrm>
           <a:prstGeom prst="line">
@@ -3543,7 +3526,7 @@
         <p:spPr>
           <a:xfrm>
             <a:off x="9398000" y="2616200"/>
-            <a:ext cx="0" cy="889000"/>
+            <a:ext cx="0" cy="1320800"/>
           </a:xfrm>
           <a:prstGeom prst="line">
             <a:avLst/>
@@ -3649,8 +3632,8 @@
         </p:nvCxnSpPr>
         <p:spPr>
           <a:xfrm>
-            <a:off x="9550400" y="1460500"/>
-            <a:ext cx="0" cy="393700"/>
+            <a:off x="9550400" y="1663700"/>
+            <a:ext cx="0" cy="190500"/>
           </a:xfrm>
           <a:prstGeom prst="line">
             <a:avLst/>
@@ -3670,7 +3653,7 @@
         </p:nvCxnSpPr>
         <p:spPr>
           <a:xfrm>
-            <a:off x="9550400" y="1460500"/>
+            <a:off x="9550400" y="1663700"/>
             <a:ext cx="50800" cy="0"/>
           </a:xfrm>
           <a:prstGeom prst="line">
@@ -4023,48 +4006,6 @@
       </p:cxnSp>
       <p:cxnSp>
         <p:nvCxnSpPr>
-          <p:cNvPr id="401" name="Линия 401"/>
-          <p:cNvCxnSpPr/>
-          <p:nvPr/>
-        </p:nvCxnSpPr>
-        <p:spPr>
-          <a:xfrm>
-            <a:off x="11607800" y="1854200"/>
-            <a:ext cx="25400" cy="0"/>
-          </a:xfrm>
-          <a:prstGeom prst="line">
-            <a:avLst/>
-          </a:prstGeom>
-          <a:ln w="12700">
-            <a:solidFill>
-              <a:srgbClr val="1F3864"/>
-            </a:solidFill>
-          </a:ln>
-        </p:spPr>
-      </p:cxnSp>
-      <p:cxnSp>
-        <p:nvCxnSpPr>
-          <p:cNvPr id="400" name="Линия 400"/>
-          <p:cNvCxnSpPr/>
-          <p:nvPr/>
-        </p:nvCxnSpPr>
-        <p:spPr>
-          <a:xfrm>
-            <a:off x="11633200" y="1651000"/>
-            <a:ext cx="0" cy="203200"/>
-          </a:xfrm>
-          <a:prstGeom prst="line">
-            <a:avLst/>
-          </a:prstGeom>
-          <a:ln w="12700">
-            <a:solidFill>
-              <a:srgbClr val="1F3864"/>
-            </a:solidFill>
-          </a:ln>
-        </p:spPr>
-      </p:cxnSp>
-      <p:cxnSp>
-        <p:nvCxnSpPr>
           <p:cNvPr id="399" name="Линия 399"/>
           <p:cNvCxnSpPr/>
           <p:nvPr/>
@@ -4113,7 +4054,7 @@
         </p:nvCxnSpPr>
         <p:spPr>
           <a:xfrm>
-            <a:off x="11734800" y="1460500"/>
+            <a:off x="11734800" y="1663700"/>
             <a:ext cx="127000" cy="0"/>
           </a:xfrm>
           <a:prstGeom prst="line">
@@ -4168,34 +4109,6 @@
           </a:ln>
         </p:spPr>
       </p:cxnSp>
-      <p:pic>
-        <p:nvPicPr>
-          <p:cNvPr id="2" name="Рисунок 1"/>
-          <p:cNvPicPr/>
-          <p:nvPr/>
-        </p:nvPicPr>
-        <p:blipFill>
-          <a:blip r:embed="rId1">
-            <a:extLst>
-              <a:ext uri="{28A0092B-C50C-407E-A947-70E740481C1C}">
-                <a14:useLocalDpi xmlns:a14="http://schemas.microsoft.com/office/drawing/2010/main" val="0"/>
-              </a:ext>
-            </a:extLst>
-          </a:blip>
-          <a:stretch>
-            <a:fillRect/>
-          </a:stretch>
-        </p:blipFill>
-        <p:spPr>
-          <a:xfrm>
-            <a:off x="10769600" y="76200"/>
-            <a:ext cx="1219200" cy="419100"/>
-          </a:xfrm>
-          <a:prstGeom prst="rect">
-            <a:avLst/>
-          </a:prstGeom>
-        </p:spPr>
-      </p:pic>
       <p:pic>
         <p:nvPicPr>
           <p:cNvPr id="3" name="Рисунок 2"/>
@@ -4318,12 +4231,6 @@
               </a:rPr>
               <a:t>Верховный Попечитель</a:t>
             </a:r>
-            <a:endParaRPr lang="ru-RU" sz="1000" b="1" dirty="0">
-              <a:solidFill>
-                <a:srgbClr val="FFFFFF"/>
-              </a:solidFill>
-              <a:latin typeface="Segoe UI" panose="020B0502040204020203" pitchFamily="34" charset="0"/>
-            </a:endParaRPr>
           </a:p>
         </p:txBody>
       </p:sp>
@@ -4370,12 +4277,6 @@
               </a:rPr>
               <a:t>Главный исполнительный директор (ГИД)</a:t>
             </a:r>
-            <a:endParaRPr lang="ru-RU" sz="1000" b="1" dirty="0">
-              <a:solidFill>
-                <a:srgbClr val="FFFFFF"/>
-              </a:solidFill>
-              <a:latin typeface="Segoe UI" panose="020B0502040204020203" pitchFamily="34" charset="0"/>
-            </a:endParaRPr>
           </a:p>
           <a:p>
             <a:pPr algn="ctr">
@@ -4392,12 +4293,6 @@
               </a:rPr>
               <a:t>Қаражан Е.Н.</a:t>
             </a:r>
-            <a:endParaRPr lang="ru-RU" sz="1000" b="1" dirty="0">
-              <a:solidFill>
-                <a:srgbClr val="FFFFFF"/>
-              </a:solidFill>
-              <a:latin typeface="Segoe UI" panose="020B0502040204020203" pitchFamily="34" charset="0"/>
-            </a:endParaRPr>
           </a:p>
         </p:txBody>
       </p:sp>
@@ -4409,7 +4304,7 @@
         </p:nvSpPr>
         <p:spPr>
           <a:xfrm>
-            <a:off x="9601200" y="1270000"/>
+            <a:off x="9601200" y="1473200"/>
             <a:ext cx="2133600" cy="381000"/>
           </a:xfrm>
           <a:prstGeom prst="roundRect">
@@ -4436,13 +4331,13 @@
               </a:lnSpc>
             </a:pPr>
             <a:r>
-              <a:rPr lang="ru-RU" sz="900" dirty="0">
+              <a:rPr lang="ru-RU" sz="900" smtClean="0">
                 <a:solidFill>
                   <a:srgbClr val="1F3864"/>
                 </a:solidFill>
                 <a:latin typeface="Segoe UI" panose="020B0502040204020203" pitchFamily="34" charset="0"/>
               </a:rPr>
-              <a:t>Зам. ГИД (стратегия, проекты)</a:t>
+              <a:t>Зам. ГИД по стратегии и проектам</a:t>
             </a:r>
             <a:endParaRPr lang="ru-RU" sz="900" dirty="0">
               <a:solidFill>
@@ -4527,12 +4422,6 @@
               </a:rPr>
               <a:t>Зам. ГИД (адм.-хоз. вопросы,</a:t>
             </a:r>
-            <a:endParaRPr lang="ru-RU" sz="900" dirty="0">
-              <a:solidFill>
-                <a:srgbClr val="1F3864"/>
-              </a:solidFill>
-              <a:latin typeface="Segoe UI" panose="020B0502040204020203" pitchFamily="34" charset="0"/>
-            </a:endParaRPr>
           </a:p>
           <a:p>
             <a:pPr algn="ctr">
@@ -4549,12 +4438,6 @@
               </a:rPr>
               <a:t>закупки, кадры, проекты)</a:t>
             </a:r>
-            <a:endParaRPr lang="ru-RU" sz="900" dirty="0">
-              <a:solidFill>
-                <a:srgbClr val="1F3864"/>
-              </a:solidFill>
-              <a:latin typeface="Segoe UI" panose="020B0502040204020203" pitchFamily="34" charset="0"/>
-            </a:endParaRPr>
           </a:p>
           <a:p>
             <a:pPr algn="ctr">
@@ -4635,12 +4518,6 @@
               </a:rPr>
               <a:t>Финансовый директор</a:t>
             </a:r>
-            <a:endParaRPr lang="ru-RU" sz="900" dirty="0">
-              <a:solidFill>
-                <a:srgbClr val="1F3864"/>
-              </a:solidFill>
-              <a:latin typeface="Segoe UI" panose="020B0502040204020203" pitchFamily="34" charset="0"/>
-            </a:endParaRPr>
           </a:p>
           <a:p>
             <a:pPr algn="ctr">
@@ -4722,12 +4599,6 @@
               </a:rPr>
               <a:t>Бухгалтер</a:t>
             </a:r>
-            <a:endParaRPr lang="ru-RU" sz="900" dirty="0">
-              <a:solidFill>
-                <a:srgbClr val="787878"/>
-              </a:solidFill>
-              <a:latin typeface="Segoe UI" panose="020B0502040204020203" pitchFamily="34" charset="0"/>
-            </a:endParaRPr>
           </a:p>
           <a:p>
             <a:pPr algn="ctr">
@@ -4805,12 +4676,6 @@
               </a:rPr>
               <a:t>Национальный координатор</a:t>
             </a:r>
-            <a:endParaRPr lang="ru-RU" sz="1000" b="1" dirty="0">
-              <a:solidFill>
-                <a:srgbClr val="FFFFFF"/>
-              </a:solidFill>
-              <a:latin typeface="Segoe UI" panose="020B0502040204020203" pitchFamily="34" charset="0"/>
-            </a:endParaRPr>
           </a:p>
         </p:txBody>
       </p:sp>
@@ -4918,12 +4783,6 @@
               </a:rPr>
               <a:t>Цифровое развитие (1)</a:t>
             </a:r>
-            <a:endParaRPr lang="ru-RU" sz="1000" b="1" dirty="0">
-              <a:solidFill>
-                <a:srgbClr val="FFFFFF"/>
-              </a:solidFill>
-              <a:latin typeface="Segoe UI" panose="020B0502040204020203" pitchFamily="34" charset="0"/>
-            </a:endParaRPr>
           </a:p>
         </p:txBody>
       </p:sp>
@@ -5345,6 +5204,15 @@
               </a:rPr>
               <a:t>Сундетбай Сандугаш</a:t>
             </a:r>
+            <a:r>
+              <a:rPr lang="ru-RU" sz="900" b="0" dirty="0">
+                <a:solidFill>
+                  <a:srgbClr val="227838"/>
+                </a:solidFill>
+                <a:latin typeface="Segoe UI" panose="020B0502040204020203" pitchFamily="34" charset="0"/>
+              </a:rPr>
+              <a:t/>
+            </a:r>
             <a:br>
               <a:rPr lang="ru-RU" sz="900" b="0" dirty="0">
                 <a:solidFill>
@@ -5414,6 +5282,2031 @@
               </a:rPr>
               <a:t>Гл. специалист, социолог</a:t>
             </a:r>
+          </a:p>
+          <a:p>
+            <a:pPr algn="ctr">
+              <a:lnSpc>
+                <a:spcPct val="90000"/>
+              </a:lnSpc>
+            </a:pPr>
+            <a:r>
+              <a:rPr lang="ru-RU" sz="1000" b="1" dirty="0">
+                <a:solidFill>
+                  <a:srgbClr val="1F3864"/>
+                </a:solidFill>
+                <a:latin typeface="Segoe UI" panose="020B0502040204020203" pitchFamily="34" charset="0"/>
+              </a:rPr>
+              <a:t>Тленчиева Шырын</a:t>
+            </a:r>
+            <a:r>
+              <a:rPr lang="ru-RU" sz="900" b="0" dirty="0">
+                <a:solidFill>
+                  <a:srgbClr val="227838"/>
+                </a:solidFill>
+                <a:latin typeface="Segoe UI" panose="020B0502040204020203" pitchFamily="34" charset="0"/>
+              </a:rPr>
+              <a:t> · 1 000 000</a:t>
+            </a:r>
+            <a:endParaRPr lang="ru-RU" sz="1100" b="1" dirty="0">
+              <a:solidFill>
+                <a:srgbClr val="1F3864"/>
+              </a:solidFill>
+              <a:latin typeface="Segoe UI" panose="020B0502040204020203" pitchFamily="34" charset="0"/>
+            </a:endParaRPr>
+          </a:p>
+        </p:txBody>
+      </p:sp>
+      <p:sp>
+        <p:nvSpPr>
+          <p:cNvPr id="256" name="Сотрудник 256"/>
+          <p:cNvSpPr/>
+          <p:nvPr/>
+        </p:nvSpPr>
+        <p:spPr>
+          <a:xfrm>
+            <a:off x="2476500" y="3251200"/>
+            <a:ext cx="1968500" cy="508000"/>
+          </a:xfrm>
+          <a:prstGeom prst="roundRect">
+            <a:avLst>
+              <a:gd name="adj" fmla="val 12000"/>
+            </a:avLst>
+          </a:prstGeom>
+          <a:solidFill>
+            <a:srgbClr val="E6DFF3"/>
+          </a:solidFill>
+          <a:ln w="12700">
+            <a:solidFill>
+              <a:srgbClr val="227838"/>
+            </a:solidFill>
+          </a:ln>
+        </p:spPr>
+        <p:txBody>
+          <a:bodyPr lIns="50800" tIns="12700" rIns="50800" bIns="12700" rtlCol="0" anchor="ctr"/>
+          <a:lstStyle/>
+          <a:p>
+            <a:pPr algn="ctr">
+              <a:lnSpc>
+                <a:spcPct val="90000"/>
+              </a:lnSpc>
+            </a:pPr>
+            <a:r>
+              <a:rPr lang="ru-RU" sz="1000" dirty="0">
+                <a:solidFill>
+                  <a:srgbClr val="464646"/>
+                </a:solidFill>
+                <a:latin typeface="Segoe UI" panose="020B0502040204020203" pitchFamily="34" charset="0"/>
+              </a:rPr>
+              <a:t>Гл. специалист, аналитик</a:t>
+            </a:r>
+            <a:endParaRPr lang="ru-RU" sz="800" i="1" dirty="0">
+              <a:solidFill>
+                <a:srgbClr val="227838"/>
+              </a:solidFill>
+              <a:latin typeface="Segoe UI" panose="020B0502040204020203" pitchFamily="34" charset="0"/>
+            </a:endParaRPr>
+          </a:p>
+          <a:p>
+            <a:pPr algn="ctr">
+              <a:lnSpc>
+                <a:spcPct val="90000"/>
+              </a:lnSpc>
+            </a:pPr>
+            <a:r>
+              <a:rPr lang="ru-RU" sz="1000" b="1" dirty="0">
+                <a:solidFill>
+                  <a:srgbClr val="1F3864"/>
+                </a:solidFill>
+                <a:latin typeface="Segoe UI" panose="020B0502040204020203" pitchFamily="34" charset="0"/>
+              </a:rPr>
+              <a:t>Сандыбаева Сандугаш</a:t>
+            </a:r>
+            <a:r>
+              <a:rPr lang="ru-RU" sz="900" b="0" dirty="0">
+                <a:solidFill>
+                  <a:srgbClr val="227838"/>
+                </a:solidFill>
+                <a:latin typeface="Segoe UI" panose="020B0502040204020203" pitchFamily="34" charset="0"/>
+              </a:rPr>
+              <a:t/>
+            </a:r>
+            <a:br>
+              <a:rPr lang="ru-RU" sz="900" b="0" dirty="0">
+                <a:solidFill>
+                  <a:srgbClr val="227838"/>
+                </a:solidFill>
+                <a:latin typeface="Segoe UI" panose="020B0502040204020203" pitchFamily="34" charset="0"/>
+              </a:rPr>
+            </a:br>
+            <a:r>
+              <a:rPr lang="ru-RU" sz="900" b="0" dirty="0">
+                <a:solidFill>
+                  <a:srgbClr val="227838"/>
+                </a:solidFill>
+                <a:latin typeface="Segoe UI" panose="020B0502040204020203" pitchFamily="34" charset="0"/>
+              </a:rPr>
+              <a:t>1 000 000</a:t>
+            </a:r>
+            <a:endParaRPr lang="ru-RU" sz="1100" b="1" dirty="0">
+              <a:solidFill>
+                <a:srgbClr val="1F3864"/>
+              </a:solidFill>
+              <a:latin typeface="Segoe UI" panose="020B0502040204020203" pitchFamily="34" charset="0"/>
+            </a:endParaRPr>
+          </a:p>
+        </p:txBody>
+      </p:sp>
+      <p:sp>
+        <p:nvSpPr>
+          <p:cNvPr id="257" name="Сотрудник 257"/>
+          <p:cNvSpPr/>
+          <p:nvPr/>
+        </p:nvSpPr>
+        <p:spPr>
+          <a:xfrm>
+            <a:off x="2476500" y="3810000"/>
+            <a:ext cx="1968500" cy="508000"/>
+          </a:xfrm>
+          <a:prstGeom prst="roundRect">
+            <a:avLst>
+              <a:gd name="adj" fmla="val 12000"/>
+            </a:avLst>
+          </a:prstGeom>
+          <a:solidFill>
+            <a:srgbClr val="E6DFF3"/>
+          </a:solidFill>
+          <a:ln w="12700">
+            <a:solidFill>
+              <a:srgbClr val="227838"/>
+            </a:solidFill>
+          </a:ln>
+        </p:spPr>
+        <p:txBody>
+          <a:bodyPr lIns="50800" tIns="12700" rIns="50800" bIns="12700" rtlCol="0" anchor="ctr"/>
+          <a:lstStyle/>
+          <a:p>
+            <a:pPr algn="ctr">
+              <a:lnSpc>
+                <a:spcPct val="90000"/>
+              </a:lnSpc>
+            </a:pPr>
+            <a:r>
+              <a:rPr lang="ru-RU" sz="1000" dirty="0">
+                <a:solidFill>
+                  <a:srgbClr val="464646"/>
+                </a:solidFill>
+                <a:latin typeface="Segoe UI" panose="020B0502040204020203" pitchFamily="34" charset="0"/>
+              </a:rPr>
+              <a:t>Вед. специалист, социолог</a:t>
+            </a:r>
+            <a:endParaRPr lang="ru-RU" sz="800" i="1" dirty="0">
+              <a:solidFill>
+                <a:srgbClr val="227838"/>
+              </a:solidFill>
+              <a:latin typeface="Segoe UI" panose="020B0502040204020203" pitchFamily="34" charset="0"/>
+            </a:endParaRPr>
+          </a:p>
+          <a:p>
+            <a:pPr algn="ctr">
+              <a:lnSpc>
+                <a:spcPct val="90000"/>
+              </a:lnSpc>
+            </a:pPr>
+            <a:r>
+              <a:rPr lang="ru-RU" sz="1000" b="1" dirty="0">
+                <a:solidFill>
+                  <a:srgbClr val="1F3864"/>
+                </a:solidFill>
+                <a:latin typeface="Segoe UI" panose="020B0502040204020203" pitchFamily="34" charset="0"/>
+              </a:rPr>
+              <a:t>Ашимханова Дана</a:t>
+            </a:r>
+            <a:r>
+              <a:rPr lang="ru-RU" sz="900" b="0" dirty="0">
+                <a:solidFill>
+                  <a:srgbClr val="227838"/>
+                </a:solidFill>
+                <a:latin typeface="Segoe UI" panose="020B0502040204020203" pitchFamily="34" charset="0"/>
+              </a:rPr>
+              <a:t> · 700 000</a:t>
+            </a:r>
+            <a:endParaRPr lang="ru-RU" sz="1100" b="1" dirty="0">
+              <a:solidFill>
+                <a:srgbClr val="1F3864"/>
+              </a:solidFill>
+              <a:latin typeface="Segoe UI" panose="020B0502040204020203" pitchFamily="34" charset="0"/>
+            </a:endParaRPr>
+          </a:p>
+        </p:txBody>
+      </p:sp>
+      <p:sp>
+        <p:nvSpPr>
+          <p:cNvPr id="258" name="Сотрудник 258"/>
+          <p:cNvSpPr/>
+          <p:nvPr/>
+        </p:nvSpPr>
+        <p:spPr>
+          <a:xfrm>
+            <a:off x="2476500" y="4368800"/>
+            <a:ext cx="1968500" cy="508000"/>
+          </a:xfrm>
+          <a:prstGeom prst="roundRect">
+            <a:avLst>
+              <a:gd name="adj" fmla="val 12000"/>
+            </a:avLst>
+          </a:prstGeom>
+          <a:solidFill>
+            <a:srgbClr val="E6DFF3"/>
+          </a:solidFill>
+          <a:ln w="12700">
+            <a:solidFill>
+              <a:srgbClr val="227838"/>
+            </a:solidFill>
+          </a:ln>
+        </p:spPr>
+        <p:txBody>
+          <a:bodyPr lIns="50800" tIns="12700" rIns="50800" bIns="12700" rtlCol="0" anchor="ctr"/>
+          <a:lstStyle/>
+          <a:p>
+            <a:pPr algn="ctr">
+              <a:lnSpc>
+                <a:spcPct val="90000"/>
+              </a:lnSpc>
+            </a:pPr>
+            <a:r>
+              <a:rPr lang="ru-RU" sz="1000" dirty="0">
+                <a:solidFill>
+                  <a:srgbClr val="464646"/>
+                </a:solidFill>
+                <a:latin typeface="Segoe UI" panose="020B0502040204020203" pitchFamily="34" charset="0"/>
+              </a:rPr>
+              <a:t>Вед. специалист, аналитик</a:t>
+            </a:r>
+            <a:endParaRPr lang="ru-RU" sz="800" i="1" dirty="0">
+              <a:solidFill>
+                <a:srgbClr val="227838"/>
+              </a:solidFill>
+              <a:latin typeface="Segoe UI" panose="020B0502040204020203" pitchFamily="34" charset="0"/>
+            </a:endParaRPr>
+          </a:p>
+          <a:p>
+            <a:pPr algn="ctr">
+              <a:lnSpc>
+                <a:spcPct val="90000"/>
+              </a:lnSpc>
+            </a:pPr>
+            <a:r>
+              <a:rPr lang="ru-RU" sz="1000" b="1" dirty="0">
+                <a:solidFill>
+                  <a:srgbClr val="1F3864"/>
+                </a:solidFill>
+                <a:latin typeface="Segoe UI" panose="020B0502040204020203" pitchFamily="34" charset="0"/>
+              </a:rPr>
+              <a:t>Мукашев Дархан</a:t>
+            </a:r>
+            <a:r>
+              <a:rPr lang="ru-RU" sz="900" b="0" dirty="0">
+                <a:solidFill>
+                  <a:srgbClr val="227838"/>
+                </a:solidFill>
+                <a:latin typeface="Segoe UI" panose="020B0502040204020203" pitchFamily="34" charset="0"/>
+              </a:rPr>
+              <a:t> · 700 000</a:t>
+            </a:r>
+            <a:endParaRPr lang="ru-RU" sz="1100" b="1" dirty="0">
+              <a:solidFill>
+                <a:srgbClr val="1F3864"/>
+              </a:solidFill>
+              <a:latin typeface="Segoe UI" panose="020B0502040204020203" pitchFamily="34" charset="0"/>
+            </a:endParaRPr>
+          </a:p>
+        </p:txBody>
+      </p:sp>
+      <p:sp>
+        <p:nvSpPr>
+          <p:cNvPr id="264" name="Сотрудник 264"/>
+          <p:cNvSpPr/>
+          <p:nvPr/>
+        </p:nvSpPr>
+        <p:spPr>
+          <a:xfrm>
+            <a:off x="4724400" y="3086100"/>
+            <a:ext cx="2590800" cy="355600"/>
+          </a:xfrm>
+          <a:prstGeom prst="roundRect">
+            <a:avLst>
+              <a:gd name="adj" fmla="val 12000"/>
+            </a:avLst>
+          </a:prstGeom>
+          <a:solidFill>
+            <a:srgbClr val="E9F3EA"/>
+          </a:solidFill>
+          <a:ln w="12700">
+            <a:solidFill>
+              <a:srgbClr val="227838"/>
+            </a:solidFill>
+          </a:ln>
+        </p:spPr>
+        <p:txBody>
+          <a:bodyPr lIns="50800" tIns="12700" rIns="50800" bIns="12700" rtlCol="0" anchor="ctr"/>
+          <a:lstStyle/>
+          <a:p>
+            <a:pPr algn="ctr">
+              <a:lnSpc>
+                <a:spcPct val="90000"/>
+              </a:lnSpc>
+            </a:pPr>
+            <a:r>
+              <a:rPr lang="ru-RU" sz="1000" dirty="0">
+                <a:solidFill>
+                  <a:srgbClr val="464646"/>
+                </a:solidFill>
+                <a:latin typeface="Segoe UI" panose="020B0502040204020203" pitchFamily="34" charset="0"/>
+              </a:rPr>
+              <a:t>Главный специалист</a:t>
+            </a:r>
+          </a:p>
+          <a:p>
+            <a:pPr algn="ctr">
+              <a:lnSpc>
+                <a:spcPct val="90000"/>
+              </a:lnSpc>
+            </a:pPr>
+            <a:r>
+              <a:rPr lang="ru-RU" sz="1000" b="1" dirty="0">
+                <a:solidFill>
+                  <a:srgbClr val="1F3864"/>
+                </a:solidFill>
+                <a:latin typeface="Segoe UI" panose="020B0502040204020203" pitchFamily="34" charset="0"/>
+              </a:rPr>
+              <a:t>Қуандық Жасұлан</a:t>
+            </a:r>
+            <a:r>
+              <a:rPr lang="ru-RU" sz="900" b="0" dirty="0">
+                <a:solidFill>
+                  <a:srgbClr val="227838"/>
+                </a:solidFill>
+                <a:latin typeface="Segoe UI" panose="020B0502040204020203" pitchFamily="34" charset="0"/>
+              </a:rPr>
+              <a:t> · 1 000 000</a:t>
+            </a:r>
+            <a:endParaRPr lang="ru-RU" sz="1100" b="1" dirty="0">
+              <a:solidFill>
+                <a:srgbClr val="1F3864"/>
+              </a:solidFill>
+              <a:latin typeface="Segoe UI" panose="020B0502040204020203" pitchFamily="34" charset="0"/>
+            </a:endParaRPr>
+          </a:p>
+        </p:txBody>
+      </p:sp>
+      <p:sp>
+        <p:nvSpPr>
+          <p:cNvPr id="265" name="Сотрудник 265"/>
+          <p:cNvSpPr/>
+          <p:nvPr/>
+        </p:nvSpPr>
+        <p:spPr>
+          <a:xfrm>
+            <a:off x="4724400" y="5054600"/>
+            <a:ext cx="2590800" cy="355600"/>
+          </a:xfrm>
+          <a:prstGeom prst="roundRect">
+            <a:avLst>
+              <a:gd name="adj" fmla="val 12000"/>
+            </a:avLst>
+          </a:prstGeom>
+          <a:solidFill>
+            <a:srgbClr val="E6DFF3"/>
+          </a:solidFill>
+          <a:ln w="12700">
+            <a:solidFill>
+              <a:srgbClr val="227838"/>
+            </a:solidFill>
+          </a:ln>
+        </p:spPr>
+        <p:txBody>
+          <a:bodyPr lIns="50800" tIns="12700" rIns="50800" bIns="12700" rtlCol="0" anchor="ctr"/>
+          <a:lstStyle/>
+          <a:p>
+            <a:pPr algn="ctr">
+              <a:lnSpc>
+                <a:spcPct val="90000"/>
+              </a:lnSpc>
+            </a:pPr>
+            <a:r>
+              <a:rPr lang="ru-RU" sz="1000" dirty="0">
+                <a:solidFill>
+                  <a:srgbClr val="464646"/>
+                </a:solidFill>
+                <a:latin typeface="Segoe UI" panose="020B0502040204020203" pitchFamily="34" charset="0"/>
+              </a:rPr>
+              <a:t>Главный специалист</a:t>
+            </a:r>
+            <a:endParaRPr lang="ru-RU" sz="800" i="1" dirty="0">
+              <a:solidFill>
+                <a:srgbClr val="227838"/>
+              </a:solidFill>
+              <a:latin typeface="Segoe UI" panose="020B0502040204020203" pitchFamily="34" charset="0"/>
+            </a:endParaRPr>
+          </a:p>
+          <a:p>
+            <a:pPr algn="ctr">
+              <a:lnSpc>
+                <a:spcPct val="90000"/>
+              </a:lnSpc>
+            </a:pPr>
+            <a:r>
+              <a:rPr lang="ru-RU" sz="1000" b="1" dirty="0">
+                <a:solidFill>
+                  <a:srgbClr val="1F3864"/>
+                </a:solidFill>
+                <a:latin typeface="Segoe UI" panose="020B0502040204020203" pitchFamily="34" charset="0"/>
+              </a:rPr>
+              <a:t>Өміртай Амалбек</a:t>
+            </a:r>
+            <a:r>
+              <a:rPr lang="ru-RU" sz="900" b="0" dirty="0">
+                <a:solidFill>
+                  <a:srgbClr val="227838"/>
+                </a:solidFill>
+                <a:latin typeface="Segoe UI" panose="020B0502040204020203" pitchFamily="34" charset="0"/>
+              </a:rPr>
+              <a:t> · 1 000 000</a:t>
+            </a:r>
+            <a:endParaRPr lang="ru-RU" sz="1100" b="1" dirty="0">
+              <a:solidFill>
+                <a:srgbClr val="1F3864"/>
+              </a:solidFill>
+              <a:latin typeface="Segoe UI" panose="020B0502040204020203" pitchFamily="34" charset="0"/>
+            </a:endParaRPr>
+          </a:p>
+        </p:txBody>
+      </p:sp>
+      <p:sp>
+        <p:nvSpPr>
+          <p:cNvPr id="266" name="Сотрудник 266"/>
+          <p:cNvSpPr/>
+          <p:nvPr/>
+        </p:nvSpPr>
+        <p:spPr>
+          <a:xfrm>
+            <a:off x="4724400" y="3479800"/>
+            <a:ext cx="2590800" cy="355600"/>
+          </a:xfrm>
+          <a:prstGeom prst="roundRect">
+            <a:avLst>
+              <a:gd name="adj" fmla="val 12000"/>
+            </a:avLst>
+          </a:prstGeom>
+          <a:solidFill>
+            <a:srgbClr val="E9F3EA"/>
+          </a:solidFill>
+          <a:ln w="12700">
+            <a:solidFill>
+              <a:srgbClr val="227838"/>
+            </a:solidFill>
+          </a:ln>
+        </p:spPr>
+        <p:txBody>
+          <a:bodyPr lIns="50800" tIns="12700" rIns="50800" bIns="12700" rtlCol="0" anchor="ctr"/>
+          <a:lstStyle/>
+          <a:p>
+            <a:pPr algn="ctr">
+              <a:lnSpc>
+                <a:spcPct val="90000"/>
+              </a:lnSpc>
+            </a:pPr>
+            <a:r>
+              <a:rPr lang="ru-RU" sz="1000" dirty="0">
+                <a:solidFill>
+                  <a:srgbClr val="464646"/>
+                </a:solidFill>
+                <a:latin typeface="Segoe UI" panose="020B0502040204020203" pitchFamily="34" charset="0"/>
+              </a:rPr>
+              <a:t>Главный специалист</a:t>
+            </a:r>
+          </a:p>
+          <a:p>
+            <a:pPr algn="ctr">
+              <a:lnSpc>
+                <a:spcPct val="90000"/>
+              </a:lnSpc>
+            </a:pPr>
+            <a:r>
+              <a:rPr lang="ru-RU" sz="1000" b="1" dirty="0">
+                <a:solidFill>
+                  <a:srgbClr val="1F3864"/>
+                </a:solidFill>
+                <a:latin typeface="Segoe UI" panose="020B0502040204020203" pitchFamily="34" charset="0"/>
+              </a:rPr>
+              <a:t>Жандилдаев Бакдаулет</a:t>
+            </a:r>
+            <a:r>
+              <a:rPr lang="ru-RU" sz="900" b="0" dirty="0">
+                <a:solidFill>
+                  <a:srgbClr val="227838"/>
+                </a:solidFill>
+                <a:latin typeface="Segoe UI" panose="020B0502040204020203" pitchFamily="34" charset="0"/>
+              </a:rPr>
+              <a:t> · 1 000 000</a:t>
+            </a:r>
+            <a:endParaRPr lang="ru-RU" sz="1100" b="1" dirty="0">
+              <a:solidFill>
+                <a:srgbClr val="1F3864"/>
+              </a:solidFill>
+              <a:latin typeface="Segoe UI" panose="020B0502040204020203" pitchFamily="34" charset="0"/>
+            </a:endParaRPr>
+          </a:p>
+        </p:txBody>
+      </p:sp>
+      <p:sp>
+        <p:nvSpPr>
+          <p:cNvPr id="267" name="Сотрудник 267"/>
+          <p:cNvSpPr/>
+          <p:nvPr/>
+        </p:nvSpPr>
+        <p:spPr>
+          <a:xfrm>
+            <a:off x="4724400" y="3873500"/>
+            <a:ext cx="2590800" cy="355600"/>
+          </a:xfrm>
+          <a:prstGeom prst="roundRect">
+            <a:avLst>
+              <a:gd name="adj" fmla="val 12000"/>
+            </a:avLst>
+          </a:prstGeom>
+          <a:solidFill>
+            <a:srgbClr val="E9F3EA"/>
+          </a:solidFill>
+          <a:ln w="12700">
+            <a:solidFill>
+              <a:srgbClr val="227838"/>
+            </a:solidFill>
+          </a:ln>
+        </p:spPr>
+        <p:txBody>
+          <a:bodyPr lIns="50800" tIns="12700" rIns="50800" bIns="12700" rtlCol="0" anchor="ctr"/>
+          <a:lstStyle/>
+          <a:p>
+            <a:pPr algn="ctr">
+              <a:lnSpc>
+                <a:spcPct val="90000"/>
+              </a:lnSpc>
+            </a:pPr>
+            <a:r>
+              <a:rPr lang="ru-RU" sz="1000" dirty="0">
+                <a:solidFill>
+                  <a:srgbClr val="464646"/>
+                </a:solidFill>
+                <a:latin typeface="Segoe UI" panose="020B0502040204020203" pitchFamily="34" charset="0"/>
+              </a:rPr>
+              <a:t>Ведущий специалист</a:t>
+            </a:r>
+          </a:p>
+          <a:p>
+            <a:pPr algn="ctr">
+              <a:lnSpc>
+                <a:spcPct val="90000"/>
+              </a:lnSpc>
+            </a:pPr>
+            <a:r>
+              <a:rPr lang="ru-RU" sz="1000" b="1" dirty="0">
+                <a:solidFill>
+                  <a:srgbClr val="1F3864"/>
+                </a:solidFill>
+                <a:latin typeface="Segoe UI" panose="020B0502040204020203" pitchFamily="34" charset="0"/>
+              </a:rPr>
+              <a:t>Шербаева Бибинур</a:t>
+            </a:r>
+            <a:r>
+              <a:rPr lang="ru-RU" sz="900" b="0" dirty="0">
+                <a:solidFill>
+                  <a:srgbClr val="227838"/>
+                </a:solidFill>
+                <a:latin typeface="Segoe UI" panose="020B0502040204020203" pitchFamily="34" charset="0"/>
+              </a:rPr>
+              <a:t> · 1 000 000</a:t>
+            </a:r>
+            <a:endParaRPr lang="ru-RU" sz="1100" b="1" dirty="0">
+              <a:solidFill>
+                <a:srgbClr val="1F3864"/>
+              </a:solidFill>
+              <a:latin typeface="Segoe UI" panose="020B0502040204020203" pitchFamily="34" charset="0"/>
+            </a:endParaRPr>
+          </a:p>
+        </p:txBody>
+      </p:sp>
+      <p:sp>
+        <p:nvSpPr>
+          <p:cNvPr id="268" name="Сотрудник 268"/>
+          <p:cNvSpPr/>
+          <p:nvPr/>
+        </p:nvSpPr>
+        <p:spPr>
+          <a:xfrm>
+            <a:off x="4724400" y="4267200"/>
+            <a:ext cx="2590800" cy="355600"/>
+          </a:xfrm>
+          <a:prstGeom prst="roundRect">
+            <a:avLst>
+              <a:gd name="adj" fmla="val 12000"/>
+            </a:avLst>
+          </a:prstGeom>
+          <a:solidFill>
+            <a:srgbClr val="E9F3EA"/>
+          </a:solidFill>
+          <a:ln w="12700">
+            <a:solidFill>
+              <a:srgbClr val="227838"/>
+            </a:solidFill>
+          </a:ln>
+        </p:spPr>
+        <p:txBody>
+          <a:bodyPr lIns="50800" tIns="12700" rIns="50800" bIns="12700" rtlCol="0" anchor="ctr"/>
+          <a:lstStyle/>
+          <a:p>
+            <a:pPr algn="ctr">
+              <a:lnSpc>
+                <a:spcPct val="90000"/>
+              </a:lnSpc>
+            </a:pPr>
+            <a:r>
+              <a:rPr lang="ru-RU" sz="1000" dirty="0">
+                <a:solidFill>
+                  <a:srgbClr val="464646"/>
+                </a:solidFill>
+                <a:latin typeface="Segoe UI" panose="020B0502040204020203" pitchFamily="34" charset="0"/>
+              </a:rPr>
+              <a:t>Ведущий специалист</a:t>
+            </a:r>
+          </a:p>
+          <a:p>
+            <a:pPr algn="ctr">
+              <a:lnSpc>
+                <a:spcPct val="90000"/>
+              </a:lnSpc>
+            </a:pPr>
+            <a:r>
+              <a:rPr lang="ru-RU" sz="1000" b="1" dirty="0">
+                <a:solidFill>
+                  <a:srgbClr val="1F3864"/>
+                </a:solidFill>
+                <a:latin typeface="Segoe UI" panose="020B0502040204020203" pitchFamily="34" charset="0"/>
+              </a:rPr>
+              <a:t>Абенов Алибек</a:t>
+            </a:r>
+            <a:r>
+              <a:rPr lang="ru-RU" sz="900" b="0" dirty="0">
+                <a:solidFill>
+                  <a:srgbClr val="227838"/>
+                </a:solidFill>
+                <a:latin typeface="Segoe UI" panose="020B0502040204020203" pitchFamily="34" charset="0"/>
+              </a:rPr>
+              <a:t> · 700 000</a:t>
+            </a:r>
+            <a:endParaRPr lang="ru-RU" sz="1100" b="1" dirty="0">
+              <a:solidFill>
+                <a:srgbClr val="1F3864"/>
+              </a:solidFill>
+              <a:latin typeface="Segoe UI" panose="020B0502040204020203" pitchFamily="34" charset="0"/>
+            </a:endParaRPr>
+          </a:p>
+        </p:txBody>
+      </p:sp>
+      <p:sp>
+        <p:nvSpPr>
+          <p:cNvPr id="269" name="Сотрудник 269"/>
+          <p:cNvSpPr/>
+          <p:nvPr/>
+        </p:nvSpPr>
+        <p:spPr>
+          <a:xfrm>
+            <a:off x="4724400" y="5448300"/>
+            <a:ext cx="2590800" cy="355600"/>
+          </a:xfrm>
+          <a:prstGeom prst="roundRect">
+            <a:avLst>
+              <a:gd name="adj" fmla="val 12000"/>
+            </a:avLst>
+          </a:prstGeom>
+          <a:solidFill>
+            <a:srgbClr val="E6DFF3"/>
+          </a:solidFill>
+          <a:ln w="12700">
+            <a:solidFill>
+              <a:srgbClr val="227838"/>
+            </a:solidFill>
+          </a:ln>
+        </p:spPr>
+        <p:txBody>
+          <a:bodyPr lIns="50800" tIns="12700" rIns="50800" bIns="12700" rtlCol="0" anchor="ctr"/>
+          <a:lstStyle/>
+          <a:p>
+            <a:pPr algn="ctr">
+              <a:lnSpc>
+                <a:spcPct val="90000"/>
+              </a:lnSpc>
+            </a:pPr>
+            <a:r>
+              <a:rPr lang="ru-RU" sz="1000" dirty="0">
+                <a:solidFill>
+                  <a:srgbClr val="464646"/>
+                </a:solidFill>
+                <a:latin typeface="Segoe UI" panose="020B0502040204020203" pitchFamily="34" charset="0"/>
+              </a:rPr>
+              <a:t>Ведущий специалист</a:t>
+            </a:r>
+            <a:endParaRPr lang="ru-RU" sz="800" i="1" dirty="0">
+              <a:solidFill>
+                <a:srgbClr val="227838"/>
+              </a:solidFill>
+              <a:latin typeface="Segoe UI" panose="020B0502040204020203" pitchFamily="34" charset="0"/>
+            </a:endParaRPr>
+          </a:p>
+          <a:p>
+            <a:pPr algn="ctr">
+              <a:lnSpc>
+                <a:spcPct val="90000"/>
+              </a:lnSpc>
+            </a:pPr>
+            <a:r>
+              <a:rPr lang="ru-RU" sz="1000" b="1" dirty="0">
+                <a:solidFill>
+                  <a:srgbClr val="1F3864"/>
+                </a:solidFill>
+                <a:latin typeface="Segoe UI" panose="020B0502040204020203" pitchFamily="34" charset="0"/>
+              </a:rPr>
+              <a:t>Тулесова</a:t>
+            </a:r>
+            <a:r>
+              <a:rPr lang="ru-RU" sz="900" b="0" dirty="0">
+                <a:solidFill>
+                  <a:srgbClr val="227838"/>
+                </a:solidFill>
+                <a:latin typeface="Segoe UI" panose="020B0502040204020203" pitchFamily="34" charset="0"/>
+              </a:rPr>
+              <a:t> · 700 000</a:t>
+            </a:r>
+            <a:endParaRPr lang="ru-RU" sz="1100" b="1" dirty="0">
+              <a:solidFill>
+                <a:srgbClr val="1F3864"/>
+              </a:solidFill>
+              <a:latin typeface="Segoe UI" panose="020B0502040204020203" pitchFamily="34" charset="0"/>
+            </a:endParaRPr>
+          </a:p>
+        </p:txBody>
+      </p:sp>
+      <p:sp>
+        <p:nvSpPr>
+          <p:cNvPr id="270" name="Сотрудник 270"/>
+          <p:cNvSpPr/>
+          <p:nvPr/>
+        </p:nvSpPr>
+        <p:spPr>
+          <a:xfrm>
+            <a:off x="4724400" y="5842000"/>
+            <a:ext cx="2590800" cy="355600"/>
+          </a:xfrm>
+          <a:prstGeom prst="roundRect">
+            <a:avLst>
+              <a:gd name="adj" fmla="val 12000"/>
+            </a:avLst>
+          </a:prstGeom>
+          <a:solidFill>
+            <a:srgbClr val="E6DFF3"/>
+          </a:solidFill>
+          <a:ln w="12700">
+            <a:solidFill>
+              <a:srgbClr val="227838"/>
+            </a:solidFill>
+          </a:ln>
+        </p:spPr>
+        <p:txBody>
+          <a:bodyPr lIns="50800" tIns="12700" rIns="50800" bIns="12700" rtlCol="0" anchor="ctr"/>
+          <a:lstStyle/>
+          <a:p>
+            <a:pPr algn="ctr">
+              <a:lnSpc>
+                <a:spcPct val="90000"/>
+              </a:lnSpc>
+            </a:pPr>
+            <a:r>
+              <a:rPr lang="ru-RU" sz="1000" dirty="0">
+                <a:solidFill>
+                  <a:srgbClr val="464646"/>
+                </a:solidFill>
+                <a:latin typeface="Segoe UI" panose="020B0502040204020203" pitchFamily="34" charset="0"/>
+              </a:rPr>
+              <a:t>Ведущий специалист</a:t>
+            </a:r>
+            <a:endParaRPr lang="ru-RU" sz="800" i="1" dirty="0">
+              <a:solidFill>
+                <a:srgbClr val="227838"/>
+              </a:solidFill>
+              <a:latin typeface="Segoe UI" panose="020B0502040204020203" pitchFamily="34" charset="0"/>
+            </a:endParaRPr>
+          </a:p>
+          <a:p>
+            <a:pPr algn="ctr">
+              <a:lnSpc>
+                <a:spcPct val="90000"/>
+              </a:lnSpc>
+            </a:pPr>
+            <a:r>
+              <a:rPr lang="ru-RU" sz="1000" b="1" dirty="0">
+                <a:solidFill>
+                  <a:srgbClr val="1F3864"/>
+                </a:solidFill>
+                <a:latin typeface="Segoe UI" panose="020B0502040204020203" pitchFamily="34" charset="0"/>
+              </a:rPr>
+              <a:t>Бекжанова Нагима</a:t>
+            </a:r>
+            <a:r>
+              <a:rPr lang="ru-RU" sz="900" b="0" dirty="0">
+                <a:solidFill>
+                  <a:srgbClr val="227838"/>
+                </a:solidFill>
+                <a:latin typeface="Segoe UI" panose="020B0502040204020203" pitchFamily="34" charset="0"/>
+              </a:rPr>
+              <a:t> · 700 000</a:t>
+            </a:r>
+            <a:endParaRPr lang="ru-RU" sz="1100" b="1" dirty="0">
+              <a:solidFill>
+                <a:srgbClr val="1F3864"/>
+              </a:solidFill>
+              <a:latin typeface="Segoe UI" panose="020B0502040204020203" pitchFamily="34" charset="0"/>
+            </a:endParaRPr>
+          </a:p>
+        </p:txBody>
+      </p:sp>
+      <p:sp>
+        <p:nvSpPr>
+          <p:cNvPr id="279" name="Сотрудник 279"/>
+          <p:cNvSpPr/>
+          <p:nvPr/>
+        </p:nvSpPr>
+        <p:spPr>
+          <a:xfrm>
+            <a:off x="228600" y="2819400"/>
+            <a:ext cx="1968500" cy="508000"/>
+          </a:xfrm>
+          <a:prstGeom prst="roundRect">
+            <a:avLst>
+              <a:gd name="adj" fmla="val 12000"/>
+            </a:avLst>
+          </a:prstGeom>
+          <a:solidFill>
+            <a:srgbClr val="E9F3EA"/>
+          </a:solidFill>
+          <a:ln w="12700">
+            <a:solidFill>
+              <a:srgbClr val="227838"/>
+            </a:solidFill>
+          </a:ln>
+        </p:spPr>
+        <p:txBody>
+          <a:bodyPr lIns="50800" tIns="12700" rIns="50800" bIns="12700" rtlCol="0" anchor="ctr"/>
+          <a:lstStyle/>
+          <a:p>
+            <a:pPr algn="ctr">
+              <a:lnSpc>
+                <a:spcPct val="90000"/>
+              </a:lnSpc>
+            </a:pPr>
+            <a:r>
+              <a:rPr lang="ru-RU" sz="1000" dirty="0">
+                <a:solidFill>
+                  <a:srgbClr val="464646"/>
+                </a:solidFill>
+                <a:latin typeface="Segoe UI" panose="020B0502040204020203" pitchFamily="34" charset="0"/>
+              </a:rPr>
+              <a:t>Гл. специалист, PR — пресс-секретарь</a:t>
+            </a:r>
+          </a:p>
+          <a:p>
+            <a:pPr algn="ctr">
+              <a:lnSpc>
+                <a:spcPct val="90000"/>
+              </a:lnSpc>
+            </a:pPr>
+            <a:r>
+              <a:rPr lang="ru-RU" sz="1000" b="1" dirty="0">
+                <a:solidFill>
+                  <a:srgbClr val="1F3864"/>
+                </a:solidFill>
+                <a:latin typeface="Segoe UI" panose="020B0502040204020203" pitchFamily="34" charset="0"/>
+              </a:rPr>
+              <a:t>Талғат Айман</a:t>
+            </a:r>
+            <a:r>
+              <a:rPr lang="ru-RU" sz="900" b="0" dirty="0">
+                <a:solidFill>
+                  <a:srgbClr val="227838"/>
+                </a:solidFill>
+                <a:latin typeface="Segoe UI" panose="020B0502040204020203" pitchFamily="34" charset="0"/>
+              </a:rPr>
+              <a:t> · 1 000 000</a:t>
+            </a:r>
+            <a:endParaRPr lang="ru-RU" sz="1100" b="1" dirty="0">
+              <a:solidFill>
+                <a:srgbClr val="1F3864"/>
+              </a:solidFill>
+              <a:latin typeface="Segoe UI" panose="020B0502040204020203" pitchFamily="34" charset="0"/>
+            </a:endParaRPr>
+          </a:p>
+        </p:txBody>
+      </p:sp>
+      <p:sp>
+        <p:nvSpPr>
+          <p:cNvPr id="280" name="Сотрудник 280"/>
+          <p:cNvSpPr/>
+          <p:nvPr/>
+        </p:nvSpPr>
+        <p:spPr>
+          <a:xfrm>
+            <a:off x="228600" y="3378200"/>
+            <a:ext cx="1968500" cy="508000"/>
+          </a:xfrm>
+          <a:prstGeom prst="roundRect">
+            <a:avLst>
+              <a:gd name="adj" fmla="val 12000"/>
+            </a:avLst>
+          </a:prstGeom>
+          <a:solidFill>
+            <a:srgbClr val="E9F3EA"/>
+          </a:solidFill>
+          <a:ln w="12700">
+            <a:solidFill>
+              <a:srgbClr val="227838"/>
+            </a:solidFill>
+          </a:ln>
+        </p:spPr>
+        <p:txBody>
+          <a:bodyPr lIns="50800" tIns="12700" rIns="50800" bIns="12700" rtlCol="0" anchor="ctr"/>
+          <a:lstStyle/>
+          <a:p>
+            <a:pPr algn="ctr">
+              <a:lnSpc>
+                <a:spcPct val="90000"/>
+              </a:lnSpc>
+            </a:pPr>
+            <a:r>
+              <a:rPr lang="ru-RU" sz="1000" dirty="0">
+                <a:solidFill>
+                  <a:srgbClr val="464646"/>
+                </a:solidFill>
+                <a:latin typeface="Segoe UI" panose="020B0502040204020203" pitchFamily="34" charset="0"/>
+              </a:rPr>
+              <a:t>Вед. специалист, фотограф-рилсмейкер</a:t>
+            </a:r>
+          </a:p>
+          <a:p>
+            <a:pPr algn="ctr">
+              <a:lnSpc>
+                <a:spcPct val="90000"/>
+              </a:lnSpc>
+            </a:pPr>
+            <a:r>
+              <a:rPr lang="ru-RU" sz="1000" b="1" dirty="0">
+                <a:solidFill>
+                  <a:srgbClr val="1F3864"/>
+                </a:solidFill>
+                <a:latin typeface="Segoe UI" panose="020B0502040204020203" pitchFamily="34" charset="0"/>
+              </a:rPr>
+              <a:t>Жумабай</a:t>
+            </a:r>
+            <a:r>
+              <a:rPr lang="ru-RU" sz="900" b="0" dirty="0">
+                <a:solidFill>
+                  <a:srgbClr val="227838"/>
+                </a:solidFill>
+                <a:latin typeface="Segoe UI" panose="020B0502040204020203" pitchFamily="34" charset="0"/>
+              </a:rPr>
+              <a:t> · 1 000 000</a:t>
+            </a:r>
+            <a:endParaRPr lang="ru-RU" sz="1100" b="1" dirty="0">
+              <a:solidFill>
+                <a:srgbClr val="1F3864"/>
+              </a:solidFill>
+              <a:latin typeface="Segoe UI" panose="020B0502040204020203" pitchFamily="34" charset="0"/>
+            </a:endParaRPr>
+          </a:p>
+        </p:txBody>
+      </p:sp>
+      <p:sp>
+        <p:nvSpPr>
+          <p:cNvPr id="281" name="Сотрудник 281"/>
+          <p:cNvSpPr/>
+          <p:nvPr/>
+        </p:nvSpPr>
+        <p:spPr>
+          <a:xfrm>
+            <a:off x="228600" y="3937000"/>
+            <a:ext cx="1968500" cy="508000"/>
+          </a:xfrm>
+          <a:prstGeom prst="roundRect">
+            <a:avLst>
+              <a:gd name="adj" fmla="val 12000"/>
+            </a:avLst>
+          </a:prstGeom>
+          <a:solidFill>
+            <a:srgbClr val="E9F3EA"/>
+          </a:solidFill>
+          <a:ln w="12700">
+            <a:solidFill>
+              <a:srgbClr val="227838"/>
+            </a:solidFill>
+          </a:ln>
+        </p:spPr>
+        <p:txBody>
+          <a:bodyPr lIns="50800" tIns="12700" rIns="50800" bIns="12700" rtlCol="0" anchor="ctr"/>
+          <a:lstStyle/>
+          <a:p>
+            <a:pPr algn="ctr">
+              <a:lnSpc>
+                <a:spcPct val="90000"/>
+              </a:lnSpc>
+            </a:pPr>
+            <a:r>
+              <a:rPr lang="ru-RU" sz="1000" dirty="0">
+                <a:solidFill>
+                  <a:srgbClr val="464646"/>
+                </a:solidFill>
+                <a:latin typeface="Segoe UI" panose="020B0502040204020203" pitchFamily="34" charset="0"/>
+              </a:rPr>
+              <a:t>Вед. специалист, менеджер по блогерам</a:t>
+            </a:r>
+          </a:p>
+          <a:p>
+            <a:pPr algn="ctr">
+              <a:lnSpc>
+                <a:spcPct val="90000"/>
+              </a:lnSpc>
+            </a:pPr>
+            <a:r>
+              <a:rPr lang="ru-RU" sz="1000" b="1" dirty="0">
+                <a:solidFill>
+                  <a:srgbClr val="1F3864"/>
+                </a:solidFill>
+                <a:latin typeface="Segoe UI" panose="020B0502040204020203" pitchFamily="34" charset="0"/>
+              </a:rPr>
+              <a:t>Дутбаева</a:t>
+            </a:r>
+            <a:r>
+              <a:rPr lang="ru-RU" sz="900" b="0" dirty="0">
+                <a:solidFill>
+                  <a:srgbClr val="227838"/>
+                </a:solidFill>
+                <a:latin typeface="Segoe UI" panose="020B0502040204020203" pitchFamily="34" charset="0"/>
+              </a:rPr>
+              <a:t> · 700 000</a:t>
+            </a:r>
+            <a:endParaRPr lang="ru-RU" sz="1100" b="1" dirty="0">
+              <a:solidFill>
+                <a:srgbClr val="1F3864"/>
+              </a:solidFill>
+              <a:latin typeface="Segoe UI" panose="020B0502040204020203" pitchFamily="34" charset="0"/>
+            </a:endParaRPr>
+          </a:p>
+        </p:txBody>
+      </p:sp>
+      <p:sp>
+        <p:nvSpPr>
+          <p:cNvPr id="282" name="Аутсорс 282"/>
+          <p:cNvSpPr/>
+          <p:nvPr/>
+        </p:nvSpPr>
+        <p:spPr>
+          <a:xfrm>
+            <a:off x="228600" y="4495800"/>
+            <a:ext cx="1968500" cy="431800"/>
+          </a:xfrm>
+          <a:prstGeom prst="roundRect">
+            <a:avLst>
+              <a:gd name="adj" fmla="val 12000"/>
+            </a:avLst>
+          </a:prstGeom>
+          <a:solidFill>
+            <a:srgbClr val="FFF2CC"/>
+          </a:solidFill>
+          <a:ln w="12700">
+            <a:solidFill>
+              <a:srgbClr val="BF9000"/>
+            </a:solidFill>
+            <a:prstDash val="dash"/>
+          </a:ln>
+        </p:spPr>
+        <p:txBody>
+          <a:bodyPr lIns="50800" tIns="12700" rIns="50800" bIns="12700" rtlCol="0" anchor="ctr"/>
+          <a:lstStyle/>
+          <a:p>
+            <a:pPr algn="ctr">
+              <a:lnSpc>
+                <a:spcPct val="90000"/>
+              </a:lnSpc>
+            </a:pPr>
+            <a:r>
+              <a:rPr lang="ru-RU" sz="1000" b="1" dirty="0">
+                <a:solidFill>
+                  <a:srgbClr val="7F6000"/>
+                </a:solidFill>
+                <a:latin typeface="Segoe UI" panose="020B0502040204020203" pitchFamily="34" charset="0"/>
+              </a:rPr>
+              <a:t>Режиссёр, видеограф-монтажёр </a:t>
+            </a:r>
+            <a:r>
+              <a:rPr lang="ru-RU" sz="1000" b="0" i="1" dirty="0">
+                <a:solidFill>
+                  <a:srgbClr val="7F6000"/>
+                </a:solidFill>
+                <a:latin typeface="Segoe UI" panose="020B0502040204020203" pitchFamily="34" charset="0"/>
+              </a:rPr>
+              <a:t>(аутсорс)</a:t>
+            </a:r>
+            <a:endParaRPr lang="ru-RU" sz="1000" i="1" dirty="0">
+              <a:solidFill>
+                <a:srgbClr val="7F6000"/>
+              </a:solidFill>
+              <a:latin typeface="Segoe UI" panose="020B0502040204020203" pitchFamily="34" charset="0"/>
+            </a:endParaRPr>
+          </a:p>
+        </p:txBody>
+      </p:sp>
+      <p:sp>
+        <p:nvSpPr>
+          <p:cNvPr id="283" name="Аутсорс 283"/>
+          <p:cNvSpPr/>
+          <p:nvPr/>
+        </p:nvSpPr>
+        <p:spPr>
+          <a:xfrm>
+            <a:off x="228600" y="4978400"/>
+            <a:ext cx="1968500" cy="330200"/>
+          </a:xfrm>
+          <a:prstGeom prst="roundRect">
+            <a:avLst>
+              <a:gd name="adj" fmla="val 12000"/>
+            </a:avLst>
+          </a:prstGeom>
+          <a:solidFill>
+            <a:srgbClr val="FFF2CC"/>
+          </a:solidFill>
+          <a:ln w="12700">
+            <a:solidFill>
+              <a:srgbClr val="BF9000"/>
+            </a:solidFill>
+            <a:prstDash val="dash"/>
+          </a:ln>
+        </p:spPr>
+        <p:txBody>
+          <a:bodyPr lIns="50800" tIns="12700" rIns="50800" bIns="12700" rtlCol="0" anchor="ctr"/>
+          <a:lstStyle/>
+          <a:p>
+            <a:pPr algn="ctr">
+              <a:lnSpc>
+                <a:spcPct val="90000"/>
+              </a:lnSpc>
+            </a:pPr>
+            <a:r>
+              <a:rPr lang="ru-RU" sz="1000" b="1" dirty="0">
+                <a:solidFill>
+                  <a:srgbClr val="7F6000"/>
+                </a:solidFill>
+                <a:latin typeface="Segoe UI" panose="020B0502040204020203" pitchFamily="34" charset="0"/>
+              </a:rPr>
+              <a:t>Копирайтер </a:t>
+            </a:r>
+            <a:r>
+              <a:rPr lang="ru-RU" sz="1000" b="0" i="1" dirty="0">
+                <a:solidFill>
+                  <a:srgbClr val="7F6000"/>
+                </a:solidFill>
+                <a:latin typeface="Segoe UI" panose="020B0502040204020203" pitchFamily="34" charset="0"/>
+              </a:rPr>
+              <a:t>(аутсорс)</a:t>
+            </a:r>
+            <a:endParaRPr lang="ru-RU" sz="1000" i="1" dirty="0">
+              <a:solidFill>
+                <a:srgbClr val="7F6000"/>
+              </a:solidFill>
+              <a:latin typeface="Segoe UI" panose="020B0502040204020203" pitchFamily="34" charset="0"/>
+            </a:endParaRPr>
+          </a:p>
+        </p:txBody>
+      </p:sp>
+      <p:sp>
+        <p:nvSpPr>
+          <p:cNvPr id="284" name="Аутсорс 284"/>
+          <p:cNvSpPr/>
+          <p:nvPr/>
+        </p:nvSpPr>
+        <p:spPr>
+          <a:xfrm>
+            <a:off x="228600" y="5359400"/>
+            <a:ext cx="1968500" cy="330200"/>
+          </a:xfrm>
+          <a:prstGeom prst="roundRect">
+            <a:avLst>
+              <a:gd name="adj" fmla="val 12000"/>
+            </a:avLst>
+          </a:prstGeom>
+          <a:solidFill>
+            <a:srgbClr val="FFF2CC"/>
+          </a:solidFill>
+          <a:ln w="12700">
+            <a:solidFill>
+              <a:srgbClr val="BF9000"/>
+            </a:solidFill>
+            <a:prstDash val="dash"/>
+          </a:ln>
+        </p:spPr>
+        <p:txBody>
+          <a:bodyPr lIns="50800" tIns="12700" rIns="50800" bIns="12700" rtlCol="0" anchor="ctr"/>
+          <a:lstStyle/>
+          <a:p>
+            <a:pPr algn="ctr">
+              <a:lnSpc>
+                <a:spcPct val="90000"/>
+              </a:lnSpc>
+            </a:pPr>
+            <a:r>
+              <a:rPr lang="ru-RU" sz="1000" b="1" dirty="0">
+                <a:solidFill>
+                  <a:srgbClr val="7F6000"/>
+                </a:solidFill>
+                <a:latin typeface="Segoe UI" panose="020B0502040204020203" pitchFamily="34" charset="0"/>
+              </a:rPr>
+              <a:t>Дизайнер </a:t>
+            </a:r>
+            <a:r>
+              <a:rPr lang="ru-RU" sz="1000" b="0" i="1" dirty="0">
+                <a:solidFill>
+                  <a:srgbClr val="7F6000"/>
+                </a:solidFill>
+                <a:latin typeface="Segoe UI" panose="020B0502040204020203" pitchFamily="34" charset="0"/>
+              </a:rPr>
+              <a:t>(аутсорс)</a:t>
+            </a:r>
+            <a:endParaRPr lang="ru-RU" sz="1000" i="1" dirty="0">
+              <a:solidFill>
+                <a:srgbClr val="7F6000"/>
+              </a:solidFill>
+              <a:latin typeface="Segoe UI" panose="020B0502040204020203" pitchFamily="34" charset="0"/>
+            </a:endParaRPr>
+          </a:p>
+        </p:txBody>
+      </p:sp>
+      <p:sp>
+        <p:nvSpPr>
+          <p:cNvPr id="285" name="Аутсорс 285"/>
+          <p:cNvSpPr/>
+          <p:nvPr/>
+        </p:nvSpPr>
+        <p:spPr>
+          <a:xfrm>
+            <a:off x="228600" y="5740400"/>
+            <a:ext cx="1968500" cy="508000"/>
+          </a:xfrm>
+          <a:prstGeom prst="roundRect">
+            <a:avLst>
+              <a:gd name="adj" fmla="val 12000"/>
+            </a:avLst>
+          </a:prstGeom>
+          <a:solidFill>
+            <a:srgbClr val="FFF2CC"/>
+          </a:solidFill>
+          <a:ln w="12700">
+            <a:solidFill>
+              <a:srgbClr val="BF9000"/>
+            </a:solidFill>
+            <a:prstDash val="dash"/>
+          </a:ln>
+        </p:spPr>
+        <p:txBody>
+          <a:bodyPr lIns="50800" tIns="12700" rIns="50800" bIns="12700" rtlCol="0" anchor="ctr"/>
+          <a:lstStyle/>
+          <a:p>
+            <a:pPr algn="ctr">
+              <a:lnSpc>
+                <a:spcPct val="90000"/>
+              </a:lnSpc>
+            </a:pPr>
+            <a:r>
+              <a:rPr lang="ru-RU" sz="1000" b="1" dirty="0">
+                <a:solidFill>
+                  <a:srgbClr val="7F6000"/>
+                </a:solidFill>
+                <a:latin typeface="Segoe UI" panose="020B0502040204020203" pitchFamily="34" charset="0"/>
+              </a:rPr>
+              <a:t>Менеджер по креаторам и креативным проектам </a:t>
+            </a:r>
+            <a:r>
+              <a:rPr lang="ru-RU" sz="1000" b="0" i="1" dirty="0">
+                <a:solidFill>
+                  <a:srgbClr val="7F6000"/>
+                </a:solidFill>
+                <a:latin typeface="Segoe UI" panose="020B0502040204020203" pitchFamily="34" charset="0"/>
+              </a:rPr>
+              <a:t>(аутсорс)</a:t>
+            </a:r>
+            <a:endParaRPr lang="ru-RU" sz="1000" i="1" dirty="0">
+              <a:solidFill>
+                <a:srgbClr val="7F6000"/>
+              </a:solidFill>
+              <a:latin typeface="Segoe UI" panose="020B0502040204020203" pitchFamily="34" charset="0"/>
+            </a:endParaRPr>
+          </a:p>
+        </p:txBody>
+      </p:sp>
+      <p:sp>
+        <p:nvSpPr>
+          <p:cNvPr id="294" name="Итог 294"/>
+          <p:cNvSpPr/>
+          <p:nvPr/>
+        </p:nvSpPr>
+        <p:spPr>
+          <a:xfrm>
+            <a:off x="9639300" y="5099685"/>
+            <a:ext cx="2286000" cy="736600"/>
+          </a:xfrm>
+          <a:prstGeom prst="roundRect">
+            <a:avLst>
+              <a:gd name="adj" fmla="val 12000"/>
+            </a:avLst>
+          </a:prstGeom>
+          <a:solidFill>
+            <a:srgbClr val="E1E1E1"/>
+          </a:solidFill>
+          <a:ln w="12700">
+            <a:solidFill>
+              <a:srgbClr val="E1E1E1"/>
+            </a:solidFill>
+          </a:ln>
+        </p:spPr>
+        <p:txBody>
+          <a:bodyPr lIns="50800" tIns="12700" rIns="50800" bIns="12700" rtlCol="0" anchor="ctr"/>
+          <a:lstStyle/>
+          <a:p>
+            <a:pPr algn="ctr">
+              <a:lnSpc>
+                <a:spcPct val="90000"/>
+              </a:lnSpc>
+            </a:pPr>
+            <a:r>
+              <a:rPr lang="ru-RU" sz="1000" b="1" dirty="0">
+                <a:solidFill>
+                  <a:srgbClr val="1F3864"/>
+                </a:solidFill>
+                <a:latin typeface="Segoe UI" panose="020B0502040204020203" pitchFamily="34" charset="0"/>
+              </a:rPr>
+              <a:t>Всего в штате — </a:t>
+            </a:r>
+            <a:r>
+              <a:rPr lang="ru-RU" sz="1000" b="1" dirty="0">
+                <a:solidFill>
+                  <a:srgbClr val="FF0000"/>
+                </a:solidFill>
+                <a:latin typeface="Segoe UI" panose="020B0502040204020203" pitchFamily="34" charset="0"/>
+              </a:rPr>
+              <a:t>30</a:t>
+            </a:r>
+          </a:p>
+          <a:p>
+            <a:pPr algn="ctr">
+              <a:lnSpc>
+                <a:spcPct val="90000"/>
+              </a:lnSpc>
+            </a:pPr>
+            <a:r>
+              <a:rPr lang="ru-RU" sz="1000" b="1" dirty="0">
+                <a:solidFill>
+                  <a:srgbClr val="1F3864"/>
+                </a:solidFill>
+                <a:latin typeface="Segoe UI" panose="020B0502040204020203" pitchFamily="34" charset="0"/>
+              </a:rPr>
+              <a:t>ЦАКФ и проектный офис</a:t>
+            </a:r>
+          </a:p>
+          <a:p>
+            <a:pPr algn="ctr">
+              <a:lnSpc>
+                <a:spcPct val="90000"/>
+              </a:lnSpc>
+            </a:pPr>
+            <a:r>
+              <a:rPr lang="ru-RU" sz="900" dirty="0">
+                <a:solidFill>
+                  <a:srgbClr val="1F3864"/>
+                </a:solidFill>
+                <a:latin typeface="Segoe UI" panose="020B0502040204020203" pitchFamily="34" charset="0"/>
+              </a:rPr>
+              <a:t>в 2026 — 18, в 2027 — +12</a:t>
+            </a:r>
+            <a:endParaRPr lang="ru-RU" sz="800" i="1" dirty="0">
+              <a:solidFill>
+                <a:srgbClr val="1F3864"/>
+              </a:solidFill>
+              <a:latin typeface="Segoe UI" panose="020B0502040204020203" pitchFamily="34" charset="0"/>
+            </a:endParaRPr>
+          </a:p>
+          <a:p>
+            <a:pPr algn="ctr">
+              <a:lnSpc>
+                <a:spcPct val="90000"/>
+              </a:lnSpc>
+            </a:pPr>
+            <a:r>
+              <a:rPr lang="ru-RU" sz="900" b="1" dirty="0">
+                <a:solidFill>
+                  <a:srgbClr val="7F6000"/>
+                </a:solidFill>
+                <a:latin typeface="Segoe UI" panose="020B0502040204020203" pitchFamily="34" charset="0"/>
+              </a:rPr>
+              <a:t>аутсорс — 7 позиций</a:t>
+            </a:r>
+          </a:p>
+        </p:txBody>
+      </p:sp>
+      <p:sp>
+        <p:nvSpPr>
+          <p:cNvPr id="306" name="Сотрудник 306"/>
+          <p:cNvSpPr/>
+          <p:nvPr/>
+        </p:nvSpPr>
+        <p:spPr>
+          <a:xfrm>
+            <a:off x="4724400" y="4660900"/>
+            <a:ext cx="2590800" cy="355600"/>
+          </a:xfrm>
+          <a:prstGeom prst="roundRect">
+            <a:avLst>
+              <a:gd name="adj" fmla="val 12000"/>
+            </a:avLst>
+          </a:prstGeom>
+          <a:solidFill>
+            <a:srgbClr val="E6DFF3"/>
+          </a:solidFill>
+          <a:ln w="12700">
+            <a:solidFill>
+              <a:srgbClr val="227838"/>
+            </a:solidFill>
+          </a:ln>
+        </p:spPr>
+        <p:txBody>
+          <a:bodyPr lIns="50800" tIns="12700" rIns="50800" bIns="12700" rtlCol="0" anchor="ctr"/>
+          <a:lstStyle/>
+          <a:p>
+            <a:pPr algn="ctr">
+              <a:lnSpc>
+                <a:spcPct val="90000"/>
+              </a:lnSpc>
+            </a:pPr>
+            <a:r>
+              <a:rPr lang="ru-RU" sz="1000" dirty="0">
+                <a:solidFill>
+                  <a:srgbClr val="464646"/>
+                </a:solidFill>
+                <a:latin typeface="Segoe UI" panose="020B0502040204020203" pitchFamily="34" charset="0"/>
+              </a:rPr>
+              <a:t>Вед. специалист (молодёжь, НПО)</a:t>
+            </a:r>
+          </a:p>
+          <a:p>
+            <a:pPr algn="ctr">
+              <a:lnSpc>
+                <a:spcPct val="90000"/>
+              </a:lnSpc>
+            </a:pPr>
+            <a:r>
+              <a:rPr lang="ru-RU" sz="1000" b="1" dirty="0">
+                <a:solidFill>
+                  <a:srgbClr val="1F3864"/>
+                </a:solidFill>
+                <a:latin typeface="Segoe UI" panose="020B0502040204020203" pitchFamily="34" charset="0"/>
+              </a:rPr>
+              <a:t>Абулхан Ә.</a:t>
+            </a:r>
+            <a:r>
+              <a:rPr lang="ru-RU" sz="900" b="0" dirty="0">
+                <a:solidFill>
+                  <a:srgbClr val="227838"/>
+                </a:solidFill>
+                <a:latin typeface="Segoe UI" panose="020B0502040204020203" pitchFamily="34" charset="0"/>
+              </a:rPr>
+              <a:t> · 800 000</a:t>
+            </a:r>
+            <a:endParaRPr lang="ru-RU" sz="1100" b="1" dirty="0">
+              <a:solidFill>
+                <a:srgbClr val="1F3864"/>
+              </a:solidFill>
+              <a:latin typeface="Segoe UI" panose="020B0502040204020203" pitchFamily="34" charset="0"/>
+            </a:endParaRPr>
+          </a:p>
+        </p:txBody>
+      </p:sp>
+      <p:sp>
+        <p:nvSpPr>
+          <p:cNvPr id="308" name="Сотрудник 308"/>
+          <p:cNvSpPr/>
+          <p:nvPr/>
+        </p:nvSpPr>
+        <p:spPr>
+          <a:xfrm>
+            <a:off x="7620000" y="3683000"/>
+            <a:ext cx="1701800" cy="508000"/>
+          </a:xfrm>
+          <a:prstGeom prst="roundRect">
+            <a:avLst>
+              <a:gd name="adj" fmla="val 12000"/>
+            </a:avLst>
+          </a:prstGeom>
+          <a:solidFill>
+            <a:srgbClr val="E6DFF3"/>
+          </a:solidFill>
+          <a:ln w="12700">
+            <a:solidFill>
+              <a:srgbClr val="787878"/>
+            </a:solidFill>
+            <a:prstDash val="dash"/>
+          </a:ln>
+        </p:spPr>
+        <p:txBody>
+          <a:bodyPr lIns="50800" tIns="12700" rIns="50800" bIns="12700" rtlCol="0" anchor="ctr"/>
+          <a:lstStyle/>
+          <a:p>
+            <a:pPr algn="ctr">
+              <a:lnSpc>
+                <a:spcPct val="90000"/>
+              </a:lnSpc>
+            </a:pPr>
+            <a:r>
+              <a:rPr lang="ru-RU" sz="900" dirty="0">
+                <a:solidFill>
+                  <a:srgbClr val="787878"/>
+                </a:solidFill>
+                <a:latin typeface="Segoe UI" panose="020B0502040204020203" pitchFamily="34" charset="0"/>
+              </a:rPr>
+              <a:t>Эксперт по отходам/воде/воздуху</a:t>
+            </a:r>
+            <a:endParaRPr lang="ru-RU" sz="900" dirty="0">
+              <a:solidFill>
+                <a:srgbClr val="464646"/>
+              </a:solidFill>
+              <a:latin typeface="Segoe UI" panose="020B0502040204020203" pitchFamily="34" charset="0"/>
+            </a:endParaRPr>
+          </a:p>
+          <a:p>
+            <a:pPr algn="ctr">
+              <a:lnSpc>
+                <a:spcPct val="90000"/>
+              </a:lnSpc>
+            </a:pPr>
+            <a:r>
+              <a:rPr lang="ru-RU" sz="900" b="0" i="1" dirty="0">
+                <a:solidFill>
+                  <a:srgbClr val="787878"/>
+                </a:solidFill>
+                <a:latin typeface="Segoe UI" panose="020B0502040204020203" pitchFamily="34" charset="0"/>
+              </a:rPr>
+              <a:t>вакансия</a:t>
+            </a:r>
+            <a:r>
+              <a:rPr lang="ru-RU" sz="900" b="0" dirty="0">
+                <a:solidFill>
+                  <a:srgbClr val="227838"/>
+                </a:solidFill>
+                <a:latin typeface="Segoe UI" panose="020B0502040204020203" pitchFamily="34" charset="0"/>
+              </a:rPr>
+              <a:t> · 800 000</a:t>
+            </a:r>
+            <a:endParaRPr lang="ru-RU" sz="900" b="1" dirty="0">
+              <a:solidFill>
+                <a:srgbClr val="1F3864"/>
+              </a:solidFill>
+              <a:latin typeface="Segoe UI" panose="020B0502040204020203" pitchFamily="34" charset="0"/>
+            </a:endParaRPr>
+          </a:p>
+        </p:txBody>
+      </p:sp>
+      <p:sp>
+        <p:nvSpPr>
+          <p:cNvPr id="310" name="Сотрудник 310"/>
+          <p:cNvSpPr/>
+          <p:nvPr/>
+        </p:nvSpPr>
+        <p:spPr>
+          <a:xfrm>
+            <a:off x="7620000" y="3124200"/>
+            <a:ext cx="1701800" cy="508000"/>
+          </a:xfrm>
+          <a:prstGeom prst="roundRect">
+            <a:avLst>
+              <a:gd name="adj" fmla="val 12000"/>
+            </a:avLst>
+          </a:prstGeom>
+          <a:solidFill>
+            <a:srgbClr val="E6DFF3"/>
+          </a:solidFill>
+          <a:ln w="12700">
+            <a:solidFill>
+              <a:srgbClr val="1F3864"/>
+            </a:solidFill>
+          </a:ln>
+        </p:spPr>
+        <p:txBody>
+          <a:bodyPr lIns="50800" tIns="12700" rIns="50800" bIns="12700" rtlCol="0" anchor="ctr"/>
+          <a:lstStyle/>
+          <a:p>
+            <a:pPr algn="ctr">
+              <a:lnSpc>
+                <a:spcPct val="90000"/>
+              </a:lnSpc>
+            </a:pPr>
+            <a:r>
+              <a:rPr lang="ru-RU" sz="1000" dirty="0">
+                <a:solidFill>
+                  <a:srgbClr val="464646"/>
+                </a:solidFill>
+                <a:latin typeface="Segoe UI" panose="020B0502040204020203" pitchFamily="34" charset="0"/>
+              </a:rPr>
+              <a:t>Эксперт-эколог</a:t>
+            </a:r>
+          </a:p>
+          <a:p>
+            <a:pPr algn="ctr">
+              <a:lnSpc>
+                <a:spcPct val="90000"/>
+              </a:lnSpc>
+            </a:pPr>
+            <a:r>
+              <a:rPr lang="ru-RU" sz="1000" b="1" dirty="0">
+                <a:solidFill>
+                  <a:srgbClr val="1F3864"/>
+                </a:solidFill>
+                <a:latin typeface="Segoe UI" panose="020B0502040204020203" pitchFamily="34" charset="0"/>
+              </a:rPr>
+              <a:t>Загирова Анастасия</a:t>
+            </a:r>
+            <a:r>
+              <a:rPr lang="ru-RU" sz="900" b="0" dirty="0">
+                <a:solidFill>
+                  <a:srgbClr val="227838"/>
+                </a:solidFill>
+                <a:latin typeface="Segoe UI" panose="020B0502040204020203" pitchFamily="34" charset="0"/>
+              </a:rPr>
+              <a:t/>
+            </a:r>
+            <a:br>
+              <a:rPr lang="ru-RU" sz="900" b="0" dirty="0">
+                <a:solidFill>
+                  <a:srgbClr val="227838"/>
+                </a:solidFill>
+                <a:latin typeface="Segoe UI" panose="020B0502040204020203" pitchFamily="34" charset="0"/>
+              </a:rPr>
+            </a:br>
+            <a:r>
+              <a:rPr lang="ru-RU" sz="900" b="0" dirty="0">
+                <a:solidFill>
+                  <a:srgbClr val="227838"/>
+                </a:solidFill>
+                <a:latin typeface="Segoe UI" panose="020B0502040204020203" pitchFamily="34" charset="0"/>
+              </a:rPr>
+              <a:t>800 000</a:t>
+            </a:r>
+            <a:endParaRPr lang="ru-RU" sz="1100" b="1" dirty="0">
+              <a:solidFill>
+                <a:srgbClr val="1F3864"/>
+              </a:solidFill>
+              <a:latin typeface="Segoe UI" panose="020B0502040204020203" pitchFamily="34" charset="0"/>
+            </a:endParaRPr>
+          </a:p>
+        </p:txBody>
+      </p:sp>
+      <p:sp>
+        <p:nvSpPr>
+          <p:cNvPr id="316" name="Аутсорс 316"/>
+          <p:cNvSpPr/>
+          <p:nvPr/>
+        </p:nvSpPr>
+        <p:spPr>
+          <a:xfrm>
+            <a:off x="882015" y="1244600"/>
+            <a:ext cx="1480185" cy="508000"/>
+          </a:xfrm>
+          <a:prstGeom prst="roundRect">
+            <a:avLst>
+              <a:gd name="adj" fmla="val 12000"/>
+            </a:avLst>
+          </a:prstGeom>
+          <a:solidFill>
+            <a:srgbClr val="FFF2CC"/>
+          </a:solidFill>
+          <a:ln w="12700">
+            <a:solidFill>
+              <a:srgbClr val="BF9000"/>
+            </a:solidFill>
+            <a:prstDash val="dash"/>
+          </a:ln>
+        </p:spPr>
+        <p:txBody>
+          <a:bodyPr lIns="50800" tIns="12700" rIns="50800" bIns="12700" rtlCol="0" anchor="ctr"/>
+          <a:lstStyle/>
+          <a:p>
+            <a:pPr algn="ctr">
+              <a:lnSpc>
+                <a:spcPct val="90000"/>
+              </a:lnSpc>
+            </a:pPr>
+            <a:r>
+              <a:rPr lang="ru-RU" sz="1000" b="1" dirty="0">
+                <a:solidFill>
+                  <a:srgbClr val="7F6000"/>
+                </a:solidFill>
+                <a:latin typeface="Segoe UI" panose="020B0502040204020203" pitchFamily="34" charset="0"/>
+              </a:rPr>
+              <a:t>Разработчик (ИИ, ГИС), платформа </a:t>
+            </a:r>
+            <a:r>
+              <a:rPr lang="ru-RU" sz="1000" b="0" i="1" dirty="0">
+                <a:solidFill>
+                  <a:srgbClr val="7F6000"/>
+                </a:solidFill>
+                <a:latin typeface="Segoe UI" panose="020B0502040204020203" pitchFamily="34" charset="0"/>
+              </a:rPr>
+              <a:t>(аутсорс)</a:t>
+            </a:r>
+            <a:endParaRPr lang="ru-RU" sz="800" i="1" dirty="0">
+              <a:solidFill>
+                <a:srgbClr val="7F6000"/>
+              </a:solidFill>
+              <a:latin typeface="Segoe UI" panose="020B0502040204020203" pitchFamily="34" charset="0"/>
+            </a:endParaRPr>
+          </a:p>
+        </p:txBody>
+      </p:sp>
+      <p:sp>
+        <p:nvSpPr>
+          <p:cNvPr id="317" name="Аутсорс 317"/>
+          <p:cNvSpPr/>
+          <p:nvPr/>
+        </p:nvSpPr>
+        <p:spPr>
+          <a:xfrm>
+            <a:off x="9601200" y="2971800"/>
+            <a:ext cx="2006600" cy="279400"/>
+          </a:xfrm>
+          <a:prstGeom prst="roundRect">
+            <a:avLst>
+              <a:gd name="adj" fmla="val 12000"/>
+            </a:avLst>
+          </a:prstGeom>
+          <a:solidFill>
+            <a:srgbClr val="FFF2CC"/>
+          </a:solidFill>
+          <a:ln w="12700">
+            <a:solidFill>
+              <a:srgbClr val="BF9000"/>
+            </a:solidFill>
+            <a:prstDash val="dash"/>
+          </a:ln>
+        </p:spPr>
+        <p:txBody>
+          <a:bodyPr lIns="50800" tIns="12700" rIns="50800" bIns="12700" rtlCol="0" anchor="ctr"/>
+          <a:lstStyle/>
+          <a:p>
+            <a:pPr algn="ctr">
+              <a:lnSpc>
+                <a:spcPct val="90000"/>
+              </a:lnSpc>
+            </a:pPr>
+            <a:r>
+              <a:rPr lang="ru-RU" sz="1000" b="1" dirty="0">
+                <a:solidFill>
+                  <a:srgbClr val="7F6000"/>
+                </a:solidFill>
+                <a:latin typeface="Segoe UI" panose="020B0502040204020203" pitchFamily="34" charset="0"/>
+              </a:rPr>
+              <a:t>Сис.админ </a:t>
+            </a:r>
+            <a:r>
+              <a:rPr lang="ru-RU" sz="1000" b="0" i="1" dirty="0">
+                <a:solidFill>
+                  <a:srgbClr val="7F6000"/>
+                </a:solidFill>
+                <a:latin typeface="Segoe UI" panose="020B0502040204020203" pitchFamily="34" charset="0"/>
+              </a:rPr>
+              <a:t>(аутсорс)</a:t>
+            </a:r>
+            <a:endParaRPr lang="ru-RU" sz="800" i="1" dirty="0">
+              <a:solidFill>
+                <a:srgbClr val="7F6000"/>
+              </a:solidFill>
+              <a:latin typeface="Segoe UI" panose="020B0502040204020203" pitchFamily="34" charset="0"/>
+            </a:endParaRPr>
+          </a:p>
+        </p:txBody>
+      </p:sp>
+      <p:sp>
+        <p:nvSpPr>
+          <p:cNvPr id="367" name="Легенда 2027"/>
+          <p:cNvSpPr/>
+          <p:nvPr/>
+        </p:nvSpPr>
+        <p:spPr>
+          <a:xfrm>
+            <a:off x="9652000" y="5937885"/>
+            <a:ext cx="279400" cy="165100"/>
+          </a:xfrm>
+          <a:prstGeom prst="roundRect">
+            <a:avLst/>
+          </a:prstGeom>
+          <a:solidFill>
+            <a:srgbClr val="E6DFF3"/>
+          </a:solidFill>
+          <a:ln w="12700">
+            <a:solidFill>
+              <a:srgbClr val="227838"/>
+            </a:solidFill>
+          </a:ln>
+        </p:spPr>
+        <p:txBody>
+          <a:bodyPr/>
+          <a:lstStyle/>
+          <a:p>
+            <a:endParaRPr lang="ru-RU" sz="800"/>
+          </a:p>
+        </p:txBody>
+      </p:sp>
+      <p:sp>
+        <p:nvSpPr>
+          <p:cNvPr id="368" name="Легенда 2027 текст"/>
+          <p:cNvSpPr txBox="1"/>
+          <p:nvPr/>
+        </p:nvSpPr>
+        <p:spPr>
+          <a:xfrm>
+            <a:off x="10007600" y="5950585"/>
+            <a:ext cx="1905000" cy="152400"/>
+          </a:xfrm>
+          <a:prstGeom prst="rect">
+            <a:avLst/>
+          </a:prstGeom>
+          <a:noFill/>
+        </p:spPr>
+        <p:txBody>
+          <a:bodyPr wrap="square" lIns="0" tIns="0" rIns="0" bIns="0" rtlCol="0"/>
+          <a:lstStyle/>
+          <a:p>
+            <a:r>
+              <a:rPr lang="ru-RU" sz="900" dirty="0">
+                <a:solidFill>
+                  <a:srgbClr val="464646"/>
+                </a:solidFill>
+                <a:latin typeface="Segoe UI" panose="020B0502040204020203" pitchFamily="34" charset="0"/>
+              </a:rPr>
+              <a:t>приход в 2027 году</a:t>
+            </a:r>
+          </a:p>
+        </p:txBody>
+      </p:sp>
+      <p:sp>
+        <p:nvSpPr>
+          <p:cNvPr id="388" name="Численность 2027"/>
+          <p:cNvSpPr txBox="1"/>
+          <p:nvPr/>
+        </p:nvSpPr>
+        <p:spPr>
+          <a:xfrm>
+            <a:off x="228600" y="6502400"/>
+            <a:ext cx="11734800" cy="177800"/>
+          </a:xfrm>
+          <a:prstGeom prst="rect">
+            <a:avLst/>
+          </a:prstGeom>
+          <a:noFill/>
+        </p:spPr>
+        <p:txBody>
+          <a:bodyPr wrap="square" lIns="0" tIns="0" rIns="0" bIns="0" rtlCol="0" anchor="ctr"/>
+          <a:lstStyle/>
+          <a:p>
+            <a:pPr algn="l"/>
+            <a:r>
+              <a:rPr lang="ru-RU" sz="1000" dirty="0">
+                <a:solidFill>
+                  <a:srgbClr val="1F3864"/>
+                </a:solidFill>
+                <a:latin typeface="Segoe UI" panose="020B0502040204020203" pitchFamily="34" charset="0"/>
+              </a:rPr>
+              <a:t>Численность: </a:t>
+            </a:r>
+            <a:r>
+              <a:rPr lang="ru-RU" sz="1000" b="1" dirty="0">
+                <a:solidFill>
+                  <a:srgbClr val="1F3864"/>
+                </a:solidFill>
+                <a:latin typeface="Segoe UI" panose="020B0502040204020203" pitchFamily="34" charset="0"/>
+              </a:rPr>
+              <a:t>в 2026 году — 18 чел.</a:t>
+            </a:r>
+            <a:r>
+              <a:rPr lang="ru-RU" sz="1000" dirty="0">
+                <a:solidFill>
+                  <a:srgbClr val="1F3864"/>
+                </a:solidFill>
+                <a:latin typeface="Segoe UI" panose="020B0502040204020203" pitchFamily="34" charset="0"/>
+              </a:rPr>
+              <a:t>; в 2027 году приходят ещё </a:t>
+            </a:r>
+            <a:r>
+              <a:rPr lang="ru-RU" sz="1000" b="1" dirty="0">
+                <a:solidFill>
+                  <a:srgbClr val="1F3864"/>
+                </a:solidFill>
+                <a:latin typeface="Segoe UI" panose="020B0502040204020203" pitchFamily="34" charset="0"/>
+              </a:rPr>
+              <a:t>12</a:t>
+            </a:r>
+            <a:r>
+              <a:rPr lang="ru-RU" sz="1000" dirty="0">
+                <a:solidFill>
+                  <a:srgbClr val="1F3864"/>
+                </a:solidFill>
+                <a:latin typeface="Segoe UI" panose="020B0502040204020203" pitchFamily="34" charset="0"/>
+              </a:rPr>
+              <a:t> (выделены цветом) — </a:t>
+            </a:r>
+            <a:r>
+              <a:rPr lang="ru-RU" sz="1000" b="1" dirty="0">
+                <a:solidFill>
+                  <a:srgbClr val="C00000"/>
+                </a:solidFill>
+                <a:latin typeface="Segoe UI" panose="020B0502040204020203" pitchFamily="34" charset="0"/>
+              </a:rPr>
+              <a:t>всего в 2027 году 30 чел.</a:t>
+            </a:r>
+          </a:p>
+        </p:txBody>
+      </p:sp>
+      <p:sp>
+        <p:nvSpPr>
+          <p:cNvPr id="389" name="Фигура 389"/>
+          <p:cNvSpPr/>
+          <p:nvPr/>
+        </p:nvSpPr>
+        <p:spPr>
+          <a:xfrm>
+            <a:off x="7620000" y="2692400"/>
+            <a:ext cx="1701800" cy="381000"/>
+          </a:xfrm>
+          <a:prstGeom prst="roundRect">
+            <a:avLst>
+              <a:gd name="adj" fmla="val 12000"/>
+            </a:avLst>
+          </a:prstGeom>
+          <a:solidFill>
+            <a:srgbClr val="D6E1EE"/>
+          </a:solidFill>
+          <a:ln w="12700">
+            <a:solidFill>
+              <a:srgbClr val="1F3864"/>
+            </a:solidFill>
+          </a:ln>
+        </p:spPr>
+        <p:txBody>
+          <a:bodyPr lIns="25400" tIns="6350" rIns="25400" bIns="6350" rtlCol="0" anchor="ctr"/>
+          <a:lstStyle/>
+          <a:p>
+            <a:pPr algn="ctr">
+              <a:lnSpc>
+                <a:spcPct val="90000"/>
+              </a:lnSpc>
+            </a:pPr>
+            <a:r>
+              <a:rPr lang="ru-RU" sz="1000" smtClean="0">
+                <a:solidFill>
+                  <a:srgbClr val="464646"/>
+                </a:solidFill>
+                <a:latin typeface="Segoe UI" panose="020B0502040204020203" pitchFamily="34" charset="0"/>
+              </a:rPr>
+              <a:t>Менеджер проектов</a:t>
+            </a:r>
+            <a:br>
+              <a:rPr lang="ru-RU" sz="1000" smtClean="0">
+                <a:solidFill>
+                  <a:srgbClr val="464646"/>
+                </a:solidFill>
+                <a:latin typeface="Segoe UI" panose="020B0502040204020203" pitchFamily="34" charset="0"/>
+              </a:rPr>
+            </a:br>
+            <a:r>
+              <a:rPr lang="ru-RU" sz="1000" smtClean="0">
+                <a:solidFill>
+                  <a:srgbClr val="464646"/>
+                </a:solidFill>
+                <a:latin typeface="Segoe UI" panose="020B0502040204020203" pitchFamily="34" charset="0"/>
+              </a:rPr>
+              <a:t>1 200 000</a:t>
+            </a:r>
             <a:endParaRPr lang="ru-RU" sz="1000" dirty="0">
               <a:solidFill>
                 <a:srgbClr val="464646"/>
@@ -5421,6 +7314,37 @@
               <a:latin typeface="Segoe UI" panose="020B0502040204020203" pitchFamily="34" charset="0"/>
             </a:endParaRPr>
           </a:p>
+        </p:txBody>
+      </p:sp>
+      <p:sp>
+        <p:nvSpPr>
+          <p:cNvPr id="390" name="Фигура 390"/>
+          <p:cNvSpPr/>
+          <p:nvPr/>
+        </p:nvSpPr>
+        <p:spPr>
+          <a:xfrm>
+            <a:off x="9601200" y="2641600"/>
+            <a:ext cx="2006600" cy="279400"/>
+          </a:xfrm>
+          <a:prstGeom prst="roundRect">
+            <a:avLst>
+              <a:gd name="adj" fmla="val 12000"/>
+            </a:avLst>
+          </a:prstGeom>
+          <a:solidFill>
+            <a:srgbClr val="FFF2CC"/>
+          </a:solidFill>
+          <a:ln w="12700">
+            <a:solidFill>
+              <a:srgbClr val="BF9000"/>
+            </a:solidFill>
+            <a:prstDash val="dash"/>
+          </a:ln>
+        </p:spPr>
+        <p:txBody>
+          <a:bodyPr lIns="50800" tIns="12700" rIns="50800" bIns="12700" rtlCol="0" anchor="ctr"/>
+          <a:lstStyle/>
           <a:p>
             <a:pPr algn="ctr">
               <a:lnSpc>
@@ -5430,11 +7354,135 @@
             <a:r>
               <a:rPr lang="ru-RU" sz="1000" b="1" dirty="0">
                 <a:solidFill>
+                  <a:srgbClr val="7F6000"/>
+                </a:solidFill>
+                <a:latin typeface="Segoe UI" panose="020B0502040204020203" pitchFamily="34" charset="0"/>
+              </a:rPr>
+              <a:t>Юрист (МФЦА) </a:t>
+            </a:r>
+            <a:r>
+              <a:rPr lang="ru-RU" sz="1000" b="0" i="1" dirty="0">
+                <a:solidFill>
+                  <a:srgbClr val="7F6000"/>
+                </a:solidFill>
+                <a:latin typeface="Segoe UI" panose="020B0502040204020203" pitchFamily="34" charset="0"/>
+              </a:rPr>
+              <a:t>(аутсорс)</a:t>
+            </a:r>
+            <a:endParaRPr lang="ru-RU" sz="1000" i="1" dirty="0">
+              <a:solidFill>
+                <a:srgbClr val="7F6000"/>
+              </a:solidFill>
+              <a:latin typeface="Segoe UI" panose="020B0502040204020203" pitchFamily="34" charset="0"/>
+            </a:endParaRPr>
+          </a:p>
+        </p:txBody>
+      </p:sp>
+      <p:sp>
+        <p:nvSpPr>
+          <p:cNvPr id="391" name="Фигура 391"/>
+          <p:cNvSpPr/>
+          <p:nvPr/>
+        </p:nvSpPr>
+        <p:spPr>
+          <a:xfrm>
+            <a:off x="7620000" y="1905000"/>
+            <a:ext cx="1854200" cy="508000"/>
+          </a:xfrm>
+          <a:prstGeom prst="roundRect">
+            <a:avLst>
+              <a:gd name="adj" fmla="val 12000"/>
+            </a:avLst>
+          </a:prstGeom>
+          <a:solidFill>
+            <a:schemeClr val="accent1">
+              <a:lumMod val="75000"/>
+            </a:schemeClr>
+          </a:solidFill>
+          <a:ln w="12700">
+            <a:solidFill>
+              <a:srgbClr val="1F3864"/>
+            </a:solidFill>
+          </a:ln>
+        </p:spPr>
+        <p:txBody>
+          <a:bodyPr lIns="50800" tIns="12700" rIns="50800" bIns="12700" rtlCol="0" anchor="ctr"/>
+          <a:lstStyle/>
+          <a:p>
+            <a:pPr algn="ctr">
+              <a:lnSpc>
+                <a:spcPct val="90000"/>
+              </a:lnSpc>
+            </a:pPr>
+            <a:r>
+              <a:rPr lang="ru-RU" sz="750" b="1" smtClean="0">
+                <a:solidFill>
+                  <a:srgbClr val="FFFFFF"/>
+                </a:solidFill>
+                <a:latin typeface="Segoe UI" panose="020B0502040204020203" pitchFamily="34" charset="0"/>
+              </a:rPr>
+              <a:t>Проектный офис для Центральной Азии по изменению климата и зеленой энергетике (1+3)</a:t>
+            </a:r>
+            <a:endParaRPr lang="ru-RU" sz="750" b="1" dirty="0">
+              <a:solidFill>
+                <a:srgbClr val="FFFFFF"/>
+              </a:solidFill>
+              <a:latin typeface="Segoe UI" panose="020B0502040204020203" pitchFamily="34" charset="0"/>
+            </a:endParaRPr>
+          </a:p>
+        </p:txBody>
+      </p:sp>
+      <p:sp>
+        <p:nvSpPr>
+          <p:cNvPr id="392" name="Фигура 392"/>
+          <p:cNvSpPr/>
+          <p:nvPr/>
+        </p:nvSpPr>
+        <p:spPr>
+          <a:xfrm>
+            <a:off x="7620000" y="2362200"/>
+            <a:ext cx="1854200" cy="254000"/>
+          </a:xfrm>
+          <a:prstGeom prst="roundRect">
+            <a:avLst>
+              <a:gd name="adj" fmla="val 12000"/>
+            </a:avLst>
+          </a:prstGeom>
+          <a:solidFill>
+            <a:srgbClr val="E6DFF3"/>
+          </a:solidFill>
+          <a:ln w="12700">
+            <a:solidFill>
+              <a:srgbClr val="1F3864"/>
+            </a:solidFill>
+          </a:ln>
+        </p:spPr>
+        <p:txBody>
+          <a:bodyPr lIns="50800" tIns="12700" rIns="50800" bIns="12700" rtlCol="0" anchor="ctr"/>
+          <a:lstStyle/>
+          <a:p>
+            <a:pPr algn="ctr">
+              <a:lnSpc>
+                <a:spcPct val="90000"/>
+              </a:lnSpc>
+            </a:pPr>
+            <a:r>
+              <a:rPr lang="ru-RU" sz="1000" dirty="0">
+                <a:solidFill>
+                  <a:srgbClr val="464646"/>
+                </a:solidFill>
+                <a:latin typeface="Segoe UI" panose="020B0502040204020203" pitchFamily="34" charset="0"/>
+              </a:rPr>
+              <a:t>рук. — </a:t>
+            </a:r>
+            <a:r>
+              <a:rPr lang="ru-RU" sz="1000" b="1" dirty="0">
+                <a:solidFill>
                   <a:srgbClr val="1F3864"/>
                 </a:solidFill>
                 <a:latin typeface="Segoe UI" panose="020B0502040204020203" pitchFamily="34" charset="0"/>
               </a:rPr>
-              <a:t>Тленчиева Шырын</a:t>
+              <a:t>Юнусов Т.</a:t>
             </a:r>
             <a:r>
               <a:rPr lang="ru-RU" sz="900" b="0" dirty="0">
@@ -5443,7 +7491,7 @@
                 </a:solidFill>
                 <a:latin typeface="Segoe UI" panose="020B0502040204020203" pitchFamily="34" charset="0"/>
               </a:rPr>
-              <a:t> · 1 000 000</a:t>
+              <a:t> · 1 300 000</a:t>
             </a:r>
             <a:endParaRPr lang="ru-RU" sz="1100" b="1" dirty="0">
               <a:solidFill>
@@ -5456,14 +7504,14 @@
       </p:sp>
       <p:sp>
         <p:nvSpPr>
-          <p:cNvPr id="256" name="Сотрудник 256"/>
+          <p:cNvPr id="393" name="Фигура 393"/>
           <p:cNvSpPr/>
           <p:nvPr/>
         </p:nvSpPr>
         <p:spPr>
           <a:xfrm>
-            <a:off x="2476500" y="3251200"/>
-            <a:ext cx="1968500" cy="508000"/>
+            <a:off x="4724400" y="2692400"/>
+            <a:ext cx="2590800" cy="355600"/>
           </a:xfrm>
           <a:prstGeom prst="roundRect">
             <a:avLst>
@@ -5471,7 +7519,7 @@
             </a:avLst>
           </a:prstGeom>
           <a:solidFill>
-            <a:srgbClr val="E6DFF3"/>
+            <a:srgbClr val="E9F3EA"/>
           </a:solidFill>
           <a:ln w="12700">
             <a:solidFill>
@@ -5495,264 +7543,16 @@
                 </a:solidFill>
                 <a:latin typeface="Segoe UI" panose="020B0502040204020203" pitchFamily="34" charset="0"/>
               </a:rPr>
-              <a:t>Гл. специалист, аналитик</a:t>
-            </a:r>
-            <a:endParaRPr lang="ru-RU" sz="800" i="1" dirty="0">
-              <a:solidFill>
-                <a:srgbClr val="227838"/>
-              </a:solidFill>
-              <a:latin typeface="Segoe UI" panose="020B0502040204020203" pitchFamily="34" charset="0"/>
-            </a:endParaRPr>
-          </a:p>
-          <a:p>
-            <a:pPr algn="ctr">
-              <a:lnSpc>
-                <a:spcPct val="90000"/>
-              </a:lnSpc>
-            </a:pPr>
-            <a:r>
-              <a:rPr lang="ru-RU" sz="1000" b="1" dirty="0">
-                <a:solidFill>
-                  <a:srgbClr val="1F3864"/>
-                </a:solidFill>
-                <a:latin typeface="Segoe UI" panose="020B0502040204020203" pitchFamily="34" charset="0"/>
-              </a:rPr>
-              <a:t>Сандыбаева Сандугаш</a:t>
-            </a:r>
-            <a:br>
+              <a:t>Заместитель директора (МЭПР, ЦГО, регионы)</a:t>
+            </a:r>
+            <a:r>
               <a:rPr lang="ru-RU" sz="900" b="0" dirty="0">
                 <a:solidFill>
                   <a:srgbClr val="227838"/>
                 </a:solidFill>
                 <a:latin typeface="Segoe UI" panose="020B0502040204020203" pitchFamily="34" charset="0"/>
               </a:rPr>
-            </a:br>
-            <a:r>
-              <a:rPr lang="ru-RU" sz="900" b="0" dirty="0">
-                <a:solidFill>
-                  <a:srgbClr val="227838"/>
-                </a:solidFill>
-                <a:latin typeface="Segoe UI" panose="020B0502040204020203" pitchFamily="34" charset="0"/>
-              </a:rPr>
-              <a:t>1 000 000</a:t>
-            </a:r>
-            <a:endParaRPr lang="ru-RU" sz="1100" b="1" dirty="0">
-              <a:solidFill>
-                <a:srgbClr val="1F3864"/>
-              </a:solidFill>
-              <a:latin typeface="Segoe UI" panose="020B0502040204020203" pitchFamily="34" charset="0"/>
-            </a:endParaRPr>
-          </a:p>
-        </p:txBody>
-      </p:sp>
-      <p:sp>
-        <p:nvSpPr>
-          <p:cNvPr id="257" name="Сотрудник 257"/>
-          <p:cNvSpPr/>
-          <p:nvPr/>
-        </p:nvSpPr>
-        <p:spPr>
-          <a:xfrm>
-            <a:off x="2476500" y="3810000"/>
-            <a:ext cx="1968500" cy="508000"/>
-          </a:xfrm>
-          <a:prstGeom prst="roundRect">
-            <a:avLst>
-              <a:gd name="adj" fmla="val 12000"/>
-            </a:avLst>
-          </a:prstGeom>
-          <a:solidFill>
-            <a:srgbClr val="E6DFF3"/>
-          </a:solidFill>
-          <a:ln w="12700">
-            <a:solidFill>
-              <a:srgbClr val="227838"/>
-            </a:solidFill>
-          </a:ln>
-        </p:spPr>
-        <p:txBody>
-          <a:bodyPr lIns="50800" tIns="12700" rIns="50800" bIns="12700" rtlCol="0" anchor="ctr"/>
-          <a:lstStyle/>
-          <a:p>
-            <a:pPr algn="ctr">
-              <a:lnSpc>
-                <a:spcPct val="90000"/>
-              </a:lnSpc>
-            </a:pPr>
-            <a:r>
-              <a:rPr lang="ru-RU" sz="1000" dirty="0">
-                <a:solidFill>
-                  <a:srgbClr val="464646"/>
-                </a:solidFill>
-                <a:latin typeface="Segoe UI" panose="020B0502040204020203" pitchFamily="34" charset="0"/>
-              </a:rPr>
-              <a:t>Вед. специалист, социолог</a:t>
-            </a:r>
-            <a:endParaRPr lang="ru-RU" sz="800" i="1" dirty="0">
-              <a:solidFill>
-                <a:srgbClr val="227838"/>
-              </a:solidFill>
-              <a:latin typeface="Segoe UI" panose="020B0502040204020203" pitchFamily="34" charset="0"/>
-            </a:endParaRPr>
-          </a:p>
-          <a:p>
-            <a:pPr algn="ctr">
-              <a:lnSpc>
-                <a:spcPct val="90000"/>
-              </a:lnSpc>
-            </a:pPr>
-            <a:r>
-              <a:rPr lang="ru-RU" sz="1000" b="1" dirty="0">
-                <a:solidFill>
-                  <a:srgbClr val="1F3864"/>
-                </a:solidFill>
-                <a:latin typeface="Segoe UI" panose="020B0502040204020203" pitchFamily="34" charset="0"/>
-              </a:rPr>
-              <a:t>Ашимханова Дана</a:t>
-            </a:r>
-            <a:r>
-              <a:rPr lang="ru-RU" sz="900" b="0" dirty="0">
-                <a:solidFill>
-                  <a:srgbClr val="227838"/>
-                </a:solidFill>
-                <a:latin typeface="Segoe UI" panose="020B0502040204020203" pitchFamily="34" charset="0"/>
-              </a:rPr>
-              <a:t> · 700 000</a:t>
-            </a:r>
-            <a:endParaRPr lang="ru-RU" sz="1100" b="1" dirty="0">
-              <a:solidFill>
-                <a:srgbClr val="1F3864"/>
-              </a:solidFill>
-              <a:latin typeface="Segoe UI" panose="020B0502040204020203" pitchFamily="34" charset="0"/>
-            </a:endParaRPr>
-          </a:p>
-        </p:txBody>
-      </p:sp>
-      <p:sp>
-        <p:nvSpPr>
-          <p:cNvPr id="258" name="Сотрудник 258"/>
-          <p:cNvSpPr/>
-          <p:nvPr/>
-        </p:nvSpPr>
-        <p:spPr>
-          <a:xfrm>
-            <a:off x="2476500" y="4368800"/>
-            <a:ext cx="1968500" cy="508000"/>
-          </a:xfrm>
-          <a:prstGeom prst="roundRect">
-            <a:avLst>
-              <a:gd name="adj" fmla="val 12000"/>
-            </a:avLst>
-          </a:prstGeom>
-          <a:solidFill>
-            <a:srgbClr val="E6DFF3"/>
-          </a:solidFill>
-          <a:ln w="12700">
-            <a:solidFill>
-              <a:srgbClr val="227838"/>
-            </a:solidFill>
-          </a:ln>
-        </p:spPr>
-        <p:txBody>
-          <a:bodyPr lIns="50800" tIns="12700" rIns="50800" bIns="12700" rtlCol="0" anchor="ctr"/>
-          <a:lstStyle/>
-          <a:p>
-            <a:pPr algn="ctr">
-              <a:lnSpc>
-                <a:spcPct val="90000"/>
-              </a:lnSpc>
-            </a:pPr>
-            <a:r>
-              <a:rPr lang="ru-RU" sz="1000" dirty="0">
-                <a:solidFill>
-                  <a:srgbClr val="464646"/>
-                </a:solidFill>
-                <a:latin typeface="Segoe UI" panose="020B0502040204020203" pitchFamily="34" charset="0"/>
-              </a:rPr>
-              <a:t>Вед. специалист, аналитик</a:t>
-            </a:r>
-            <a:endParaRPr lang="ru-RU" sz="800" i="1" dirty="0">
-              <a:solidFill>
-                <a:srgbClr val="227838"/>
-              </a:solidFill>
-              <a:latin typeface="Segoe UI" panose="020B0502040204020203" pitchFamily="34" charset="0"/>
-            </a:endParaRPr>
-          </a:p>
-          <a:p>
-            <a:pPr algn="ctr">
-              <a:lnSpc>
-                <a:spcPct val="90000"/>
-              </a:lnSpc>
-            </a:pPr>
-            <a:r>
-              <a:rPr lang="ru-RU" sz="1000" b="1" dirty="0">
-                <a:solidFill>
-                  <a:srgbClr val="1F3864"/>
-                </a:solidFill>
-                <a:latin typeface="Segoe UI" panose="020B0502040204020203" pitchFamily="34" charset="0"/>
-              </a:rPr>
-              <a:t>Мукашев Дархан</a:t>
-            </a:r>
-            <a:r>
-              <a:rPr lang="ru-RU" sz="900" b="0" dirty="0">
-                <a:solidFill>
-                  <a:srgbClr val="227838"/>
-                </a:solidFill>
-                <a:latin typeface="Segoe UI" panose="020B0502040204020203" pitchFamily="34" charset="0"/>
-              </a:rPr>
-              <a:t> · 700 000</a:t>
-            </a:r>
-            <a:endParaRPr lang="ru-RU" sz="1100" b="1" dirty="0">
-              <a:solidFill>
-                <a:srgbClr val="1F3864"/>
-              </a:solidFill>
-              <a:latin typeface="Segoe UI" panose="020B0502040204020203" pitchFamily="34" charset="0"/>
-            </a:endParaRPr>
-          </a:p>
-        </p:txBody>
-      </p:sp>
-      <p:sp>
-        <p:nvSpPr>
-          <p:cNvPr id="264" name="Сотрудник 264"/>
-          <p:cNvSpPr/>
-          <p:nvPr/>
-        </p:nvSpPr>
-        <p:spPr>
-          <a:xfrm>
-            <a:off x="4724400" y="3086100"/>
-            <a:ext cx="2590800" cy="355600"/>
-          </a:xfrm>
-          <a:prstGeom prst="roundRect">
-            <a:avLst>
-              <a:gd name="adj" fmla="val 12000"/>
-            </a:avLst>
-          </a:prstGeom>
-          <a:solidFill>
-            <a:srgbClr val="E9F3EA"/>
-          </a:solidFill>
-          <a:ln w="12700">
-            <a:solidFill>
-              <a:srgbClr val="227838"/>
-            </a:solidFill>
-          </a:ln>
-        </p:spPr>
-        <p:txBody>
-          <a:bodyPr lIns="50800" tIns="12700" rIns="50800" bIns="12700" rtlCol="0" anchor="ctr"/>
-          <a:lstStyle/>
-          <a:p>
-            <a:pPr algn="ctr">
-              <a:lnSpc>
-                <a:spcPct val="90000"/>
-              </a:lnSpc>
-            </a:pPr>
-            <a:r>
-              <a:rPr lang="ru-RU" sz="1000" dirty="0">
-                <a:solidFill>
-                  <a:srgbClr val="464646"/>
-                </a:solidFill>
-                <a:latin typeface="Segoe UI" panose="020B0502040204020203" pitchFamily="34" charset="0"/>
-              </a:rPr>
-              <a:t>Главный специалист</a:t>
+              <a:t> · 1 100 000</a:t>
             </a:r>
             <a:endParaRPr lang="ru-RU" sz="1000" dirty="0">
               <a:solidFill>
@@ -5761,2004 +7561,29 @@
               <a:latin typeface="Segoe UI" panose="020B0502040204020203" pitchFamily="34" charset="0"/>
             </a:endParaRPr>
           </a:p>
-          <a:p>
-            <a:pPr algn="ctr">
-              <a:lnSpc>
-                <a:spcPct val="90000"/>
-              </a:lnSpc>
-            </a:pPr>
-            <a:r>
-              <a:rPr lang="ru-RU" sz="1000" b="1" dirty="0">
-                <a:solidFill>
-                  <a:srgbClr val="1F3864"/>
-                </a:solidFill>
-                <a:latin typeface="Segoe UI" panose="020B0502040204020203" pitchFamily="34" charset="0"/>
-              </a:rPr>
-              <a:t>Қуандық Жасұлан</a:t>
-            </a:r>
-            <a:r>
-              <a:rPr lang="ru-RU" sz="900" b="0" dirty="0">
-                <a:solidFill>
-                  <a:srgbClr val="227838"/>
-                </a:solidFill>
-                <a:latin typeface="Segoe UI" panose="020B0502040204020203" pitchFamily="34" charset="0"/>
-              </a:rPr>
-              <a:t> · 1 000 000</a:t>
-            </a:r>
-            <a:endParaRPr lang="ru-RU" sz="1100" b="1" dirty="0">
-              <a:solidFill>
-                <a:srgbClr val="1F3864"/>
-              </a:solidFill>
-              <a:latin typeface="Segoe UI" panose="020B0502040204020203" pitchFamily="34" charset="0"/>
-            </a:endParaRPr>
-          </a:p>
-        </p:txBody>
-      </p:sp>
-      <p:sp>
-        <p:nvSpPr>
-          <p:cNvPr id="265" name="Сотрудник 265"/>
-          <p:cNvSpPr/>
-          <p:nvPr/>
-        </p:nvSpPr>
-        <p:spPr>
-          <a:xfrm>
-            <a:off x="4724400" y="5054600"/>
-            <a:ext cx="2590800" cy="355600"/>
-          </a:xfrm>
-          <a:prstGeom prst="roundRect">
-            <a:avLst>
-              <a:gd name="adj" fmla="val 12000"/>
-            </a:avLst>
-          </a:prstGeom>
-          <a:solidFill>
-            <a:srgbClr val="E6DFF3"/>
-          </a:solidFill>
-          <a:ln w="12700">
-            <a:solidFill>
-              <a:srgbClr val="227838"/>
-            </a:solidFill>
-          </a:ln>
-        </p:spPr>
-        <p:txBody>
-          <a:bodyPr lIns="50800" tIns="12700" rIns="50800" bIns="12700" rtlCol="0" anchor="ctr"/>
-          <a:lstStyle/>
-          <a:p>
-            <a:pPr algn="ctr">
-              <a:lnSpc>
-                <a:spcPct val="90000"/>
-              </a:lnSpc>
-            </a:pPr>
-            <a:r>
-              <a:rPr lang="ru-RU" sz="1000" dirty="0">
-                <a:solidFill>
-                  <a:srgbClr val="464646"/>
-                </a:solidFill>
-                <a:latin typeface="Segoe UI" panose="020B0502040204020203" pitchFamily="34" charset="0"/>
-              </a:rPr>
-              <a:t>Главный специалист</a:t>
-            </a:r>
-            <a:endParaRPr lang="ru-RU" sz="800" i="1" dirty="0">
-              <a:solidFill>
-                <a:srgbClr val="227838"/>
-              </a:solidFill>
-              <a:latin typeface="Segoe UI" panose="020B0502040204020203" pitchFamily="34" charset="0"/>
-            </a:endParaRPr>
-          </a:p>
-          <a:p>
-            <a:pPr algn="ctr">
-              <a:lnSpc>
-                <a:spcPct val="90000"/>
-              </a:lnSpc>
-            </a:pPr>
-            <a:r>
-              <a:rPr lang="ru-RU" sz="1000" b="1" dirty="0">
-                <a:solidFill>
-                  <a:srgbClr val="1F3864"/>
-                </a:solidFill>
-                <a:latin typeface="Segoe UI" panose="020B0502040204020203" pitchFamily="34" charset="0"/>
-              </a:rPr>
-              <a:t>Өміртай Амалбек</a:t>
-            </a:r>
-            <a:r>
-              <a:rPr lang="ru-RU" sz="900" b="0" dirty="0">
-                <a:solidFill>
-                  <a:srgbClr val="227838"/>
-                </a:solidFill>
-                <a:latin typeface="Segoe UI" panose="020B0502040204020203" pitchFamily="34" charset="0"/>
-              </a:rPr>
-              <a:t> · 1 000 000</a:t>
-            </a:r>
-            <a:endParaRPr lang="ru-RU" sz="1100" b="1" dirty="0">
-              <a:solidFill>
-                <a:srgbClr val="1F3864"/>
-              </a:solidFill>
-              <a:latin typeface="Segoe UI" panose="020B0502040204020203" pitchFamily="34" charset="0"/>
-            </a:endParaRPr>
-          </a:p>
-        </p:txBody>
-      </p:sp>
-      <p:sp>
-        <p:nvSpPr>
-          <p:cNvPr id="266" name="Сотрудник 266"/>
-          <p:cNvSpPr/>
-          <p:nvPr/>
-        </p:nvSpPr>
-        <p:spPr>
-          <a:xfrm>
-            <a:off x="4724400" y="3479800"/>
-            <a:ext cx="2590800" cy="355600"/>
-          </a:xfrm>
-          <a:prstGeom prst="roundRect">
-            <a:avLst>
-              <a:gd name="adj" fmla="val 12000"/>
-            </a:avLst>
-          </a:prstGeom>
-          <a:solidFill>
-            <a:srgbClr val="E9F3EA"/>
-          </a:solidFill>
-          <a:ln w="12700">
-            <a:solidFill>
-              <a:srgbClr val="227838"/>
-            </a:solidFill>
-          </a:ln>
-        </p:spPr>
-        <p:txBody>
-          <a:bodyPr lIns="50800" tIns="12700" rIns="50800" bIns="12700" rtlCol="0" anchor="ctr"/>
-          <a:lstStyle/>
-          <a:p>
-            <a:pPr algn="ctr">
-              <a:lnSpc>
-                <a:spcPct val="90000"/>
-              </a:lnSpc>
-            </a:pPr>
-            <a:r>
-              <a:rPr lang="ru-RU" sz="1000" dirty="0">
-                <a:solidFill>
-                  <a:srgbClr val="464646"/>
-                </a:solidFill>
-                <a:latin typeface="Segoe UI" panose="020B0502040204020203" pitchFamily="34" charset="0"/>
-              </a:rPr>
-              <a:t>Главный специалист</a:t>
-            </a:r>
-            <a:endParaRPr lang="ru-RU" sz="1000" dirty="0">
-              <a:solidFill>
-                <a:srgbClr val="464646"/>
-              </a:solidFill>
-              <a:latin typeface="Segoe UI" panose="020B0502040204020203" pitchFamily="34" charset="0"/>
-            </a:endParaRPr>
-          </a:p>
-          <a:p>
-            <a:pPr algn="ctr">
-              <a:lnSpc>
-                <a:spcPct val="90000"/>
-              </a:lnSpc>
-            </a:pPr>
-            <a:r>
-              <a:rPr lang="ru-RU" sz="1000" b="1" dirty="0">
-                <a:solidFill>
-                  <a:srgbClr val="1F3864"/>
-                </a:solidFill>
-                <a:latin typeface="Segoe UI" panose="020B0502040204020203" pitchFamily="34" charset="0"/>
-              </a:rPr>
-              <a:t>Жандилдаев Бакдаулет</a:t>
-            </a:r>
-            <a:r>
-              <a:rPr lang="ru-RU" sz="900" b="0" dirty="0">
-                <a:solidFill>
-                  <a:srgbClr val="227838"/>
-                </a:solidFill>
-                <a:latin typeface="Segoe UI" panose="020B0502040204020203" pitchFamily="34" charset="0"/>
-              </a:rPr>
-              <a:t> · 1 000 000</a:t>
-            </a:r>
-            <a:endParaRPr lang="ru-RU" sz="1100" b="1" dirty="0">
-              <a:solidFill>
-                <a:srgbClr val="1F3864"/>
-              </a:solidFill>
-              <a:latin typeface="Segoe UI" panose="020B0502040204020203" pitchFamily="34" charset="0"/>
-            </a:endParaRPr>
-          </a:p>
-        </p:txBody>
-      </p:sp>
-      <p:sp>
-        <p:nvSpPr>
-          <p:cNvPr id="267" name="Сотрудник 267"/>
-          <p:cNvSpPr/>
-          <p:nvPr/>
-        </p:nvSpPr>
-        <p:spPr>
-          <a:xfrm>
-            <a:off x="4724400" y="3873500"/>
-            <a:ext cx="2590800" cy="355600"/>
-          </a:xfrm>
-          <a:prstGeom prst="roundRect">
-            <a:avLst>
-              <a:gd name="adj" fmla="val 12000"/>
-            </a:avLst>
-          </a:prstGeom>
-          <a:solidFill>
-            <a:srgbClr val="E9F3EA"/>
-          </a:solidFill>
-          <a:ln w="12700">
-            <a:solidFill>
-              <a:srgbClr val="227838"/>
-            </a:solidFill>
-          </a:ln>
-        </p:spPr>
-        <p:txBody>
-          <a:bodyPr lIns="50800" tIns="12700" rIns="50800" bIns="12700" rtlCol="0" anchor="ctr"/>
-          <a:lstStyle/>
-          <a:p>
-            <a:pPr algn="ctr">
-              <a:lnSpc>
-                <a:spcPct val="90000"/>
-              </a:lnSpc>
-            </a:pPr>
-            <a:r>
-              <a:rPr lang="ru-RU" sz="1000" dirty="0">
-                <a:solidFill>
-                  <a:srgbClr val="464646"/>
-                </a:solidFill>
-                <a:latin typeface="Segoe UI" panose="020B0502040204020203" pitchFamily="34" charset="0"/>
-              </a:rPr>
-              <a:t>Ведущий специалист</a:t>
-            </a:r>
-            <a:endParaRPr lang="ru-RU" sz="1000" dirty="0">
-              <a:solidFill>
-                <a:srgbClr val="464646"/>
-              </a:solidFill>
-              <a:latin typeface="Segoe UI" panose="020B0502040204020203" pitchFamily="34" charset="0"/>
-            </a:endParaRPr>
-          </a:p>
-          <a:p>
-            <a:pPr algn="ctr">
-              <a:lnSpc>
-                <a:spcPct val="90000"/>
-              </a:lnSpc>
-            </a:pPr>
-            <a:r>
-              <a:rPr lang="ru-RU" sz="1000" b="1" dirty="0">
-                <a:solidFill>
-                  <a:srgbClr val="1F3864"/>
-                </a:solidFill>
-                <a:latin typeface="Segoe UI" panose="020B0502040204020203" pitchFamily="34" charset="0"/>
-              </a:rPr>
-              <a:t>Шербаева Бибинур</a:t>
-            </a:r>
-            <a:r>
-              <a:rPr lang="ru-RU" sz="900" b="0" dirty="0">
-                <a:solidFill>
-                  <a:srgbClr val="227838"/>
-                </a:solidFill>
-                <a:latin typeface="Segoe UI" panose="020B0502040204020203" pitchFamily="34" charset="0"/>
-              </a:rPr>
-              <a:t> · 1 000 000</a:t>
-            </a:r>
-            <a:endParaRPr lang="ru-RU" sz="1100" b="1" dirty="0">
-              <a:solidFill>
-                <a:srgbClr val="1F3864"/>
-              </a:solidFill>
-              <a:latin typeface="Segoe UI" panose="020B0502040204020203" pitchFamily="34" charset="0"/>
-            </a:endParaRPr>
-          </a:p>
-        </p:txBody>
-      </p:sp>
-      <p:sp>
-        <p:nvSpPr>
-          <p:cNvPr id="268" name="Сотрудник 268"/>
-          <p:cNvSpPr/>
-          <p:nvPr/>
-        </p:nvSpPr>
-        <p:spPr>
-          <a:xfrm>
-            <a:off x="4724400" y="4267200"/>
-            <a:ext cx="2590800" cy="355600"/>
-          </a:xfrm>
-          <a:prstGeom prst="roundRect">
-            <a:avLst>
-              <a:gd name="adj" fmla="val 12000"/>
-            </a:avLst>
-          </a:prstGeom>
-          <a:solidFill>
-            <a:srgbClr val="E9F3EA"/>
-          </a:solidFill>
-          <a:ln w="12700">
-            <a:solidFill>
-              <a:srgbClr val="227838"/>
-            </a:solidFill>
-          </a:ln>
-        </p:spPr>
-        <p:txBody>
-          <a:bodyPr lIns="50800" tIns="12700" rIns="50800" bIns="12700" rtlCol="0" anchor="ctr"/>
-          <a:lstStyle/>
-          <a:p>
-            <a:pPr algn="ctr">
-              <a:lnSpc>
-                <a:spcPct val="90000"/>
-              </a:lnSpc>
-            </a:pPr>
-            <a:r>
-              <a:rPr lang="ru-RU" sz="1000" dirty="0">
-                <a:solidFill>
-                  <a:srgbClr val="464646"/>
-                </a:solidFill>
-                <a:latin typeface="Segoe UI" panose="020B0502040204020203" pitchFamily="34" charset="0"/>
-              </a:rPr>
-              <a:t>Ведущий специалист</a:t>
-            </a:r>
-            <a:endParaRPr lang="ru-RU" sz="1000" dirty="0">
-              <a:solidFill>
-                <a:srgbClr val="464646"/>
-              </a:solidFill>
-              <a:latin typeface="Segoe UI" panose="020B0502040204020203" pitchFamily="34" charset="0"/>
-            </a:endParaRPr>
-          </a:p>
-          <a:p>
-            <a:pPr algn="ctr">
-              <a:lnSpc>
-                <a:spcPct val="90000"/>
-              </a:lnSpc>
-            </a:pPr>
-            <a:r>
-              <a:rPr lang="ru-RU" sz="1000" b="1" dirty="0">
-                <a:solidFill>
-                  <a:srgbClr val="1F3864"/>
-                </a:solidFill>
-                <a:latin typeface="Segoe UI" panose="020B0502040204020203" pitchFamily="34" charset="0"/>
-              </a:rPr>
-              <a:t>Абенов Алибек</a:t>
-            </a:r>
-            <a:r>
-              <a:rPr lang="ru-RU" sz="900" b="0" dirty="0">
-                <a:solidFill>
-                  <a:srgbClr val="227838"/>
-                </a:solidFill>
-                <a:latin typeface="Segoe UI" panose="020B0502040204020203" pitchFamily="34" charset="0"/>
-              </a:rPr>
-              <a:t> · 700 000</a:t>
-            </a:r>
-            <a:endParaRPr lang="ru-RU" sz="1100" b="1" dirty="0">
-              <a:solidFill>
-                <a:srgbClr val="1F3864"/>
-              </a:solidFill>
-              <a:latin typeface="Segoe UI" panose="020B0502040204020203" pitchFamily="34" charset="0"/>
-            </a:endParaRPr>
-          </a:p>
-        </p:txBody>
-      </p:sp>
-      <p:sp>
-        <p:nvSpPr>
-          <p:cNvPr id="269" name="Сотрудник 269"/>
-          <p:cNvSpPr/>
-          <p:nvPr/>
-        </p:nvSpPr>
-        <p:spPr>
-          <a:xfrm>
-            <a:off x="4724400" y="5448300"/>
-            <a:ext cx="2590800" cy="355600"/>
-          </a:xfrm>
-          <a:prstGeom prst="roundRect">
-            <a:avLst>
-              <a:gd name="adj" fmla="val 12000"/>
-            </a:avLst>
-          </a:prstGeom>
-          <a:solidFill>
-            <a:srgbClr val="E6DFF3"/>
-          </a:solidFill>
-          <a:ln w="12700">
-            <a:solidFill>
-              <a:srgbClr val="227838"/>
-            </a:solidFill>
-          </a:ln>
-        </p:spPr>
-        <p:txBody>
-          <a:bodyPr lIns="50800" tIns="12700" rIns="50800" bIns="12700" rtlCol="0" anchor="ctr"/>
-          <a:lstStyle/>
-          <a:p>
-            <a:pPr algn="ctr">
-              <a:lnSpc>
-                <a:spcPct val="90000"/>
-              </a:lnSpc>
-            </a:pPr>
-            <a:r>
-              <a:rPr lang="ru-RU" sz="1000" dirty="0">
-                <a:solidFill>
-                  <a:srgbClr val="464646"/>
-                </a:solidFill>
-                <a:latin typeface="Segoe UI" panose="020B0502040204020203" pitchFamily="34" charset="0"/>
-              </a:rPr>
-              <a:t>Ведущий специалист</a:t>
-            </a:r>
-            <a:endParaRPr lang="ru-RU" sz="800" i="1" dirty="0">
-              <a:solidFill>
-                <a:srgbClr val="227838"/>
-              </a:solidFill>
-              <a:latin typeface="Segoe UI" panose="020B0502040204020203" pitchFamily="34" charset="0"/>
-            </a:endParaRPr>
-          </a:p>
-          <a:p>
-            <a:pPr algn="ctr">
-              <a:lnSpc>
-                <a:spcPct val="90000"/>
-              </a:lnSpc>
-            </a:pPr>
-            <a:r>
-              <a:rPr lang="ru-RU" sz="1000" b="1" dirty="0">
-                <a:solidFill>
-                  <a:srgbClr val="1F3864"/>
-                </a:solidFill>
-                <a:latin typeface="Segoe UI" panose="020B0502040204020203" pitchFamily="34" charset="0"/>
-              </a:rPr>
-              <a:t>Тулесова</a:t>
-            </a:r>
-            <a:r>
-              <a:rPr lang="ru-RU" sz="900" b="0" dirty="0">
-                <a:solidFill>
-                  <a:srgbClr val="227838"/>
-                </a:solidFill>
-                <a:latin typeface="Segoe UI" panose="020B0502040204020203" pitchFamily="34" charset="0"/>
-              </a:rPr>
-              <a:t> · 700 000</a:t>
-            </a:r>
-            <a:endParaRPr lang="ru-RU" sz="1100" b="1" dirty="0">
-              <a:solidFill>
-                <a:srgbClr val="1F3864"/>
-              </a:solidFill>
-              <a:latin typeface="Segoe UI" panose="020B0502040204020203" pitchFamily="34" charset="0"/>
-            </a:endParaRPr>
-          </a:p>
-        </p:txBody>
-      </p:sp>
-      <p:sp>
-        <p:nvSpPr>
-          <p:cNvPr id="270" name="Сотрудник 270"/>
-          <p:cNvSpPr/>
-          <p:nvPr/>
-        </p:nvSpPr>
-        <p:spPr>
-          <a:xfrm>
-            <a:off x="4724400" y="5842000"/>
-            <a:ext cx="2590800" cy="355600"/>
-          </a:xfrm>
-          <a:prstGeom prst="roundRect">
-            <a:avLst>
-              <a:gd name="adj" fmla="val 12000"/>
-            </a:avLst>
-          </a:prstGeom>
-          <a:solidFill>
-            <a:srgbClr val="E6DFF3"/>
-          </a:solidFill>
-          <a:ln w="12700">
-            <a:solidFill>
-              <a:srgbClr val="227838"/>
-            </a:solidFill>
-          </a:ln>
-        </p:spPr>
-        <p:txBody>
-          <a:bodyPr lIns="50800" tIns="12700" rIns="50800" bIns="12700" rtlCol="0" anchor="ctr"/>
-          <a:lstStyle/>
-          <a:p>
-            <a:pPr algn="ctr">
-              <a:lnSpc>
-                <a:spcPct val="90000"/>
-              </a:lnSpc>
-            </a:pPr>
-            <a:r>
-              <a:rPr lang="ru-RU" sz="1000" dirty="0">
-                <a:solidFill>
-                  <a:srgbClr val="464646"/>
-                </a:solidFill>
-                <a:latin typeface="Segoe UI" panose="020B0502040204020203" pitchFamily="34" charset="0"/>
-              </a:rPr>
-              <a:t>Ведущий специалист</a:t>
-            </a:r>
-            <a:endParaRPr lang="ru-RU" sz="800" i="1" dirty="0">
-              <a:solidFill>
-                <a:srgbClr val="227838"/>
-              </a:solidFill>
-              <a:latin typeface="Segoe UI" panose="020B0502040204020203" pitchFamily="34" charset="0"/>
-            </a:endParaRPr>
-          </a:p>
-          <a:p>
-            <a:pPr algn="ctr">
-              <a:lnSpc>
-                <a:spcPct val="90000"/>
-              </a:lnSpc>
-            </a:pPr>
-            <a:r>
-              <a:rPr lang="ru-RU" sz="1000" b="1" dirty="0">
-                <a:solidFill>
-                  <a:srgbClr val="1F3864"/>
-                </a:solidFill>
-                <a:latin typeface="Segoe UI" panose="020B0502040204020203" pitchFamily="34" charset="0"/>
-              </a:rPr>
-              <a:t>Бекжанова Нагима</a:t>
-            </a:r>
-            <a:r>
-              <a:rPr lang="ru-RU" sz="900" b="0" dirty="0">
-                <a:solidFill>
-                  <a:srgbClr val="227838"/>
-                </a:solidFill>
-                <a:latin typeface="Segoe UI" panose="020B0502040204020203" pitchFamily="34" charset="0"/>
-              </a:rPr>
-              <a:t> · 700 000</a:t>
-            </a:r>
-            <a:endParaRPr lang="ru-RU" sz="1100" b="1" dirty="0">
-              <a:solidFill>
-                <a:srgbClr val="1F3864"/>
-              </a:solidFill>
-              <a:latin typeface="Segoe UI" panose="020B0502040204020203" pitchFamily="34" charset="0"/>
-            </a:endParaRPr>
-          </a:p>
-        </p:txBody>
-      </p:sp>
-      <p:sp>
-        <p:nvSpPr>
-          <p:cNvPr id="279" name="Сотрудник 279"/>
-          <p:cNvSpPr/>
-          <p:nvPr/>
-        </p:nvSpPr>
-        <p:spPr>
-          <a:xfrm>
-            <a:off x="228600" y="2819400"/>
-            <a:ext cx="1968500" cy="508000"/>
-          </a:xfrm>
-          <a:prstGeom prst="roundRect">
-            <a:avLst>
-              <a:gd name="adj" fmla="val 12000"/>
-            </a:avLst>
-          </a:prstGeom>
-          <a:solidFill>
-            <a:srgbClr val="E9F3EA"/>
-          </a:solidFill>
-          <a:ln w="12700">
-            <a:solidFill>
-              <a:srgbClr val="227838"/>
-            </a:solidFill>
-          </a:ln>
-        </p:spPr>
-        <p:txBody>
-          <a:bodyPr lIns="50800" tIns="12700" rIns="50800" bIns="12700" rtlCol="0" anchor="ctr"/>
-          <a:lstStyle/>
-          <a:p>
-            <a:pPr algn="ctr">
-              <a:lnSpc>
-                <a:spcPct val="90000"/>
-              </a:lnSpc>
-            </a:pPr>
-            <a:r>
-              <a:rPr lang="ru-RU" sz="1000" dirty="0">
-                <a:solidFill>
-                  <a:srgbClr val="464646"/>
-                </a:solidFill>
-                <a:latin typeface="Segoe UI" panose="020B0502040204020203" pitchFamily="34" charset="0"/>
-              </a:rPr>
-              <a:t>Гл. специалист, PR — пресс-секретарь</a:t>
-            </a:r>
-            <a:endParaRPr lang="ru-RU" sz="1000" dirty="0">
-              <a:solidFill>
-                <a:srgbClr val="464646"/>
-              </a:solidFill>
-              <a:latin typeface="Segoe UI" panose="020B0502040204020203" pitchFamily="34" charset="0"/>
-            </a:endParaRPr>
-          </a:p>
-          <a:p>
-            <a:pPr algn="ctr">
-              <a:lnSpc>
-                <a:spcPct val="90000"/>
-              </a:lnSpc>
-            </a:pPr>
-            <a:r>
-              <a:rPr lang="ru-RU" sz="1000" b="1" dirty="0">
-                <a:solidFill>
-                  <a:srgbClr val="1F3864"/>
-                </a:solidFill>
-                <a:latin typeface="Segoe UI" panose="020B0502040204020203" pitchFamily="34" charset="0"/>
-              </a:rPr>
-              <a:t>Талғат Айман</a:t>
-            </a:r>
-            <a:r>
-              <a:rPr lang="ru-RU" sz="900" b="0" dirty="0">
-                <a:solidFill>
-                  <a:srgbClr val="227838"/>
-                </a:solidFill>
-                <a:latin typeface="Segoe UI" panose="020B0502040204020203" pitchFamily="34" charset="0"/>
-              </a:rPr>
-              <a:t> · 1 000 000</a:t>
-            </a:r>
-            <a:endParaRPr lang="ru-RU" sz="1100" b="1" dirty="0">
-              <a:solidFill>
-                <a:srgbClr val="1F3864"/>
-              </a:solidFill>
-              <a:latin typeface="Segoe UI" panose="020B0502040204020203" pitchFamily="34" charset="0"/>
-            </a:endParaRPr>
-          </a:p>
-        </p:txBody>
-      </p:sp>
-      <p:sp>
-        <p:nvSpPr>
-          <p:cNvPr id="280" name="Сотрудник 280"/>
-          <p:cNvSpPr/>
-          <p:nvPr/>
-        </p:nvSpPr>
-        <p:spPr>
-          <a:xfrm>
-            <a:off x="228600" y="3378200"/>
-            <a:ext cx="1968500" cy="508000"/>
-          </a:xfrm>
-          <a:prstGeom prst="roundRect">
-            <a:avLst>
-              <a:gd name="adj" fmla="val 12000"/>
-            </a:avLst>
-          </a:prstGeom>
-          <a:solidFill>
-            <a:srgbClr val="E9F3EA"/>
-          </a:solidFill>
-          <a:ln w="12700">
-            <a:solidFill>
-              <a:srgbClr val="227838"/>
-            </a:solidFill>
-          </a:ln>
-        </p:spPr>
-        <p:txBody>
-          <a:bodyPr lIns="50800" tIns="12700" rIns="50800" bIns="12700" rtlCol="0" anchor="ctr"/>
-          <a:lstStyle/>
-          <a:p>
-            <a:pPr algn="ctr">
-              <a:lnSpc>
-                <a:spcPct val="90000"/>
-              </a:lnSpc>
-            </a:pPr>
-            <a:r>
-              <a:rPr lang="ru-RU" sz="1000" dirty="0">
-                <a:solidFill>
-                  <a:srgbClr val="464646"/>
-                </a:solidFill>
-                <a:latin typeface="Segoe UI" panose="020B0502040204020203" pitchFamily="34" charset="0"/>
-              </a:rPr>
-              <a:t>Вед. специалист, фотограф-рилсмейкер</a:t>
-            </a:r>
-            <a:endParaRPr lang="ru-RU" sz="1000" dirty="0">
-              <a:solidFill>
-                <a:srgbClr val="464646"/>
-              </a:solidFill>
-              <a:latin typeface="Segoe UI" panose="020B0502040204020203" pitchFamily="34" charset="0"/>
-            </a:endParaRPr>
-          </a:p>
-          <a:p>
-            <a:pPr algn="ctr">
-              <a:lnSpc>
-                <a:spcPct val="90000"/>
-              </a:lnSpc>
-            </a:pPr>
-            <a:r>
-              <a:rPr lang="ru-RU" sz="1000" b="1" dirty="0">
-                <a:solidFill>
-                  <a:srgbClr val="1F3864"/>
-                </a:solidFill>
-                <a:latin typeface="Segoe UI" panose="020B0502040204020203" pitchFamily="34" charset="0"/>
-              </a:rPr>
-              <a:t>Жумабай</a:t>
-            </a:r>
-            <a:r>
-              <a:rPr lang="ru-RU" sz="900" b="0" dirty="0">
-                <a:solidFill>
-                  <a:srgbClr val="227838"/>
-                </a:solidFill>
-                <a:latin typeface="Segoe UI" panose="020B0502040204020203" pitchFamily="34" charset="0"/>
-              </a:rPr>
-              <a:t> · 1 000 000</a:t>
-            </a:r>
-            <a:endParaRPr lang="ru-RU" sz="1100" b="1" dirty="0">
-              <a:solidFill>
-                <a:srgbClr val="1F3864"/>
-              </a:solidFill>
-              <a:latin typeface="Segoe UI" panose="020B0502040204020203" pitchFamily="34" charset="0"/>
-            </a:endParaRPr>
-          </a:p>
-        </p:txBody>
-      </p:sp>
-      <p:sp>
-        <p:nvSpPr>
-          <p:cNvPr id="281" name="Сотрудник 281"/>
-          <p:cNvSpPr/>
-          <p:nvPr/>
-        </p:nvSpPr>
-        <p:spPr>
-          <a:xfrm>
-            <a:off x="228600" y="3937000"/>
-            <a:ext cx="1968500" cy="508000"/>
-          </a:xfrm>
-          <a:prstGeom prst="roundRect">
-            <a:avLst>
-              <a:gd name="adj" fmla="val 12000"/>
-            </a:avLst>
-          </a:prstGeom>
-          <a:solidFill>
-            <a:srgbClr val="E9F3EA"/>
-          </a:solidFill>
-          <a:ln w="12700">
-            <a:solidFill>
-              <a:srgbClr val="227838"/>
-            </a:solidFill>
-          </a:ln>
-        </p:spPr>
-        <p:txBody>
-          <a:bodyPr lIns="50800" tIns="12700" rIns="50800" bIns="12700" rtlCol="0" anchor="ctr"/>
-          <a:lstStyle/>
-          <a:p>
-            <a:pPr algn="ctr">
-              <a:lnSpc>
-                <a:spcPct val="90000"/>
-              </a:lnSpc>
-            </a:pPr>
-            <a:r>
-              <a:rPr lang="ru-RU" sz="1000" dirty="0">
-                <a:solidFill>
-                  <a:srgbClr val="464646"/>
-                </a:solidFill>
-                <a:latin typeface="Segoe UI" panose="020B0502040204020203" pitchFamily="34" charset="0"/>
-              </a:rPr>
-              <a:t>Вед. специалист, менеджер по блогерам</a:t>
-            </a:r>
-            <a:endParaRPr lang="ru-RU" sz="1000" dirty="0">
-              <a:solidFill>
-                <a:srgbClr val="464646"/>
-              </a:solidFill>
-              <a:latin typeface="Segoe UI" panose="020B0502040204020203" pitchFamily="34" charset="0"/>
-            </a:endParaRPr>
-          </a:p>
-          <a:p>
-            <a:pPr algn="ctr">
-              <a:lnSpc>
-                <a:spcPct val="90000"/>
-              </a:lnSpc>
-            </a:pPr>
-            <a:r>
-              <a:rPr lang="ru-RU" sz="1000" b="1" dirty="0">
-                <a:solidFill>
-                  <a:srgbClr val="1F3864"/>
-                </a:solidFill>
-                <a:latin typeface="Segoe UI" panose="020B0502040204020203" pitchFamily="34" charset="0"/>
-              </a:rPr>
-              <a:t>Дутбаева</a:t>
-            </a:r>
-            <a:r>
-              <a:rPr lang="ru-RU" sz="900" b="0" dirty="0">
-                <a:solidFill>
-                  <a:srgbClr val="227838"/>
-                </a:solidFill>
-                <a:latin typeface="Segoe UI" panose="020B0502040204020203" pitchFamily="34" charset="0"/>
-              </a:rPr>
-              <a:t> · 700 000</a:t>
-            </a:r>
-            <a:endParaRPr lang="ru-RU" sz="1100" b="1" dirty="0">
-              <a:solidFill>
-                <a:srgbClr val="1F3864"/>
-              </a:solidFill>
-              <a:latin typeface="Segoe UI" panose="020B0502040204020203" pitchFamily="34" charset="0"/>
-            </a:endParaRPr>
-          </a:p>
-        </p:txBody>
-      </p:sp>
-      <p:sp>
-        <p:nvSpPr>
-          <p:cNvPr id="282" name="Аутсорс 282"/>
-          <p:cNvSpPr/>
-          <p:nvPr/>
-        </p:nvSpPr>
-        <p:spPr>
-          <a:xfrm>
-            <a:off x="228600" y="4495800"/>
-            <a:ext cx="1968500" cy="431800"/>
-          </a:xfrm>
-          <a:prstGeom prst="roundRect">
-            <a:avLst>
-              <a:gd name="adj" fmla="val 12000"/>
-            </a:avLst>
-          </a:prstGeom>
-          <a:solidFill>
-            <a:srgbClr val="FFF2CC"/>
-          </a:solidFill>
-          <a:ln w="12700">
-            <a:solidFill>
-              <a:srgbClr val="BF9000"/>
-            </a:solidFill>
-            <a:prstDash val="dash"/>
-          </a:ln>
-        </p:spPr>
-        <p:txBody>
-          <a:bodyPr lIns="50800" tIns="12700" rIns="50800" bIns="12700" rtlCol="0" anchor="ctr"/>
-          <a:lstStyle/>
-          <a:p>
-            <a:pPr algn="ctr">
-              <a:lnSpc>
-                <a:spcPct val="90000"/>
-              </a:lnSpc>
-            </a:pPr>
-            <a:r>
-              <a:rPr lang="ru-RU" sz="1000" b="1" dirty="0">
-                <a:solidFill>
-                  <a:srgbClr val="7F6000"/>
-                </a:solidFill>
-                <a:latin typeface="Segoe UI" panose="020B0502040204020203" pitchFamily="34" charset="0"/>
-              </a:rPr>
-              <a:t>Режиссёр, видеограф-монтажёр </a:t>
-            </a:r>
-            <a:r>
-              <a:rPr lang="ru-RU" sz="1000" i="1" dirty="0" b="0">
-                <a:solidFill>
-                  <a:srgbClr val="7F6000"/>
-                </a:solidFill>
-                <a:latin typeface="Segoe UI" panose="020B0502040204020203" pitchFamily="34" charset="0"/>
-              </a:rPr>
-              <a:t>(аутсорс)</a:t>
-            </a:r>
-            <a:endParaRPr lang="ru-RU" sz="1000" i="1" dirty="0">
-              <a:solidFill>
-                <a:srgbClr val="7F6000"/>
-              </a:solidFill>
-              <a:latin typeface="Segoe UI" panose="020B0502040204020203" pitchFamily="34" charset="0"/>
-            </a:endParaRPr>
-          </a:p>
-        </p:txBody>
-      </p:sp>
-      <p:sp>
-        <p:nvSpPr>
-          <p:cNvPr id="283" name="Аутсорс 283"/>
-          <p:cNvSpPr/>
-          <p:nvPr/>
-        </p:nvSpPr>
-        <p:spPr>
-          <a:xfrm>
-            <a:off x="228600" y="4978400"/>
-            <a:ext cx="1968500" cy="330200"/>
-          </a:xfrm>
-          <a:prstGeom prst="roundRect">
-            <a:avLst>
-              <a:gd name="adj" fmla="val 12000"/>
-            </a:avLst>
-          </a:prstGeom>
-          <a:solidFill>
-            <a:srgbClr val="FFF2CC"/>
-          </a:solidFill>
-          <a:ln w="12700">
-            <a:solidFill>
-              <a:srgbClr val="BF9000"/>
-            </a:solidFill>
-            <a:prstDash val="dash"/>
-          </a:ln>
-        </p:spPr>
-        <p:txBody>
-          <a:bodyPr lIns="50800" tIns="12700" rIns="50800" bIns="12700" rtlCol="0" anchor="ctr"/>
-          <a:lstStyle/>
-          <a:p>
-            <a:pPr algn="ctr">
-              <a:lnSpc>
-                <a:spcPct val="90000"/>
-              </a:lnSpc>
-            </a:pPr>
-            <a:r>
-              <a:rPr lang="ru-RU" sz="1000" b="1" dirty="0">
-                <a:solidFill>
-                  <a:srgbClr val="7F6000"/>
-                </a:solidFill>
-                <a:latin typeface="Segoe UI" panose="020B0502040204020203" pitchFamily="34" charset="0"/>
-              </a:rPr>
-              <a:t>Копирайтер </a:t>
-            </a:r>
-            <a:r>
-              <a:rPr lang="ru-RU" sz="1000" i="1" dirty="0" b="0">
-                <a:solidFill>
-                  <a:srgbClr val="7F6000"/>
-                </a:solidFill>
-                <a:latin typeface="Segoe UI" panose="020B0502040204020203" pitchFamily="34" charset="0"/>
-              </a:rPr>
-              <a:t>(аутсорс)</a:t>
-            </a:r>
-            <a:endParaRPr lang="ru-RU" sz="1000" i="1" dirty="0">
-              <a:solidFill>
-                <a:srgbClr val="7F6000"/>
-              </a:solidFill>
-              <a:latin typeface="Segoe UI" panose="020B0502040204020203" pitchFamily="34" charset="0"/>
-            </a:endParaRPr>
-          </a:p>
-        </p:txBody>
-      </p:sp>
-      <p:sp>
-        <p:nvSpPr>
-          <p:cNvPr id="284" name="Аутсорс 284"/>
-          <p:cNvSpPr/>
-          <p:nvPr/>
-        </p:nvSpPr>
-        <p:spPr>
-          <a:xfrm>
-            <a:off x="228600" y="5359400"/>
-            <a:ext cx="1968500" cy="330200"/>
-          </a:xfrm>
-          <a:prstGeom prst="roundRect">
-            <a:avLst>
-              <a:gd name="adj" fmla="val 12000"/>
-            </a:avLst>
-          </a:prstGeom>
-          <a:solidFill>
-            <a:srgbClr val="FFF2CC"/>
-          </a:solidFill>
-          <a:ln w="12700">
-            <a:solidFill>
-              <a:srgbClr val="BF9000"/>
-            </a:solidFill>
-            <a:prstDash val="dash"/>
-          </a:ln>
-        </p:spPr>
-        <p:txBody>
-          <a:bodyPr lIns="50800" tIns="12700" rIns="50800" bIns="12700" rtlCol="0" anchor="ctr"/>
-          <a:lstStyle/>
-          <a:p>
-            <a:pPr algn="ctr">
-              <a:lnSpc>
-                <a:spcPct val="90000"/>
-              </a:lnSpc>
-            </a:pPr>
-            <a:r>
-              <a:rPr lang="ru-RU" sz="1000" b="1" dirty="0">
-                <a:solidFill>
-                  <a:srgbClr val="7F6000"/>
-                </a:solidFill>
-                <a:latin typeface="Segoe UI" panose="020B0502040204020203" pitchFamily="34" charset="0"/>
-              </a:rPr>
-              <a:t>Дизайнер </a:t>
-            </a:r>
-            <a:r>
-              <a:rPr lang="ru-RU" sz="1000" i="1" dirty="0" b="0">
-                <a:solidFill>
-                  <a:srgbClr val="7F6000"/>
-                </a:solidFill>
-                <a:latin typeface="Segoe UI" panose="020B0502040204020203" pitchFamily="34" charset="0"/>
-              </a:rPr>
-              <a:t>(аутсорс)</a:t>
-            </a:r>
-            <a:endParaRPr lang="ru-RU" sz="1000" i="1" dirty="0">
-              <a:solidFill>
-                <a:srgbClr val="7F6000"/>
-              </a:solidFill>
-              <a:latin typeface="Segoe UI" panose="020B0502040204020203" pitchFamily="34" charset="0"/>
-            </a:endParaRPr>
-          </a:p>
-        </p:txBody>
-      </p:sp>
-      <p:sp>
-        <p:nvSpPr>
-          <p:cNvPr id="285" name="Аутсорс 285"/>
-          <p:cNvSpPr/>
-          <p:nvPr/>
-        </p:nvSpPr>
-        <p:spPr>
-          <a:xfrm>
-            <a:off x="228600" y="5740400"/>
-            <a:ext cx="1968500" cy="508000"/>
-          </a:xfrm>
-          <a:prstGeom prst="roundRect">
-            <a:avLst>
-              <a:gd name="adj" fmla="val 12000"/>
-            </a:avLst>
-          </a:prstGeom>
-          <a:solidFill>
-            <a:srgbClr val="FFF2CC"/>
-          </a:solidFill>
-          <a:ln w="12700">
-            <a:solidFill>
-              <a:srgbClr val="BF9000"/>
-            </a:solidFill>
-            <a:prstDash val="dash"/>
-          </a:ln>
-        </p:spPr>
-        <p:txBody>
-          <a:bodyPr lIns="50800" tIns="12700" rIns="50800" bIns="12700" rtlCol="0" anchor="ctr"/>
-          <a:lstStyle/>
-          <a:p>
-            <a:pPr algn="ctr">
-              <a:lnSpc>
-                <a:spcPct val="90000"/>
-              </a:lnSpc>
-            </a:pPr>
-            <a:r>
-              <a:rPr lang="ru-RU" sz="1000" b="1" dirty="0">
-                <a:solidFill>
-                  <a:srgbClr val="7F6000"/>
-                </a:solidFill>
-                <a:latin typeface="Segoe UI" panose="020B0502040204020203" pitchFamily="34" charset="0"/>
-              </a:rPr>
-              <a:t>Менеджер по креаторам и креативным проектам </a:t>
-            </a:r>
-            <a:r>
-              <a:rPr lang="ru-RU" sz="1000" i="1" dirty="0" b="0">
-                <a:solidFill>
-                  <a:srgbClr val="7F6000"/>
-                </a:solidFill>
-                <a:latin typeface="Segoe UI" panose="020B0502040204020203" pitchFamily="34" charset="0"/>
-              </a:rPr>
-              <a:t>(аутсорс)</a:t>
-            </a:r>
-            <a:endParaRPr lang="ru-RU" sz="1000" i="1" dirty="0">
-              <a:solidFill>
-                <a:srgbClr val="7F6000"/>
-              </a:solidFill>
-              <a:latin typeface="Segoe UI" panose="020B0502040204020203" pitchFamily="34" charset="0"/>
-            </a:endParaRPr>
-          </a:p>
-        </p:txBody>
-      </p:sp>
-      <p:sp>
-        <p:nvSpPr>
-          <p:cNvPr id="294" name="Итог 294"/>
-          <p:cNvSpPr/>
-          <p:nvPr/>
-        </p:nvSpPr>
-        <p:spPr>
-          <a:xfrm>
-            <a:off x="9639300" y="5099685"/>
-            <a:ext cx="2286000" cy="736600"/>
-          </a:xfrm>
-          <a:prstGeom prst="roundRect">
-            <a:avLst>
-              <a:gd name="adj" fmla="val 12000"/>
-            </a:avLst>
-          </a:prstGeom>
-          <a:solidFill>
-            <a:srgbClr val="E1E1E1"/>
-          </a:solidFill>
-          <a:ln w="12700">
-            <a:solidFill>
-              <a:srgbClr val="E1E1E1"/>
-            </a:solidFill>
-          </a:ln>
-        </p:spPr>
-        <p:txBody>
-          <a:bodyPr lIns="50800" tIns="12700" rIns="50800" bIns="12700" rtlCol="0" anchor="ctr"/>
-          <a:lstStyle/>
-          <a:p>
-            <a:pPr algn="ctr">
-              <a:lnSpc>
-                <a:spcPct val="90000"/>
-              </a:lnSpc>
-            </a:pPr>
-            <a:r>
-              <a:rPr lang="ru-RU" sz="1000" b="1" dirty="0">
-                <a:solidFill>
-                  <a:srgbClr val="1F3864"/>
-                </a:solidFill>
-                <a:latin typeface="Segoe UI" panose="020B0502040204020203" pitchFamily="34" charset="0"/>
-              </a:rPr>
-              <a:t>Всего в штате — </a:t>
-            </a:r>
-            <a:r>
-              <a:rPr lang="ru-RU" sz="1000" b="1" dirty="0">
-                <a:solidFill>
-                  <a:srgbClr val="FF0000"/>
-                </a:solidFill>
-                <a:latin typeface="Segoe UI" panose="020B0502040204020203" pitchFamily="34" charset="0"/>
-              </a:rPr>
-              <a:t>30</a:t>
-            </a:r>
-            <a:endParaRPr lang="ru-RU" sz="1000" b="1" dirty="0">
-              <a:solidFill>
-                <a:srgbClr val="FF0000"/>
-              </a:solidFill>
-              <a:latin typeface="Segoe UI" panose="020B0502040204020203" pitchFamily="34" charset="0"/>
-            </a:endParaRPr>
-          </a:p>
-          <a:p>
-            <a:pPr algn="ctr">
-              <a:lnSpc>
-                <a:spcPct val="90000"/>
-              </a:lnSpc>
-            </a:pPr>
-            <a:r>
-              <a:rPr lang="ru-RU" sz="1000" b="1" dirty="0">
-                <a:solidFill>
-                  <a:srgbClr val="1F3864"/>
-                </a:solidFill>
-                <a:latin typeface="Segoe UI" panose="020B0502040204020203" pitchFamily="34" charset="0"/>
-              </a:rPr>
-              <a:t>ЦАКФ и проектный офис</a:t>
-            </a:r>
-            <a:endParaRPr lang="ru-RU" sz="1000" b="1" dirty="0">
-              <a:solidFill>
-                <a:srgbClr val="1F3864"/>
-              </a:solidFill>
-              <a:latin typeface="Segoe UI" panose="020B0502040204020203" pitchFamily="34" charset="0"/>
-            </a:endParaRPr>
-          </a:p>
-          <a:p>
-            <a:pPr algn="ctr">
-              <a:lnSpc>
-                <a:spcPct val="90000"/>
-              </a:lnSpc>
-            </a:pPr>
-            <a:r>
-              <a:rPr lang="ru-RU" sz="900" dirty="0">
-                <a:solidFill>
-                  <a:srgbClr val="1F3864"/>
-                </a:solidFill>
-                <a:latin typeface="Segoe UI" panose="020B0502040204020203" pitchFamily="34" charset="0"/>
-              </a:rPr>
-              <a:t>в 2026 — 18, в 2027 — +12</a:t>
-            </a:r>
-            <a:endParaRPr lang="ru-RU" sz="800" i="1" dirty="0">
-              <a:solidFill>
-                <a:srgbClr val="1F3864"/>
-              </a:solidFill>
-              <a:latin typeface="Segoe UI" panose="020B0502040204020203" pitchFamily="34" charset="0"/>
-            </a:endParaRPr>
-          </a:p>
-          <a:p>
-            <a:pPr algn="ctr">
-              <a:lnSpc>
-                <a:spcPct val="90000"/>
-              </a:lnSpc>
-            </a:pPr>
-            <a:r>
-              <a:rPr lang="ru-RU" sz="900" b="1" dirty="0">
-                <a:solidFill>
-                  <a:srgbClr val="7F6000"/>
-                </a:solidFill>
-                <a:latin typeface="Segoe UI" panose="020B0502040204020203" pitchFamily="34" charset="0"/>
-              </a:rPr>
-              <a:t>аутсорс — 7 позиций</a:t>
-            </a:r>
-            <a:endParaRPr lang="ru-RU" sz="900" b="1" dirty="0">
-              <a:solidFill>
-                <a:srgbClr val="7F6000"/>
-              </a:solidFill>
-              <a:latin typeface="Segoe UI" panose="020B0502040204020203" pitchFamily="34" charset="0"/>
-            </a:endParaRPr>
-          </a:p>
-        </p:txBody>
-      </p:sp>
-      <p:sp>
-        <p:nvSpPr>
-          <p:cNvPr id="306" name="Сотрудник 306"/>
-          <p:cNvSpPr/>
-          <p:nvPr/>
-        </p:nvSpPr>
-        <p:spPr>
-          <a:xfrm>
-            <a:off x="4724400" y="4660900"/>
-            <a:ext cx="2590800" cy="355600"/>
-          </a:xfrm>
-          <a:prstGeom prst="roundRect">
-            <a:avLst>
-              <a:gd name="adj" fmla="val 12000"/>
-            </a:avLst>
-          </a:prstGeom>
-          <a:solidFill>
-            <a:srgbClr val="E6DFF3"/>
-          </a:solidFill>
-          <a:ln w="12700">
-            <a:solidFill>
-              <a:srgbClr val="227838"/>
-            </a:solidFill>
-          </a:ln>
-        </p:spPr>
-        <p:txBody>
-          <a:bodyPr lIns="50800" tIns="12700" rIns="50800" bIns="12700" rtlCol="0" anchor="ctr"/>
-          <a:lstStyle/>
-          <a:p>
-            <a:pPr algn="ctr">
-              <a:lnSpc>
-                <a:spcPct val="90000"/>
-              </a:lnSpc>
-            </a:pPr>
-            <a:r>
-              <a:rPr lang="ru-RU" sz="1000" dirty="0">
-                <a:solidFill>
-                  <a:srgbClr val="464646"/>
-                </a:solidFill>
-                <a:latin typeface="Segoe UI" panose="020B0502040204020203" pitchFamily="34" charset="0"/>
-              </a:rPr>
-              <a:t>Вед. специалист (молодёжь, НПО)</a:t>
-            </a:r>
-            <a:endParaRPr lang="ru-RU" sz="1000" dirty="0">
-              <a:solidFill>
-                <a:srgbClr val="464646"/>
-              </a:solidFill>
-              <a:latin typeface="Segoe UI" panose="020B0502040204020203" pitchFamily="34" charset="0"/>
-            </a:endParaRPr>
-          </a:p>
-          <a:p>
-            <a:pPr algn="ctr">
-              <a:lnSpc>
-                <a:spcPct val="90000"/>
-              </a:lnSpc>
-            </a:pPr>
-            <a:r>
-              <a:rPr lang="ru-RU" sz="1000" b="1" dirty="0">
-                <a:solidFill>
-                  <a:srgbClr val="1F3864"/>
-                </a:solidFill>
-                <a:latin typeface="Segoe UI" panose="020B0502040204020203" pitchFamily="34" charset="0"/>
-              </a:rPr>
-              <a:t>Абулхан Ә.</a:t>
-            </a:r>
-            <a:r>
-              <a:rPr lang="ru-RU" sz="900" b="0" dirty="0">
-                <a:solidFill>
-                  <a:srgbClr val="227838"/>
-                </a:solidFill>
-                <a:latin typeface="Segoe UI" panose="020B0502040204020203" pitchFamily="34" charset="0"/>
-              </a:rPr>
-              <a:t> · 800 000</a:t>
-            </a:r>
-            <a:endParaRPr lang="ru-RU" sz="1100" b="1" dirty="0">
-              <a:solidFill>
-                <a:srgbClr val="1F3864"/>
-              </a:solidFill>
-              <a:latin typeface="Segoe UI" panose="020B0502040204020203" pitchFamily="34" charset="0"/>
-            </a:endParaRPr>
-          </a:p>
-        </p:txBody>
-      </p:sp>
-      <p:sp>
-        <p:nvSpPr>
-          <p:cNvPr id="308" name="Сотрудник 308"/>
-          <p:cNvSpPr/>
-          <p:nvPr/>
-        </p:nvSpPr>
-        <p:spPr>
-          <a:xfrm>
-            <a:off x="7620000" y="3251200"/>
-            <a:ext cx="1701800" cy="508000"/>
-          </a:xfrm>
-          <a:prstGeom prst="roundRect">
-            <a:avLst>
-              <a:gd name="adj" fmla="val 12000"/>
-            </a:avLst>
-          </a:prstGeom>
-          <a:solidFill>
-            <a:srgbClr val="E6DFF3"/>
-          </a:solidFill>
-          <a:ln w="12700">
-            <a:solidFill>
-              <a:srgbClr val="787878"/>
-            </a:solidFill>
-            <a:prstDash val="dash"/>
-          </a:ln>
-        </p:spPr>
-        <p:txBody>
-          <a:bodyPr lIns="50800" tIns="12700" rIns="50800" bIns="12700" rtlCol="0" anchor="ctr"/>
-          <a:lstStyle/>
-          <a:p>
-            <a:pPr algn="ctr">
-              <a:lnSpc>
-                <a:spcPct val="90000"/>
-              </a:lnSpc>
-            </a:pPr>
-            <a:r>
-              <a:rPr lang="ru-RU" sz="900" dirty="0">
-                <a:solidFill>
-                  <a:srgbClr val="787878"/>
-                </a:solidFill>
-                <a:latin typeface="Segoe UI" panose="020B0502040204020203" pitchFamily="34" charset="0"/>
-              </a:rPr>
-              <a:t>Эксперт по отходам/воде/воздуху</a:t>
-            </a:r>
-            <a:endParaRPr lang="ru-RU" sz="900" dirty="0">
-              <a:solidFill>
-                <a:srgbClr val="464646"/>
-              </a:solidFill>
-              <a:latin typeface="Segoe UI" panose="020B0502040204020203" pitchFamily="34" charset="0"/>
-            </a:endParaRPr>
-          </a:p>
-          <a:p>
-            <a:pPr algn="ctr">
-              <a:lnSpc>
-                <a:spcPct val="90000"/>
-              </a:lnSpc>
-            </a:pPr>
-            <a:r>
-              <a:rPr lang="ru-RU" sz="900" b="0" i="1" dirty="0">
-                <a:solidFill>
-                  <a:srgbClr val="787878"/>
-                </a:solidFill>
-                <a:latin typeface="Segoe UI" panose="020B0502040204020203" pitchFamily="34" charset="0"/>
-              </a:rPr>
-              <a:t>вакансия</a:t>
-            </a:r>
-            <a:r>
-              <a:rPr lang="ru-RU" sz="900" b="0" dirty="0">
-                <a:solidFill>
-                  <a:srgbClr val="227838"/>
-                </a:solidFill>
-                <a:latin typeface="Segoe UI" panose="020B0502040204020203" pitchFamily="34" charset="0"/>
-              </a:rPr>
-              <a:t> · 800 000</a:t>
-            </a:r>
-            <a:endParaRPr lang="ru-RU" sz="900" b="1" dirty="0">
-              <a:solidFill>
-                <a:srgbClr val="1F3864"/>
-              </a:solidFill>
-              <a:latin typeface="Segoe UI" panose="020B0502040204020203" pitchFamily="34" charset="0"/>
-            </a:endParaRPr>
-          </a:p>
-        </p:txBody>
-      </p:sp>
-      <p:sp>
-        <p:nvSpPr>
-          <p:cNvPr id="310" name="Сотрудник 310"/>
-          <p:cNvSpPr/>
-          <p:nvPr/>
-        </p:nvSpPr>
-        <p:spPr>
-          <a:xfrm>
-            <a:off x="7620000" y="2692400"/>
-            <a:ext cx="1701800" cy="508000"/>
-          </a:xfrm>
-          <a:prstGeom prst="roundRect">
-            <a:avLst>
-              <a:gd name="adj" fmla="val 12000"/>
-            </a:avLst>
-          </a:prstGeom>
-          <a:solidFill>
-            <a:srgbClr val="E6DFF3"/>
-          </a:solidFill>
+        </p:txBody>
+      </p:sp>
+      <p:cxnSp>
+        <p:nvCxnSpPr>
+          <p:cNvPr id="111" name="Линия 425"/>
+          <p:cNvCxnSpPr/>
+          <p:nvPr/>
+        </p:nvCxnSpPr>
+        <p:spPr>
+          <a:xfrm>
+            <a:off x="9321800" y="3937000"/>
+            <a:ext cx="76200" cy="0"/>
+          </a:xfrm>
+          <a:prstGeom prst="line">
+            <a:avLst/>
+          </a:prstGeom>
           <a:ln w="12700">
             <a:solidFill>
               <a:srgbClr val="1F3864"/>
             </a:solidFill>
           </a:ln>
         </p:spPr>
-        <p:txBody>
-          <a:bodyPr lIns="50800" tIns="12700" rIns="50800" bIns="12700" rtlCol="0" anchor="ctr"/>
-          <a:lstStyle/>
-          <a:p>
-            <a:pPr algn="ctr">
-              <a:lnSpc>
-                <a:spcPct val="90000"/>
-              </a:lnSpc>
-            </a:pPr>
-            <a:r>
-              <a:rPr lang="ru-RU" sz="1000" dirty="0">
-                <a:solidFill>
-                  <a:srgbClr val="464646"/>
-                </a:solidFill>
-                <a:latin typeface="Segoe UI" panose="020B0502040204020203" pitchFamily="34" charset="0"/>
-              </a:rPr>
-              <a:t>Эксперт-эколог</a:t>
-            </a:r>
-            <a:endParaRPr lang="ru-RU" sz="1000" dirty="0">
-              <a:solidFill>
-                <a:srgbClr val="464646"/>
-              </a:solidFill>
-              <a:latin typeface="Segoe UI" panose="020B0502040204020203" pitchFamily="34" charset="0"/>
-            </a:endParaRPr>
-          </a:p>
-          <a:p>
-            <a:pPr algn="ctr">
-              <a:lnSpc>
-                <a:spcPct val="90000"/>
-              </a:lnSpc>
-            </a:pPr>
-            <a:r>
-              <a:rPr lang="ru-RU" sz="1000" b="1" dirty="0">
-                <a:solidFill>
-                  <a:srgbClr val="1F3864"/>
-                </a:solidFill>
-                <a:latin typeface="Segoe UI" panose="020B0502040204020203" pitchFamily="34" charset="0"/>
-              </a:rPr>
-              <a:t>Загирова Анастасия</a:t>
-            </a:r>
-            <a:br>
-              <a:rPr lang="ru-RU" sz="900" b="0" dirty="0">
-                <a:solidFill>
-                  <a:srgbClr val="227838"/>
-                </a:solidFill>
-                <a:latin typeface="Segoe UI" panose="020B0502040204020203" pitchFamily="34" charset="0"/>
-              </a:rPr>
-            </a:br>
-            <a:r>
-              <a:rPr lang="ru-RU" sz="900" b="0" dirty="0">
-                <a:solidFill>
-                  <a:srgbClr val="227838"/>
-                </a:solidFill>
-                <a:latin typeface="Segoe UI" panose="020B0502040204020203" pitchFamily="34" charset="0"/>
-              </a:rPr>
-              <a:t>800 000</a:t>
-            </a:r>
-            <a:endParaRPr lang="ru-RU" sz="1100" b="1" dirty="0">
-              <a:solidFill>
-                <a:srgbClr val="1F3864"/>
-              </a:solidFill>
-              <a:latin typeface="Segoe UI" panose="020B0502040204020203" pitchFamily="34" charset="0"/>
-            </a:endParaRPr>
-          </a:p>
-        </p:txBody>
-      </p:sp>
-      <p:sp>
-        <p:nvSpPr>
-          <p:cNvPr id="316" name="Аутсорс 316"/>
-          <p:cNvSpPr/>
-          <p:nvPr/>
-        </p:nvSpPr>
-        <p:spPr>
-          <a:xfrm>
-            <a:off x="882015" y="1244600"/>
-            <a:ext cx="1480185" cy="508000"/>
-          </a:xfrm>
-          <a:prstGeom prst="roundRect">
-            <a:avLst>
-              <a:gd name="adj" fmla="val 12000"/>
-            </a:avLst>
-          </a:prstGeom>
-          <a:solidFill>
-            <a:srgbClr val="FFF2CC"/>
-          </a:solidFill>
-          <a:ln w="12700">
-            <a:solidFill>
-              <a:srgbClr val="BF9000"/>
-            </a:solidFill>
-            <a:prstDash val="dash"/>
-          </a:ln>
-        </p:spPr>
-        <p:txBody>
-          <a:bodyPr lIns="50800" tIns="12700" rIns="50800" bIns="12700" rtlCol="0" anchor="ctr"/>
-          <a:lstStyle/>
-          <a:p>
-            <a:pPr algn="ctr">
-              <a:lnSpc>
-                <a:spcPct val="90000"/>
-              </a:lnSpc>
-            </a:pPr>
-            <a:r>
-              <a:rPr lang="ru-RU" sz="1000" b="1" dirty="0">
-                <a:solidFill>
-                  <a:srgbClr val="7F6000"/>
-                </a:solidFill>
-                <a:latin typeface="Segoe UI" panose="020B0502040204020203" pitchFamily="34" charset="0"/>
-              </a:rPr>
-              <a:t>Разработчик (ИИ, ГИС), платформа </a:t>
-            </a:r>
-            <a:r>
-              <a:rPr lang="ru-RU" sz="1000" i="1" dirty="0" b="0">
-                <a:solidFill>
-                  <a:srgbClr val="7F6000"/>
-                </a:solidFill>
-                <a:latin typeface="Segoe UI" panose="020B0502040204020203" pitchFamily="34" charset="0"/>
-              </a:rPr>
-              <a:t>(аутсорс)</a:t>
-            </a:r>
-            <a:endParaRPr lang="ru-RU" sz="800" i="1" dirty="0">
-              <a:solidFill>
-                <a:srgbClr val="7F6000"/>
-              </a:solidFill>
-              <a:latin typeface="Segoe UI" panose="020B0502040204020203" pitchFamily="34" charset="0"/>
-            </a:endParaRPr>
-          </a:p>
-        </p:txBody>
-      </p:sp>
-      <p:sp>
-        <p:nvSpPr>
-          <p:cNvPr id="317" name="Аутсорс 317"/>
-          <p:cNvSpPr/>
-          <p:nvPr/>
-        </p:nvSpPr>
-        <p:spPr>
-          <a:xfrm>
-            <a:off x="9601200" y="2971800"/>
-            <a:ext cx="2006600" cy="279400"/>
-          </a:xfrm>
-          <a:prstGeom prst="roundRect">
-            <a:avLst>
-              <a:gd name="adj" fmla="val 12000"/>
-            </a:avLst>
-          </a:prstGeom>
-          <a:solidFill>
-            <a:srgbClr val="FFF2CC"/>
-          </a:solidFill>
-          <a:ln w="12700">
-            <a:solidFill>
-              <a:srgbClr val="BF9000"/>
-            </a:solidFill>
-            <a:prstDash val="dash"/>
-          </a:ln>
-        </p:spPr>
-        <p:txBody>
-          <a:bodyPr lIns="50800" tIns="12700" rIns="50800" bIns="12700" rtlCol="0" anchor="ctr"/>
-          <a:lstStyle/>
-          <a:p>
-            <a:pPr algn="ctr">
-              <a:lnSpc>
-                <a:spcPct val="90000"/>
-              </a:lnSpc>
-            </a:pPr>
-            <a:r>
-              <a:rPr lang="ru-RU" sz="1000" b="1" dirty="0">
-                <a:solidFill>
-                  <a:srgbClr val="7F6000"/>
-                </a:solidFill>
-                <a:latin typeface="Segoe UI" panose="020B0502040204020203" pitchFamily="34" charset="0"/>
-              </a:rPr>
-              <a:t>Сис.админ </a:t>
-            </a:r>
-            <a:r>
-              <a:rPr lang="ru-RU" sz="1000" i="1" dirty="0" b="0">
-                <a:solidFill>
-                  <a:srgbClr val="7F6000"/>
-                </a:solidFill>
-                <a:latin typeface="Segoe UI" panose="020B0502040204020203" pitchFamily="34" charset="0"/>
-              </a:rPr>
-              <a:t>(аутсорс)</a:t>
-            </a:r>
-            <a:endParaRPr lang="ru-RU" sz="800" i="1" dirty="0">
-              <a:solidFill>
-                <a:srgbClr val="7F6000"/>
-              </a:solidFill>
-              <a:latin typeface="Segoe UI" panose="020B0502040204020203" pitchFamily="34" charset="0"/>
-            </a:endParaRPr>
-          </a:p>
-        </p:txBody>
-      </p:sp>
-      <p:sp>
-        <p:nvSpPr>
-          <p:cNvPr id="367" name="Легенда 2027"/>
-          <p:cNvSpPr/>
-          <p:nvPr/>
-        </p:nvSpPr>
-        <p:spPr>
-          <a:xfrm>
-            <a:off x="9652000" y="5937885"/>
-            <a:ext cx="279400" cy="165100"/>
-          </a:xfrm>
-          <a:prstGeom prst="roundRect">
-            <a:avLst/>
-          </a:prstGeom>
-          <a:solidFill>
-            <a:srgbClr val="E6DFF3"/>
-          </a:solidFill>
-          <a:ln w="12700">
-            <a:solidFill>
-              <a:srgbClr val="227838"/>
-            </a:solidFill>
-          </a:ln>
-        </p:spPr>
-        <p:txBody>
-          <a:bodyPr/>
-          <a:lstStyle/>
-          <a:p>
-            <a:endParaRPr lang="ru-RU" sz="800"/>
-          </a:p>
-        </p:txBody>
-      </p:sp>
-      <p:sp>
-        <p:nvSpPr>
-          <p:cNvPr id="368" name="Легенда 2027 текст"/>
-          <p:cNvSpPr txBox="1"/>
-          <p:nvPr/>
-        </p:nvSpPr>
-        <p:spPr>
-          <a:xfrm>
-            <a:off x="10007600" y="5950585"/>
-            <a:ext cx="1905000" cy="152400"/>
-          </a:xfrm>
-          <a:prstGeom prst="rect">
-            <a:avLst/>
-          </a:prstGeom>
-          <a:noFill/>
-        </p:spPr>
-        <p:txBody>
-          <a:bodyPr wrap="square" lIns="0" tIns="0" rIns="0" bIns="0" rtlCol="0"/>
-          <a:lstStyle/>
-          <a:p>
-            <a:r>
-              <a:rPr lang="ru-RU" sz="900" dirty="0">
-                <a:solidFill>
-                  <a:srgbClr val="464646"/>
-                </a:solidFill>
-                <a:latin typeface="Segoe UI" panose="020B0502040204020203" pitchFamily="34" charset="0"/>
-              </a:rPr>
-              <a:t>приход в 2027 году</a:t>
-            </a:r>
-            <a:endParaRPr lang="ru-RU" sz="900" dirty="0">
-              <a:solidFill>
-                <a:srgbClr val="464646"/>
-              </a:solidFill>
-              <a:latin typeface="Segoe UI" panose="020B0502040204020203" pitchFamily="34" charset="0"/>
-            </a:endParaRPr>
-          </a:p>
-        </p:txBody>
-      </p:sp>
-      <p:sp>
-        <p:nvSpPr>
-          <p:cNvPr id="388" name="Численность 2027"/>
-          <p:cNvSpPr txBox="1"/>
-          <p:nvPr/>
-        </p:nvSpPr>
-        <p:spPr>
-          <a:xfrm>
-            <a:off x="228600" y="6502400"/>
-            <a:ext cx="11734800" cy="177800"/>
-          </a:xfrm>
-          <a:prstGeom prst="rect">
-            <a:avLst/>
-          </a:prstGeom>
-          <a:noFill/>
-        </p:spPr>
-        <p:txBody>
-          <a:bodyPr wrap="square" lIns="0" tIns="0" rIns="0" bIns="0" rtlCol="0" anchor="ctr"/>
-          <a:lstStyle/>
-          <a:p>
-            <a:pPr algn="l"/>
-            <a:r>
-              <a:rPr lang="ru-RU" sz="1000" dirty="0">
-                <a:solidFill>
-                  <a:srgbClr val="1F3864"/>
-                </a:solidFill>
-                <a:latin typeface="Segoe UI" panose="020B0502040204020203" pitchFamily="34" charset="0"/>
-              </a:rPr>
-              <a:t>Численность: </a:t>
-            </a:r>
-            <a:r>
-              <a:rPr lang="ru-RU" sz="1000" b="1" dirty="0">
-                <a:solidFill>
-                  <a:srgbClr val="1F3864"/>
-                </a:solidFill>
-                <a:latin typeface="Segoe UI" panose="020B0502040204020203" pitchFamily="34" charset="0"/>
-              </a:rPr>
-              <a:t>в 2026 году — 18 чел.</a:t>
-            </a:r>
-            <a:r>
-              <a:rPr lang="ru-RU" sz="1000" dirty="0">
-                <a:solidFill>
-                  <a:srgbClr val="1F3864"/>
-                </a:solidFill>
-                <a:latin typeface="Segoe UI" panose="020B0502040204020203" pitchFamily="34" charset="0"/>
-              </a:rPr>
-              <a:t>; в 2027 году приходят ещё </a:t>
-            </a:r>
-            <a:r>
-              <a:rPr lang="ru-RU" sz="1000" b="1" dirty="0">
-                <a:solidFill>
-                  <a:srgbClr val="1F3864"/>
-                </a:solidFill>
-                <a:latin typeface="Segoe UI" panose="020B0502040204020203" pitchFamily="34" charset="0"/>
-              </a:rPr>
-              <a:t>12</a:t>
-            </a:r>
-            <a:r>
-              <a:rPr lang="ru-RU" sz="1000" dirty="0">
-                <a:solidFill>
-                  <a:srgbClr val="1F3864"/>
-                </a:solidFill>
-                <a:latin typeface="Segoe UI" panose="020B0502040204020203" pitchFamily="34" charset="0"/>
-              </a:rPr>
-              <a:t> (выделены цветом) — </a:t>
-            </a:r>
-            <a:r>
-              <a:rPr lang="ru-RU" sz="1000" b="1" dirty="0">
-                <a:solidFill>
-                  <a:srgbClr val="C00000"/>
-                </a:solidFill>
-                <a:latin typeface="Segoe UI" panose="020B0502040204020203" pitchFamily="34" charset="0"/>
-              </a:rPr>
-              <a:t>всего в 2027 году 30 чел.</a:t>
-            </a:r>
-            <a:endParaRPr lang="ru-RU" sz="1000" b="1" dirty="0">
-              <a:solidFill>
-                <a:srgbClr val="C00000"/>
-              </a:solidFill>
-              <a:latin typeface="Segoe UI" panose="020B0502040204020203" pitchFamily="34" charset="0"/>
-            </a:endParaRPr>
-          </a:p>
-        </p:txBody>
-      </p:sp>
-      <p:sp>
-        <p:nvSpPr>
-          <p:cNvPr id="389" name="Фигура 389"/>
-          <p:cNvSpPr/>
-          <p:nvPr/>
-        </p:nvSpPr>
-        <p:spPr>
-          <a:xfrm>
-            <a:off x="9601200" y="1701800"/>
-            <a:ext cx="2006600" cy="304800"/>
-          </a:xfrm>
-          <a:prstGeom prst="roundRect">
-            <a:avLst>
-              <a:gd name="adj" fmla="val 12000"/>
-            </a:avLst>
-          </a:prstGeom>
-          <a:solidFill>
-            <a:srgbClr val="D6E1EE"/>
-          </a:solidFill>
-          <a:ln w="12700">
-            <a:solidFill>
-              <a:srgbClr val="1F3864"/>
-            </a:solidFill>
-          </a:ln>
-        </p:spPr>
-        <p:txBody>
-          <a:bodyPr lIns="50800" tIns="12700" rIns="50800" bIns="12700" rtlCol="0" anchor="ctr"/>
-          <a:lstStyle/>
-          <a:p>
-            <a:pPr algn="ctr">
-              <a:lnSpc>
-                <a:spcPct val="90000"/>
-              </a:lnSpc>
-            </a:pPr>
-            <a:r>
-              <a:rPr lang="ru-RU" sz="900" dirty="0">
-                <a:solidFill>
-                  <a:srgbClr val="1F3864"/>
-                </a:solidFill>
-                <a:latin typeface="Segoe UI" panose="020B0502040204020203" pitchFamily="34" charset="0"/>
-              </a:rPr>
-              <a:t>Менеджер проектов</a:t>
-            </a:r>
-            <a:r>
-              <a:rPr lang="ru-RU" sz="900" b="0" dirty="0">
-                <a:solidFill>
-                  <a:srgbClr val="227838"/>
-                </a:solidFill>
-                <a:latin typeface="Segoe UI" panose="020B0502040204020203" pitchFamily="34" charset="0"/>
-              </a:rPr>
-              <a:t> · 1 200 000</a:t>
-            </a:r>
-            <a:endParaRPr lang="ru-RU" sz="900" dirty="0">
-              <a:solidFill>
-                <a:srgbClr val="1F3864"/>
-              </a:solidFill>
-              <a:latin typeface="Segoe UI" panose="020B0502040204020203" pitchFamily="34" charset="0"/>
-            </a:endParaRPr>
-          </a:p>
-        </p:txBody>
-      </p:sp>
-      <p:sp>
-        <p:nvSpPr>
-          <p:cNvPr id="390" name="Фигура 390"/>
-          <p:cNvSpPr/>
-          <p:nvPr/>
-        </p:nvSpPr>
-        <p:spPr>
-          <a:xfrm>
-            <a:off x="9601200" y="2641600"/>
-            <a:ext cx="2006600" cy="279400"/>
-          </a:xfrm>
-          <a:prstGeom prst="roundRect">
-            <a:avLst>
-              <a:gd name="adj" fmla="val 12000"/>
-            </a:avLst>
-          </a:prstGeom>
-          <a:solidFill>
-            <a:srgbClr val="FFF2CC"/>
-          </a:solidFill>
-          <a:ln w="12700">
-            <a:solidFill>
-              <a:srgbClr val="BF9000"/>
-            </a:solidFill>
-            <a:prstDash val="dash"/>
-          </a:ln>
-        </p:spPr>
-        <p:txBody>
-          <a:bodyPr lIns="50800" tIns="12700" rIns="50800" bIns="12700" rtlCol="0" anchor="ctr"/>
-          <a:lstStyle/>
-          <a:p>
-            <a:pPr algn="ctr">
-              <a:lnSpc>
-                <a:spcPct val="90000"/>
-              </a:lnSpc>
-            </a:pPr>
-            <a:r>
-              <a:rPr lang="ru-RU" sz="1000" b="1" dirty="0">
-                <a:solidFill>
-                  <a:srgbClr val="7F6000"/>
-                </a:solidFill>
-                <a:latin typeface="Segoe UI" panose="020B0502040204020203" pitchFamily="34" charset="0"/>
-              </a:rPr>
-              <a:t>Юрист (МФЦА) </a:t>
-            </a:r>
-            <a:r>
-              <a:rPr lang="ru-RU" sz="1000" i="1" dirty="0" b="0">
-                <a:solidFill>
-                  <a:srgbClr val="7F6000"/>
-                </a:solidFill>
-                <a:latin typeface="Segoe UI" panose="020B0502040204020203" pitchFamily="34" charset="0"/>
-              </a:rPr>
-              <a:t>(аутсорс)</a:t>
-            </a:r>
-            <a:endParaRPr lang="ru-RU" sz="1000" i="1" dirty="0">
-              <a:solidFill>
-                <a:srgbClr val="7F6000"/>
-              </a:solidFill>
-              <a:latin typeface="Segoe UI" panose="020B0502040204020203" pitchFamily="34" charset="0"/>
-            </a:endParaRPr>
-          </a:p>
-        </p:txBody>
-      </p:sp>
-      <p:sp>
-        <p:nvSpPr>
-          <p:cNvPr id="391" name="Фигура 391"/>
-          <p:cNvSpPr/>
-          <p:nvPr/>
-        </p:nvSpPr>
-        <p:spPr>
-          <a:xfrm>
-            <a:off x="7620000" y="1905000"/>
-            <a:ext cx="1854200" cy="508000"/>
-          </a:xfrm>
-          <a:prstGeom prst="roundRect">
-            <a:avLst>
-              <a:gd name="adj" fmla="val 12000"/>
-            </a:avLst>
-          </a:prstGeom>
-          <a:solidFill>
-            <a:schemeClr val="accent1">
-              <a:lumMod val="75000"/>
-            </a:schemeClr>
-          </a:solidFill>
-          <a:ln w="12700">
-            <a:solidFill>
-              <a:srgbClr val="1F3864"/>
-            </a:solidFill>
-          </a:ln>
-        </p:spPr>
-        <p:txBody>
-          <a:bodyPr lIns="50800" tIns="12700" rIns="50800" bIns="12700" rtlCol="0" anchor="ctr"/>
-          <a:lstStyle/>
-          <a:p>
-            <a:pPr algn="ctr">
-              <a:lnSpc>
-                <a:spcPct val="90000"/>
-              </a:lnSpc>
-            </a:pPr>
-            <a:r>
-              <a:rPr lang="ru-RU" sz="1000" b="1" dirty="0">
-                <a:solidFill>
-                  <a:srgbClr val="FFFFFF"/>
-                </a:solidFill>
-                <a:latin typeface="Segoe UI" panose="020B0502040204020203" pitchFamily="34" charset="0"/>
-              </a:rPr>
-              <a:t>Экспертная группа (1+2)</a:t>
-            </a:r>
-            <a:endParaRPr lang="ru-RU" sz="1100" b="1" dirty="0">
-              <a:solidFill>
-                <a:srgbClr val="FFFFFF"/>
-              </a:solidFill>
-              <a:latin typeface="Segoe UI" panose="020B0502040204020203" pitchFamily="34" charset="0"/>
-            </a:endParaRPr>
-          </a:p>
-        </p:txBody>
-      </p:sp>
-      <p:sp>
-        <p:nvSpPr>
-          <p:cNvPr id="392" name="Фигура 392"/>
-          <p:cNvSpPr/>
-          <p:nvPr/>
-        </p:nvSpPr>
-        <p:spPr>
-          <a:xfrm>
-            <a:off x="7620000" y="2362200"/>
-            <a:ext cx="1854200" cy="254000"/>
-          </a:xfrm>
-          <a:prstGeom prst="roundRect">
-            <a:avLst>
-              <a:gd name="adj" fmla="val 12000"/>
-            </a:avLst>
-          </a:prstGeom>
-          <a:solidFill>
-            <a:srgbClr val="E6DFF3"/>
-          </a:solidFill>
-          <a:ln w="12700">
-            <a:solidFill>
-              <a:srgbClr val="1F3864"/>
-            </a:solidFill>
-          </a:ln>
-        </p:spPr>
-        <p:txBody>
-          <a:bodyPr lIns="50800" tIns="12700" rIns="50800" bIns="12700" rtlCol="0" anchor="ctr"/>
-          <a:lstStyle/>
-          <a:p>
-            <a:pPr algn="ctr">
-              <a:lnSpc>
-                <a:spcPct val="90000"/>
-              </a:lnSpc>
-            </a:pPr>
-            <a:r>
-              <a:rPr lang="ru-RU" sz="1000" dirty="0">
-                <a:solidFill>
-                  <a:srgbClr val="464646"/>
-                </a:solidFill>
-                <a:latin typeface="Segoe UI" panose="020B0502040204020203" pitchFamily="34" charset="0"/>
-              </a:rPr>
-              <a:t>рук. — </a:t>
-            </a:r>
-            <a:r>
-              <a:rPr lang="ru-RU" sz="1000" b="1" dirty="0">
-                <a:solidFill>
-                  <a:srgbClr val="1F3864"/>
-                </a:solidFill>
-                <a:latin typeface="Segoe UI" panose="020B0502040204020203" pitchFamily="34" charset="0"/>
-              </a:rPr>
-              <a:t>Юнусов Т.</a:t>
-            </a:r>
-            <a:r>
-              <a:rPr lang="ru-RU" sz="900" b="0" dirty="0">
-                <a:solidFill>
-                  <a:srgbClr val="227838"/>
-                </a:solidFill>
-                <a:latin typeface="Segoe UI" panose="020B0502040204020203" pitchFamily="34" charset="0"/>
-              </a:rPr>
-              <a:t> · 1 300 000</a:t>
-            </a:r>
-            <a:endParaRPr lang="ru-RU" sz="1100" b="1" dirty="0">
-              <a:solidFill>
-                <a:srgbClr val="1F3864"/>
-              </a:solidFill>
-              <a:latin typeface="Segoe UI" panose="020B0502040204020203" pitchFamily="34" charset="0"/>
-            </a:endParaRPr>
-          </a:p>
-        </p:txBody>
-      </p:sp>
-      <p:sp>
-        <p:nvSpPr>
-          <p:cNvPr id="393" name="Фигура 393"/>
-          <p:cNvSpPr/>
-          <p:nvPr/>
-        </p:nvSpPr>
-        <p:spPr>
-          <a:xfrm>
-            <a:off x="4724400" y="2692400"/>
-            <a:ext cx="2590800" cy="355600"/>
-          </a:xfrm>
-          <a:prstGeom prst="roundRect">
-            <a:avLst>
-              <a:gd name="adj" fmla="val 12000"/>
-            </a:avLst>
-          </a:prstGeom>
-          <a:solidFill>
-            <a:srgbClr val="E9F3EA"/>
-          </a:solidFill>
-          <a:ln w="12700">
-            <a:solidFill>
-              <a:srgbClr val="227838"/>
-            </a:solidFill>
-          </a:ln>
-        </p:spPr>
-        <p:txBody>
-          <a:bodyPr lIns="50800" tIns="12700" rIns="50800" bIns="12700" rtlCol="0" anchor="ctr"/>
-          <a:lstStyle/>
-          <a:p>
-            <a:pPr algn="ctr">
-              <a:lnSpc>
-                <a:spcPct val="90000"/>
-              </a:lnSpc>
-            </a:pPr>
-            <a:r>
-              <a:rPr lang="ru-RU" sz="1000" dirty="0">
-                <a:solidFill>
-                  <a:srgbClr val="464646"/>
-                </a:solidFill>
-                <a:latin typeface="Segoe UI" panose="020B0502040204020203" pitchFamily="34" charset="0"/>
-              </a:rPr>
-              <a:t>Заместитель директора (МЭПР, ЦГО, регионы)</a:t>
-            </a:r>
-            <a:r>
-              <a:rPr lang="ru-RU" sz="900" b="0" dirty="0">
-                <a:solidFill>
-                  <a:srgbClr val="227838"/>
-                </a:solidFill>
-                <a:latin typeface="Segoe UI" panose="020B0502040204020203" pitchFamily="34" charset="0"/>
-              </a:rPr>
-              <a:t> · 1 100 000</a:t>
-            </a:r>
-            <a:endParaRPr lang="ru-RU" sz="1000" dirty="0">
-              <a:solidFill>
-                <a:srgbClr val="464646"/>
-              </a:solidFill>
-              <a:latin typeface="Segoe UI" panose="020B0502040204020203" pitchFamily="34" charset="0"/>
-            </a:endParaRPr>
-          </a:p>
-        </p:txBody>
-      </p:sp>
+      </p:cxnSp>
     </p:spTree>
   </p:cSld>
   <p:clrMapOvr>
@@ -8018,6 +7843,8 @@
       </a:bgFillStyleLst>
     </a:fmtScheme>
   </a:themeElements>
+  <a:objectDefaults/>
+  <a:extraClrSchemeLst/>
   <a:extLst>
     <a:ext uri="{05A4C25C-085E-4340-85A3-A5531E510DB2}">
       <thm15:themeFamily xmlns:thm15="http://schemas.microsoft.com/office/thememl/2012/main" name="Office Theme" id="{62F939B6-93AF-4DB8-9C6B-D6C7DFDC589F}" vid="{4A3C46E8-61CC-4603-A589-7422A47A8E4A}"/>

--- a/TAZA/_документы/Структура ЦАКФ и проектного офиса ТК.pptx
+++ b/TAZA/_документы/Структура ЦАКФ и проектного офиса ТК.pptx
@@ -4795,7 +4795,7 @@
         <p:spPr>
           <a:xfrm>
             <a:off x="2641600" y="1460500"/>
-            <a:ext cx="1778000" cy="254000"/>
+            <a:ext cx="1778000" cy="381000"/>
           </a:xfrm>
           <a:prstGeom prst="roundRect">
             <a:avLst>
@@ -4836,8 +4836,9 @@
                 </a:solidFill>
                 <a:latin typeface="Segoe UI" panose="020B0502040204020203" pitchFamily="34" charset="0"/>
               </a:rPr>
-              <a:t>Тастан</a:t>
-            </a:r>
+              <a:t>Тастан Нұрбол</a:t>
+            </a:r>
+            <a:br/>
             <a:r>
               <a:rPr lang="ru-RU" sz="900" b="0" dirty="0">
                 <a:solidFill>
@@ -4845,7 +4846,7 @@
                 </a:solidFill>
                 <a:latin typeface="Segoe UI" panose="020B0502040204020203" pitchFamily="34" charset="0"/>
               </a:rPr>
-              <a:t> · 1 300 000</a:t>
+              <a:t>1 300 000</a:t>
             </a:r>
             <a:endParaRPr lang="ru-RU" sz="1100" b="1" dirty="0">
               <a:solidFill>
